--- a/Deck/SIH 2026 - 26013.pptx
+++ b/Deck/SIH 2026 - 26013.pptx
@@ -20,14 +20,11 @@
   <p:notesSz cx="6858000" cy="9144000"/>
   <p:embeddedFontLst>
     <p:embeddedFont>
-      <p:font typeface="Arial Bold" panose="020B0704020202020204" pitchFamily="34" charset="0"/>
+      <p:font typeface="Garamond" panose="02020404030301010803" pitchFamily="18" charset="0"/>
       <p:regular r:id="rId10"/>
       <p:bold r:id="rId11"/>
-    </p:embeddedFont>
-    <p:embeddedFont>
-      <p:font typeface="Garamond Bold" panose="02020804030307010803" pitchFamily="18" charset="0"/>
-      <p:regular r:id="rId12"/>
-      <p:bold r:id="rId13"/>
+      <p:italic r:id="rId12"/>
+      <p:boldItalic r:id="rId13"/>
     </p:embeddedFont>
     <p:embeddedFont>
       <p:font typeface="Segoe UI" panose="020B0502040204020203" pitchFamily="34" charset="0"/>
@@ -151,252 +148,6 @@
 </p:presentation>
 </file>
 
-<file path=ppt/charts/chart1.xml><?xml version="1.0" encoding="utf-8"?>
-<c:chartSpace xmlns:c="http://schemas.openxmlformats.org/drawingml/2006/chart" xmlns:a="http://schemas.openxmlformats.org/drawingml/2006/main" xmlns:r="http://schemas.openxmlformats.org/officeDocument/2006/relationships" xmlns:c16r2="http://schemas.microsoft.com/office/drawing/2015/06/chart">
-  <c:date1904 val="1"/>
-  <c:lang val="en-US"/>
-  <c:roundedCorners val="1"/>
-  <c:style val="2"/>
-  <c:chart>
-    <c:autoTitleDeleted val="1"/>
-    <c:plotArea>
-      <c:layout/>
-      <c:barChart>
-        <c:barDir val="col"/>
-        <c:grouping val="clustered"/>
-        <c:varyColors val="0"/>
-        <c:ser>
-          <c:idx val="0"/>
-          <c:order val="0"/>
-          <c:tx>
-            <c:v>Market Size</c:v>
-          </c:tx>
-          <c:spPr>
-            <a:solidFill>
-              <a:srgbClr val="1A4FA0"/>
-            </a:solidFill>
-          </c:spPr>
-          <c:invertIfNegative val="1"/>
-          <c:dPt>
-            <c:idx val="0"/>
-            <c:invertIfNegative val="0"/>
-            <c:bubble3D val="0"/>
-            <c:spPr>
-              <a:solidFill>
-                <a:srgbClr val="C6D8F2"/>
-              </a:solidFill>
-            </c:spPr>
-            <c:extLst>
-              <c:ext xmlns:c16="http://schemas.microsoft.com/office/drawing/2014/chart" uri="{C3380CC4-5D6E-409C-BE32-E72D297353CC}">
-                <c16:uniqueId val="{00000001-4806-3649-8A3C-35B7CC0A64F8}"/>
-              </c:ext>
-            </c:extLst>
-          </c:dPt>
-          <c:dLbls>
-            <c:numFmt formatCode="&quot;₹&quot;0.00" sourceLinked="0"/>
-            <c:spPr>
-              <a:noFill/>
-            </c:spPr>
-            <c:txPr>
-              <a:bodyPr/>
-              <a:lstStyle/>
-              <a:p>
-                <a:pPr>
-                  <a:defRPr sz="1200" b="1">
-                    <a:solidFill>
-                      <a:srgbClr val="0F2A6B"/>
-                    </a:solidFill>
-                    <a:latin typeface="Segoe UI"/>
-                  </a:defRPr>
-                </a:pPr>
-                <a:endParaRPr lang="en-US"/>
-              </a:p>
-            </c:txPr>
-            <c:showLegendKey val="0"/>
-            <c:showVal val="1"/>
-            <c:showCatName val="0"/>
-            <c:showSerName val="0"/>
-            <c:showPercent val="0"/>
-            <c:showBubbleSize val="0"/>
-            <c:showLeaderLines val="0"/>
-            <c:extLst>
-              <c:ext xmlns:c15="http://schemas.microsoft.com/office/drawing/2012/chart" uri="{CE6537A1-D6FC-4f65-9D91-7224C49458BB}">
-                <c15:showLeaderLines val="0"/>
-              </c:ext>
-            </c:extLst>
-          </c:dLbls>
-          <c:cat>
-            <c:strLit>
-              <c:ptCount val="2"/>
-              <c:pt idx="0">
-                <c:v>2024</c:v>
-              </c:pt>
-              <c:pt idx="1">
-                <c:v>2033</c:v>
-              </c:pt>
-            </c:strLit>
-          </c:cat>
-          <c:val>
-            <c:numLit>
-              <c:formatCode>General</c:formatCode>
-              <c:ptCount val="2"/>
-              <c:pt idx="0">
-                <c:v>1.77</c:v>
-              </c:pt>
-              <c:pt idx="1">
-                <c:v>4.5199999999999996</c:v>
-              </c:pt>
-            </c:numLit>
-          </c:val>
-          <c:extLst>
-            <c:ext xmlns:c14="http://schemas.microsoft.com/office/drawing/2007/8/2/chart" uri="{6F2FDCE9-48DA-4B69-8628-5D25D57E5C99}">
-              <c14:invertSolidFillFmt>
-                <c14:spPr xmlns:c14="http://schemas.microsoft.com/office/drawing/2007/8/2/chart">
-                  <a:solidFill>
-                    <a:srgbClr val="FFFFFF"/>
-                  </a:solidFill>
-                </c14:spPr>
-              </c14:invertSolidFillFmt>
-            </c:ext>
-            <c:ext xmlns:c16="http://schemas.microsoft.com/office/drawing/2014/chart" uri="{C3380CC4-5D6E-409C-BE32-E72D297353CC}">
-              <c16:uniqueId val="{00000002-4806-3649-8A3C-35B7CC0A64F8}"/>
-            </c:ext>
-          </c:extLst>
-        </c:ser>
-        <c:dLbls>
-          <c:showLegendKey val="0"/>
-          <c:showVal val="0"/>
-          <c:showCatName val="0"/>
-          <c:showSerName val="0"/>
-          <c:showPercent val="0"/>
-          <c:showBubbleSize val="0"/>
-        </c:dLbls>
-        <c:gapWidth val="120"/>
-        <c:axId val="111"/>
-        <c:axId val="222"/>
-      </c:barChart>
-      <c:catAx>
-        <c:axId val="111"/>
-        <c:scaling>
-          <c:orientation val="minMax"/>
-        </c:scaling>
-        <c:delete val="0"/>
-        <c:axPos val="b"/>
-        <c:numFmt formatCode="General" sourceLinked="0"/>
-        <c:majorTickMark val="none"/>
-        <c:minorTickMark val="none"/>
-        <c:tickLblPos val="nextTo"/>
-        <c:spPr>
-          <a:ln>
-            <a:solidFill>
-              <a:srgbClr val="B9C6DA"/>
-            </a:solidFill>
-          </a:ln>
-        </c:spPr>
-        <c:txPr>
-          <a:bodyPr/>
-          <a:lstStyle/>
-          <a:p>
-            <a:pPr>
-              <a:defRPr sz="1200">
-                <a:solidFill>
-                  <a:srgbClr val="46536E"/>
-                </a:solidFill>
-                <a:latin typeface="Segoe UI"/>
-              </a:defRPr>
-            </a:pPr>
-            <a:endParaRPr lang="en-US"/>
-          </a:p>
-        </c:txPr>
-        <c:crossAx val="222"/>
-        <c:crosses val="autoZero"/>
-        <c:auto val="1"/>
-        <c:lblAlgn val="ctr"/>
-        <c:lblOffset val="100"/>
-        <c:noMultiLvlLbl val="1"/>
-      </c:catAx>
-      <c:valAx>
-        <c:axId val="222"/>
-        <c:scaling>
-          <c:orientation val="minMax"/>
-        </c:scaling>
-        <c:delete val="0"/>
-        <c:axPos val="l"/>
-        <c:majorGridlines>
-          <c:spPr>
-            <a:ln>
-              <a:solidFill>
-                <a:srgbClr val="EDF1F7"/>
-              </a:solidFill>
-            </a:ln>
-          </c:spPr>
-        </c:majorGridlines>
-        <c:title>
-          <c:tx>
-            <c:rich>
-              <a:bodyPr rot="-5400000" vert="horz"/>
-              <a:lstStyle/>
-              <a:p>
-                <a:pPr>
-                  <a:defRPr sz="1100">
-                    <a:solidFill>
-                      <a:srgbClr val="46536E"/>
-                    </a:solidFill>
-                    <a:latin typeface="Segoe UI"/>
-                  </a:defRPr>
-                </a:pPr>
-                <a:r>
-                  <a:rPr lang="en-US" sz="1100"/>
-                  <a:t>Market Size (₹ Lakh Crore)</a:t>
-                </a:r>
-              </a:p>
-            </c:rich>
-          </c:tx>
-          <c:overlay val="0"/>
-        </c:title>
-        <c:numFmt formatCode="General" sourceLinked="1"/>
-        <c:majorTickMark val="out"/>
-        <c:minorTickMark val="none"/>
-        <c:tickLblPos val="nextTo"/>
-        <c:txPr>
-          <a:bodyPr/>
-          <a:lstStyle/>
-          <a:p>
-            <a:pPr>
-              <a:defRPr sz="1200">
-                <a:solidFill>
-                  <a:srgbClr val="46536E"/>
-                </a:solidFill>
-                <a:latin typeface="Segoe UI"/>
-              </a:defRPr>
-            </a:pPr>
-            <a:endParaRPr lang="en-US"/>
-          </a:p>
-        </c:txPr>
-        <c:crossAx val="111"/>
-        <c:crosses val="autoZero"/>
-        <c:crossBetween val="between"/>
-      </c:valAx>
-      <c:spPr>
-        <a:noFill/>
-        <a:ln>
-          <a:noFill/>
-        </a:ln>
-      </c:spPr>
-    </c:plotArea>
-    <c:plotVisOnly val="1"/>
-    <c:dispBlanksAs val="zero"/>
-    <c:showDLblsOverMax val="1"/>
-  </c:chart>
-  <c:spPr>
-    <a:noFill/>
-    <a:ln>
-      <a:noFill/>
-    </a:ln>
-  </c:spPr>
-</c:chartSpace>
-</file>
-
 <file path=ppt/notesMasters/notesMaster1.xml><?xml version="1.0" encoding="utf-8"?>
 <p:notesMaster xmlns:a="http://schemas.openxmlformats.org/drawingml/2006/main" xmlns:r="http://schemas.openxmlformats.org/officeDocument/2006/relationships" xmlns:p="http://schemas.openxmlformats.org/presentationml/2006/main">
   <p:cSld>
@@ -479,7 +230,7 @@
           <a:p>
             <a:fld id="{B7268E1E-0E44-426D-905E-8AD9B19D2182}" type="datetimeFigureOut">
               <a:rPr lang="cs-CZ" smtClean="0"/>
-              <a:t>01.09.2026</a:t>
+              <a:t>07.09.2026</a:t>
             </a:fld>
             <a:endParaRPr lang="cs-CZ"/>
           </a:p>
@@ -1151,7 +902,7 @@
             <a:fld id="{1D8BD707-D9CF-40AE-B4C6-C98DA3205C09}" type="datetimeFigureOut">
               <a:rPr lang="en-US" smtClean="0"/>
               <a:pPr/>
-              <a:t>9/1/26</a:t>
+              <a:t>9/7/26</a:t>
             </a:fld>
             <a:endParaRPr lang="en-US"/>
           </a:p>
@@ -1316,7 +1067,7 @@
             <a:fld id="{1D8BD707-D9CF-40AE-B4C6-C98DA3205C09}" type="datetimeFigureOut">
               <a:rPr lang="en-US" smtClean="0"/>
               <a:pPr/>
-              <a:t>9/1/26</a:t>
+              <a:t>9/7/26</a:t>
             </a:fld>
             <a:endParaRPr lang="en-US"/>
           </a:p>
@@ -1491,7 +1242,7 @@
             <a:fld id="{1D8BD707-D9CF-40AE-B4C6-C98DA3205C09}" type="datetimeFigureOut">
               <a:rPr lang="en-US" smtClean="0"/>
               <a:pPr/>
-              <a:t>9/1/26</a:t>
+              <a:t>9/7/26</a:t>
             </a:fld>
             <a:endParaRPr lang="en-US"/>
           </a:p>
@@ -1656,7 +1407,7 @@
             <a:fld id="{1D8BD707-D9CF-40AE-B4C6-C98DA3205C09}" type="datetimeFigureOut">
               <a:rPr lang="en-US" smtClean="0"/>
               <a:pPr/>
-              <a:t>9/1/26</a:t>
+              <a:t>9/7/26</a:t>
             </a:fld>
             <a:endParaRPr lang="en-US"/>
           </a:p>
@@ -1898,7 +1649,7 @@
             <a:fld id="{1D8BD707-D9CF-40AE-B4C6-C98DA3205C09}" type="datetimeFigureOut">
               <a:rPr lang="en-US" smtClean="0"/>
               <a:pPr/>
-              <a:t>9/1/26</a:t>
+              <a:t>9/7/26</a:t>
             </a:fld>
             <a:endParaRPr lang="en-US"/>
           </a:p>
@@ -2180,7 +1931,7 @@
             <a:fld id="{1D8BD707-D9CF-40AE-B4C6-C98DA3205C09}" type="datetimeFigureOut">
               <a:rPr lang="en-US" smtClean="0"/>
               <a:pPr/>
-              <a:t>9/1/26</a:t>
+              <a:t>9/7/26</a:t>
             </a:fld>
             <a:endParaRPr lang="en-US"/>
           </a:p>
@@ -2596,7 +2347,7 @@
             <a:fld id="{1D8BD707-D9CF-40AE-B4C6-C98DA3205C09}" type="datetimeFigureOut">
               <a:rPr lang="en-US" smtClean="0"/>
               <a:pPr/>
-              <a:t>9/1/26</a:t>
+              <a:t>9/7/26</a:t>
             </a:fld>
             <a:endParaRPr lang="en-US"/>
           </a:p>
@@ -2710,7 +2461,7 @@
             <a:fld id="{1D8BD707-D9CF-40AE-B4C6-C98DA3205C09}" type="datetimeFigureOut">
               <a:rPr lang="en-US" smtClean="0"/>
               <a:pPr/>
-              <a:t>9/1/26</a:t>
+              <a:t>9/7/26</a:t>
             </a:fld>
             <a:endParaRPr lang="en-US"/>
           </a:p>
@@ -2802,7 +2553,7 @@
             <a:fld id="{1D8BD707-D9CF-40AE-B4C6-C98DA3205C09}" type="datetimeFigureOut">
               <a:rPr lang="en-US" smtClean="0"/>
               <a:pPr/>
-              <a:t>9/1/26</a:t>
+              <a:t>9/7/26</a:t>
             </a:fld>
             <a:endParaRPr lang="en-US"/>
           </a:p>
@@ -3074,7 +2825,7 @@
             <a:fld id="{1D8BD707-D9CF-40AE-B4C6-C98DA3205C09}" type="datetimeFigureOut">
               <a:rPr lang="en-US" smtClean="0"/>
               <a:pPr/>
-              <a:t>9/1/26</a:t>
+              <a:t>9/7/26</a:t>
             </a:fld>
             <a:endParaRPr lang="en-US"/>
           </a:p>
@@ -3323,7 +3074,7 @@
             <a:fld id="{1D8BD707-D9CF-40AE-B4C6-C98DA3205C09}" type="datetimeFigureOut">
               <a:rPr lang="en-US" smtClean="0"/>
               <a:pPr/>
-              <a:t>9/1/26</a:t>
+              <a:t>9/7/26</a:t>
             </a:fld>
             <a:endParaRPr lang="en-US"/>
           </a:p>
@@ -3531,7 +3282,7 @@
             <a:fld id="{1D8BD707-D9CF-40AE-B4C6-C98DA3205C09}" type="datetimeFigureOut">
               <a:rPr lang="en-US" smtClean="0"/>
               <a:pPr/>
-              <a:t>9/1/26</a:t>
+              <a:t>9/7/26</a:t>
             </a:fld>
             <a:endParaRPr lang="en-US"/>
           </a:p>
@@ -4030,8 +3781,8 @@
         </p:nvSpPr>
         <p:spPr>
           <a:xfrm>
-            <a:off x="1959969" y="1567177"/>
-            <a:ext cx="12618720" cy="752475"/>
+            <a:off x="1956816" y="1444752"/>
+            <a:ext cx="12618720" cy="1051560"/>
           </a:xfrm>
           <a:prstGeom prst="rect">
             <a:avLst/>
@@ -4045,11 +3796,11 @@
           <a:p>
             <a:pPr algn="ctr">
               <a:lnSpc>
-                <a:spcPts val="5759"/>
-              </a:lnSpc>
-            </a:pPr>
-            <a:r>
-              <a:rPr lang="en-US" sz="3800">
+                <a:spcPct val="106000"/>
+              </a:lnSpc>
+            </a:pPr>
+            <a:r>
+              <a:rPr lang="en-US" sz="3400">
                 <a:solidFill>
                   <a:srgbClr val="000000"/>
                 </a:solidFill>
@@ -4151,9 +3902,9 @@
                   <a:solidFill>
                     <a:srgbClr val="3A4149"/>
                   </a:solidFill>
-                  <a:latin typeface="Garamond Bold"/>
-                  <a:ea typeface="Garamond Bold"/>
-                  <a:cs typeface="Garamond Bold"/>
+                  <a:latin typeface="Garamond"/>
+                  <a:ea typeface="Garamond"/>
+                  <a:cs typeface="Garamond"/>
                   <a:sym typeface="Garamond Bold"/>
                 </a:rPr>
                 <a:t>SMART INDIA HACKATHON 2026</a:t>
@@ -4231,8 +3982,8 @@
         </p:nvSpPr>
         <p:spPr>
           <a:xfrm>
-            <a:off x="611707" y="2969041"/>
-            <a:ext cx="9689685" cy="6038362"/>
+            <a:off x="822960" y="3090672"/>
+            <a:ext cx="9235440" cy="5852160"/>
           </a:xfrm>
           <a:prstGeom prst="rect">
             <a:avLst/>
@@ -4246,35 +3997,38 @@
           <a:p>
             <a:pPr algn="l">
               <a:lnSpc>
-                <a:spcPts val="6009"/>
-              </a:lnSpc>
-            </a:pPr>
-            <a:r>
-              <a:rPr lang="en-US" sz="2600" b="1">
+                <a:spcPts val="4724"/>
+              </a:lnSpc>
+              <a:spcAft>
+                <a:spcPts val="1100"/>
+              </a:spcAft>
+            </a:pPr>
+            <a:r>
+              <a:rPr lang="en-US" sz="2500" b="1">
                 <a:solidFill>
                   <a:srgbClr val="3A4149"/>
                 </a:solidFill>
-                <a:latin typeface="Arial Bold"/>
-                <a:ea typeface="Arial Bold"/>
-                <a:cs typeface="Arial Bold"/>
+                <a:latin typeface="Arial"/>
+                <a:ea typeface="Arial"/>
+                <a:cs typeface="Arial"/>
                 <a:sym typeface="Arial Bold"/>
               </a:rPr>
               <a:t>▪  </a:t>
             </a:r>
             <a:r>
-              <a:rPr lang="en-US" sz="2600" b="1">
+              <a:rPr lang="en-US" sz="2500" b="1">
                 <a:solidFill>
                   <a:srgbClr val="1C1C1E"/>
                 </a:solidFill>
-                <a:latin typeface="Arial Bold"/>
-                <a:ea typeface="Arial Bold"/>
-                <a:cs typeface="Arial Bold"/>
+                <a:latin typeface="Arial"/>
+                <a:ea typeface="Arial"/>
+                <a:cs typeface="Arial"/>
                 <a:sym typeface="Arial Bold"/>
               </a:rPr>
               <a:t>Problem Statement ID – </a:t>
             </a:r>
             <a:r>
-              <a:rPr lang="en-US" sz="2600">
+              <a:rPr lang="en-US" sz="2500">
                 <a:solidFill>
                   <a:srgbClr val="000000"/>
                 </a:solidFill>
@@ -4289,35 +4043,38 @@
           <a:p>
             <a:pPr algn="l">
               <a:lnSpc>
-                <a:spcPts val="6009"/>
-              </a:lnSpc>
-            </a:pPr>
-            <a:r>
-              <a:rPr lang="en-US" sz="2600" b="1">
+                <a:spcPts val="4724"/>
+              </a:lnSpc>
+              <a:spcAft>
+                <a:spcPts val="1100"/>
+              </a:spcAft>
+            </a:pPr>
+            <a:r>
+              <a:rPr lang="en-US" sz="2500" b="1">
                 <a:solidFill>
                   <a:srgbClr val="3A4149"/>
                 </a:solidFill>
-                <a:latin typeface="Arial Bold"/>
-                <a:ea typeface="Arial Bold"/>
-                <a:cs typeface="Arial Bold"/>
+                <a:latin typeface="Arial"/>
+                <a:ea typeface="Arial"/>
+                <a:cs typeface="Arial"/>
                 <a:sym typeface="Arial Bold"/>
               </a:rPr>
               <a:t>▪  </a:t>
             </a:r>
             <a:r>
-              <a:rPr lang="en-US" sz="2600" b="1">
+              <a:rPr lang="en-US" sz="2500" b="1">
                 <a:solidFill>
                   <a:srgbClr val="1C1C1E"/>
                 </a:solidFill>
-                <a:latin typeface="Arial Bold"/>
-                <a:ea typeface="Arial Bold"/>
-                <a:cs typeface="Arial Bold"/>
+                <a:latin typeface="Arial"/>
+                <a:ea typeface="Arial"/>
+                <a:cs typeface="Arial"/>
                 <a:sym typeface="Arial Bold"/>
               </a:rPr>
               <a:t>Problem Statement Title – </a:t>
             </a:r>
             <a:r>
-              <a:rPr lang="en-US" sz="2600">
+              <a:rPr lang="en-US" sz="2500">
                 <a:solidFill>
                   <a:srgbClr val="1C1C1E"/>
                 </a:solidFill>
@@ -4332,35 +4089,38 @@
           <a:p>
             <a:pPr algn="l">
               <a:lnSpc>
-                <a:spcPts val="6009"/>
-              </a:lnSpc>
-            </a:pPr>
-            <a:r>
-              <a:rPr lang="en-US" sz="2600" b="1">
+                <a:spcPts val="4724"/>
+              </a:lnSpc>
+              <a:spcAft>
+                <a:spcPts val="1100"/>
+              </a:spcAft>
+            </a:pPr>
+            <a:r>
+              <a:rPr lang="en-US" sz="2500" b="1">
                 <a:solidFill>
                   <a:srgbClr val="3A4149"/>
                 </a:solidFill>
-                <a:latin typeface="Arial Bold"/>
-                <a:ea typeface="Arial Bold"/>
-                <a:cs typeface="Arial Bold"/>
+                <a:latin typeface="Arial"/>
+                <a:ea typeface="Arial"/>
+                <a:cs typeface="Arial"/>
                 <a:sym typeface="Arial Bold"/>
               </a:rPr>
               <a:t>▪  </a:t>
             </a:r>
             <a:r>
-              <a:rPr lang="en-US" sz="2600" b="1">
+              <a:rPr lang="en-US" sz="2500" b="1">
                 <a:solidFill>
                   <a:srgbClr val="1C1C1E"/>
                 </a:solidFill>
-                <a:latin typeface="Arial Bold"/>
-                <a:ea typeface="Arial Bold"/>
-                <a:cs typeface="Arial Bold"/>
+                <a:latin typeface="Arial"/>
+                <a:ea typeface="Arial"/>
+                <a:cs typeface="Arial"/>
                 <a:sym typeface="Arial Bold"/>
               </a:rPr>
               <a:t>Theme – </a:t>
             </a:r>
             <a:r>
-              <a:rPr lang="en-US" sz="2600">
+              <a:rPr lang="en-US" sz="2500">
                 <a:solidFill>
                   <a:srgbClr val="1C1C1E"/>
                 </a:solidFill>
@@ -4375,35 +4135,38 @@
           <a:p>
             <a:pPr algn="l">
               <a:lnSpc>
-                <a:spcPts val="6009"/>
-              </a:lnSpc>
-            </a:pPr>
-            <a:r>
-              <a:rPr lang="en-US" sz="2600" b="1">
+                <a:spcPts val="4724"/>
+              </a:lnSpc>
+              <a:spcAft>
+                <a:spcPts val="1100"/>
+              </a:spcAft>
+            </a:pPr>
+            <a:r>
+              <a:rPr lang="en-US" sz="2500" b="1">
                 <a:solidFill>
                   <a:srgbClr val="3A4149"/>
                 </a:solidFill>
-                <a:latin typeface="Arial Bold"/>
-                <a:ea typeface="Arial Bold"/>
-                <a:cs typeface="Arial Bold"/>
+                <a:latin typeface="Arial"/>
+                <a:ea typeface="Arial"/>
+                <a:cs typeface="Arial"/>
                 <a:sym typeface="Arial Bold"/>
               </a:rPr>
               <a:t>▪  </a:t>
             </a:r>
             <a:r>
-              <a:rPr lang="en-US" sz="2600" b="1">
+              <a:rPr lang="en-US" sz="2500" b="1">
                 <a:solidFill>
                   <a:srgbClr val="1C1C1E"/>
                 </a:solidFill>
-                <a:latin typeface="Arial Bold"/>
-                <a:ea typeface="Arial Bold"/>
-                <a:cs typeface="Arial Bold"/>
+                <a:latin typeface="Arial"/>
+                <a:ea typeface="Arial"/>
+                <a:cs typeface="Arial"/>
                 <a:sym typeface="Arial Bold"/>
               </a:rPr>
               <a:t>PS Category – </a:t>
             </a:r>
             <a:r>
-              <a:rPr lang="en-US" sz="2600">
+              <a:rPr lang="en-US" sz="2500">
                 <a:solidFill>
                   <a:srgbClr val="1C1C1E"/>
                 </a:solidFill>
@@ -4418,35 +4181,38 @@
           <a:p>
             <a:pPr algn="l">
               <a:lnSpc>
-                <a:spcPts val="6009"/>
-              </a:lnSpc>
-            </a:pPr>
-            <a:r>
-              <a:rPr lang="en-US" sz="2600" b="1">
+                <a:spcPts val="4724"/>
+              </a:lnSpc>
+              <a:spcAft>
+                <a:spcPts val="1100"/>
+              </a:spcAft>
+            </a:pPr>
+            <a:r>
+              <a:rPr lang="en-US" sz="2500" b="1">
                 <a:solidFill>
                   <a:srgbClr val="3A4149"/>
                 </a:solidFill>
-                <a:latin typeface="Arial Bold"/>
-                <a:ea typeface="Arial Bold"/>
-                <a:cs typeface="Arial Bold"/>
+                <a:latin typeface="Arial"/>
+                <a:ea typeface="Arial"/>
+                <a:cs typeface="Arial"/>
                 <a:sym typeface="Arial Bold"/>
               </a:rPr>
               <a:t>▪  </a:t>
             </a:r>
             <a:r>
-              <a:rPr lang="en-US" sz="2600" b="1">
+              <a:rPr lang="en-US" sz="2500" b="1">
                 <a:solidFill>
                   <a:srgbClr val="1C1C1E"/>
                 </a:solidFill>
-                <a:latin typeface="Arial Bold"/>
-                <a:ea typeface="Arial Bold"/>
-                <a:cs typeface="Arial Bold"/>
+                <a:latin typeface="Arial"/>
+                <a:ea typeface="Arial"/>
+                <a:cs typeface="Arial"/>
                 <a:sym typeface="Arial Bold"/>
               </a:rPr>
               <a:t>Team ID – </a:t>
             </a:r>
             <a:r>
-              <a:rPr lang="en-US" sz="2600">
+              <a:rPr lang="en-US" sz="2500">
                 <a:solidFill>
                   <a:srgbClr val="000000"/>
                 </a:solidFill>
@@ -4461,35 +4227,38 @@
           <a:p>
             <a:pPr algn="l">
               <a:lnSpc>
-                <a:spcPts val="6009"/>
-              </a:lnSpc>
-            </a:pPr>
-            <a:r>
-              <a:rPr lang="en-US" sz="2600" b="1">
+                <a:spcPts val="4724"/>
+              </a:lnSpc>
+              <a:spcAft>
+                <a:spcPts val="1100"/>
+              </a:spcAft>
+            </a:pPr>
+            <a:r>
+              <a:rPr lang="en-US" sz="2500" b="1">
                 <a:solidFill>
                   <a:srgbClr val="3A4149"/>
                 </a:solidFill>
-                <a:latin typeface="Arial Bold"/>
-                <a:ea typeface="Arial Bold"/>
-                <a:cs typeface="Arial Bold"/>
+                <a:latin typeface="Arial"/>
+                <a:ea typeface="Arial"/>
+                <a:cs typeface="Arial"/>
                 <a:sym typeface="Arial Bold"/>
               </a:rPr>
               <a:t>▪  </a:t>
             </a:r>
             <a:r>
-              <a:rPr lang="en-US" sz="2600" b="1">
+              <a:rPr lang="en-US" sz="2500" b="1">
                 <a:solidFill>
                   <a:srgbClr val="1C1C1E"/>
                 </a:solidFill>
-                <a:latin typeface="Arial Bold"/>
-                <a:ea typeface="Arial Bold"/>
-                <a:cs typeface="Arial Bold"/>
+                <a:latin typeface="Arial"/>
+                <a:ea typeface="Arial"/>
+                <a:cs typeface="Arial"/>
                 <a:sym typeface="Arial Bold"/>
               </a:rPr>
               <a:t>Team Name – </a:t>
             </a:r>
             <a:r>
-              <a:rPr lang="en-US" sz="2600">
+              <a:rPr lang="en-US" sz="2500">
                 <a:solidFill>
                   <a:srgbClr val="1C1C1E"/>
                 </a:solidFill>
@@ -4557,7 +4326,7 @@
           </a:ln>
         </p:spPr>
         <p:txBody>
-          <a:bodyPr wrap="square" anchor="ctr" lIns="101600" tIns="76200" rIns="101600" bIns="76200">
+          <a:bodyPr wrap="square" lIns="101600" tIns="76200" rIns="101600" bIns="76200" anchor="ctr">
             <a:spAutoFit/>
           </a:bodyPr>
           <a:lstStyle/>
@@ -4599,7 +4368,7 @@
           </a:ln>
         </p:spPr>
         <p:txBody>
-          <a:bodyPr wrap="square" anchor="ctr" lIns="101600" tIns="76200" rIns="101600" bIns="76200">
+          <a:bodyPr wrap="square" lIns="101600" tIns="76200" rIns="101600" bIns="76200" anchor="ctr">
             <a:spAutoFit/>
           </a:bodyPr>
           <a:lstStyle/>
@@ -4641,7 +4410,7 @@
           </a:ln>
         </p:spPr>
         <p:txBody>
-          <a:bodyPr wrap="square" anchor="ctr" lIns="101600" tIns="76200" rIns="101600" bIns="76200">
+          <a:bodyPr wrap="square" lIns="101600" tIns="76200" rIns="101600" bIns="76200" anchor="ctr">
             <a:spAutoFit/>
           </a:bodyPr>
           <a:lstStyle/>
@@ -4685,7 +4454,7 @@
           </a:ln>
         </p:spPr>
         <p:txBody>
-          <a:bodyPr wrap="square" anchor="ctr" lIns="101600" tIns="76200" rIns="101600" bIns="76200">
+          <a:bodyPr wrap="square" lIns="101600" tIns="76200" rIns="101600" bIns="76200" anchor="ctr">
             <a:spAutoFit/>
           </a:bodyPr>
           <a:lstStyle/>
@@ -4727,7 +4496,7 @@
           </a:ln>
         </p:spPr>
         <p:txBody>
-          <a:bodyPr wrap="square" anchor="ctr" lIns="50800" tIns="50800" rIns="127000" bIns="50800">
+          <a:bodyPr wrap="square" lIns="50800" tIns="50800" rIns="127000" bIns="50800" anchor="ctr">
             <a:spAutoFit/>
           </a:bodyPr>
           <a:lstStyle/>
@@ -4773,11 +4542,13 @@
           </a:ln>
         </p:spPr>
         <p:txBody>
-          <a:bodyPr wrap="square" anchor="ctr" lIns="101600" tIns="76200" rIns="101600" bIns="76200">
-            <a:spAutoFit/>
-          </a:bodyPr>
-          <a:lstStyle/>
-          <a:p/>
+          <a:bodyPr wrap="square" lIns="101600" tIns="76200" rIns="101600" bIns="76200" anchor="ctr">
+            <a:spAutoFit/>
+          </a:bodyPr>
+          <a:lstStyle/>
+          <a:p>
+            <a:endParaRPr/>
+          </a:p>
         </p:txBody>
       </p:sp>
       <p:sp>
@@ -4802,7 +4573,7 @@
           </a:ln>
         </p:spPr>
         <p:txBody>
-          <a:bodyPr wrap="square" anchor="ctr" lIns="101600" tIns="76200" rIns="101600" bIns="76200">
+          <a:bodyPr wrap="square" lIns="101600" tIns="76200" rIns="101600" bIns="76200" anchor="ctr">
             <a:spAutoFit/>
           </a:bodyPr>
           <a:lstStyle/>
@@ -4848,11 +4619,13 @@
           </a:ln>
         </p:spPr>
         <p:txBody>
-          <a:bodyPr wrap="square" anchor="ctr" lIns="101600" tIns="76200" rIns="101600" bIns="76200">
-            <a:spAutoFit/>
-          </a:bodyPr>
-          <a:lstStyle/>
-          <a:p/>
+          <a:bodyPr wrap="square" lIns="101600" tIns="76200" rIns="101600" bIns="76200" anchor="ctr">
+            <a:spAutoFit/>
+          </a:bodyPr>
+          <a:lstStyle/>
+          <a:p>
+            <a:endParaRPr/>
+          </a:p>
         </p:txBody>
       </p:sp>
       <p:sp>
@@ -4877,7 +4650,7 @@
           </a:ln>
         </p:spPr>
         <p:txBody>
-          <a:bodyPr wrap="square" anchor="ctr" lIns="101600" tIns="76200" rIns="101600" bIns="76200">
+          <a:bodyPr wrap="square" lIns="101600" tIns="76200" rIns="101600" bIns="76200" anchor="ctr">
             <a:spAutoFit/>
           </a:bodyPr>
           <a:lstStyle/>
@@ -4923,11 +4696,13 @@
           </a:ln>
         </p:spPr>
         <p:txBody>
-          <a:bodyPr wrap="square" anchor="ctr" lIns="101600" tIns="76200" rIns="101600" bIns="76200">
-            <a:spAutoFit/>
-          </a:bodyPr>
-          <a:lstStyle/>
-          <a:p/>
+          <a:bodyPr wrap="square" lIns="101600" tIns="76200" rIns="101600" bIns="76200" anchor="ctr">
+            <a:spAutoFit/>
+          </a:bodyPr>
+          <a:lstStyle/>
+          <a:p>
+            <a:endParaRPr/>
+          </a:p>
         </p:txBody>
       </p:sp>
       <p:sp>
@@ -4952,7 +4727,7 @@
           </a:ln>
         </p:spPr>
         <p:txBody>
-          <a:bodyPr wrap="square" anchor="ctr" lIns="101600" tIns="76200" rIns="101600" bIns="76200">
+          <a:bodyPr wrap="square" lIns="101600" tIns="76200" rIns="101600" bIns="76200" anchor="ctr">
             <a:spAutoFit/>
           </a:bodyPr>
           <a:lstStyle/>
@@ -4998,7 +4773,7 @@
           </a:ln>
         </p:spPr>
         <p:txBody>
-          <a:bodyPr wrap="square" anchor="ctr" lIns="101600" tIns="63500" rIns="101600" bIns="63500">
+          <a:bodyPr wrap="square" lIns="101600" tIns="63500" rIns="101600" bIns="63500" anchor="ctr">
             <a:spAutoFit/>
           </a:bodyPr>
           <a:lstStyle/>
@@ -5044,7 +4819,7 @@
           </a:ln>
         </p:spPr>
         <p:txBody>
-          <a:bodyPr wrap="square" anchor="ctr" lIns="101600" tIns="63500" rIns="101600" bIns="63500">
+          <a:bodyPr wrap="square" lIns="101600" tIns="63500" rIns="101600" bIns="63500" anchor="ctr">
             <a:spAutoFit/>
           </a:bodyPr>
           <a:lstStyle/>
@@ -5090,7 +4865,7 @@
           </a:ln>
         </p:spPr>
         <p:txBody>
-          <a:bodyPr wrap="square" anchor="ctr" lIns="101600" tIns="63500" rIns="101600" bIns="63500">
+          <a:bodyPr wrap="square" lIns="101600" tIns="63500" rIns="101600" bIns="63500" anchor="ctr">
             <a:spAutoFit/>
           </a:bodyPr>
           <a:lstStyle/>
@@ -5136,7 +4911,7 @@
           </a:ln>
         </p:spPr>
         <p:txBody>
-          <a:bodyPr wrap="square" anchor="ctr" lIns="101600" tIns="63500" rIns="101600" bIns="63500">
+          <a:bodyPr wrap="square" lIns="101600" tIns="63500" rIns="101600" bIns="63500" anchor="ctr">
             <a:spAutoFit/>
           </a:bodyPr>
           <a:lstStyle/>
@@ -5178,7 +4953,7 @@
           </a:ln>
         </p:spPr>
         <p:txBody>
-          <a:bodyPr wrap="square" anchor="ctr" lIns="101600" tIns="76200" rIns="101600" bIns="76200">
+          <a:bodyPr wrap="square" lIns="101600" tIns="76200" rIns="101600" bIns="76200" anchor="ctr">
             <a:spAutoFit/>
           </a:bodyPr>
           <a:lstStyle/>
@@ -5224,7 +4999,7 @@
           </a:ln>
         </p:spPr>
         <p:txBody>
-          <a:bodyPr wrap="square" anchor="ctr" lIns="101600" tIns="63500" rIns="101600" bIns="63500">
+          <a:bodyPr wrap="square" lIns="101600" tIns="63500" rIns="101600" bIns="63500" anchor="ctr">
             <a:spAutoFit/>
           </a:bodyPr>
           <a:lstStyle/>
@@ -5270,7 +5045,7 @@
           </a:ln>
         </p:spPr>
         <p:txBody>
-          <a:bodyPr wrap="square" anchor="ctr" lIns="101600" tIns="63500" rIns="101600" bIns="63500">
+          <a:bodyPr wrap="square" lIns="101600" tIns="63500" rIns="101600" bIns="63500" anchor="ctr">
             <a:spAutoFit/>
           </a:bodyPr>
           <a:lstStyle/>
@@ -5316,7 +5091,7 @@
           </a:ln>
         </p:spPr>
         <p:txBody>
-          <a:bodyPr wrap="square" anchor="ctr" lIns="101600" tIns="63500" rIns="101600" bIns="63500">
+          <a:bodyPr wrap="square" lIns="101600" tIns="63500" rIns="101600" bIns="63500" anchor="ctr">
             <a:spAutoFit/>
           </a:bodyPr>
           <a:lstStyle/>
@@ -5358,7 +5133,7 @@
           </a:ln>
         </p:spPr>
         <p:txBody>
-          <a:bodyPr wrap="square" anchor="ctr" lIns="101600" tIns="76200" rIns="101600" bIns="76200">
+          <a:bodyPr wrap="square" lIns="101600" tIns="76200" rIns="101600" bIns="76200" anchor="ctr">
             <a:spAutoFit/>
           </a:bodyPr>
           <a:lstStyle/>
@@ -5404,7 +5179,7 @@
           </a:ln>
         </p:spPr>
         <p:txBody>
-          <a:bodyPr wrap="square" anchor="ctr" lIns="101600" tIns="63500" rIns="101600" bIns="63500">
+          <a:bodyPr wrap="square" lIns="101600" tIns="63500" rIns="101600" bIns="63500" anchor="ctr">
             <a:spAutoFit/>
           </a:bodyPr>
           <a:lstStyle/>
@@ -5450,7 +5225,7 @@
           </a:ln>
         </p:spPr>
         <p:txBody>
-          <a:bodyPr wrap="square" anchor="ctr" lIns="101600" tIns="63500" rIns="101600" bIns="63500">
+          <a:bodyPr wrap="square" lIns="101600" tIns="63500" rIns="101600" bIns="63500" anchor="ctr">
             <a:spAutoFit/>
           </a:bodyPr>
           <a:lstStyle/>
@@ -5496,7 +5271,7 @@
           </a:ln>
         </p:spPr>
         <p:txBody>
-          <a:bodyPr wrap="square" anchor="ctr" lIns="101600" tIns="63500" rIns="101600" bIns="63500">
+          <a:bodyPr wrap="square" lIns="101600" tIns="63500" rIns="101600" bIns="63500" anchor="ctr">
             <a:spAutoFit/>
           </a:bodyPr>
           <a:lstStyle/>
@@ -5542,7 +5317,7 @@
           </a:ln>
         </p:spPr>
         <p:txBody>
-          <a:bodyPr wrap="square" anchor="ctr" lIns="101600" tIns="63500" rIns="101600" bIns="63500">
+          <a:bodyPr wrap="square" lIns="101600" tIns="63500" rIns="101600" bIns="63500" anchor="ctr">
             <a:spAutoFit/>
           </a:bodyPr>
           <a:lstStyle/>
@@ -5588,7 +5363,7 @@
           </a:ln>
         </p:spPr>
         <p:txBody>
-          <a:bodyPr wrap="square" anchor="ctr" lIns="101600" tIns="63500" rIns="101600" bIns="63500">
+          <a:bodyPr wrap="square" lIns="101600" tIns="63500" rIns="101600" bIns="63500" anchor="ctr">
             <a:spAutoFit/>
           </a:bodyPr>
           <a:lstStyle/>
@@ -5634,7 +5409,7 @@
           </a:ln>
         </p:spPr>
         <p:txBody>
-          <a:bodyPr wrap="square" anchor="ctr" lIns="101600" tIns="63500" rIns="101600" bIns="63500">
+          <a:bodyPr wrap="square" lIns="101600" tIns="63500" rIns="101600" bIns="63500" anchor="ctr">
             <a:spAutoFit/>
           </a:bodyPr>
           <a:lstStyle/>
@@ -5680,7 +5455,7 @@
           </a:ln>
         </p:spPr>
         <p:txBody>
-          <a:bodyPr wrap="square" anchor="ctr" lIns="101600" tIns="63500" rIns="101600" bIns="63500">
+          <a:bodyPr wrap="square" lIns="101600" tIns="63500" rIns="101600" bIns="63500" anchor="ctr">
             <a:spAutoFit/>
           </a:bodyPr>
           <a:lstStyle/>
@@ -5726,7 +5501,7 @@
           </a:ln>
         </p:spPr>
         <p:txBody>
-          <a:bodyPr wrap="square" anchor="ctr" lIns="101600" tIns="63500" rIns="101600" bIns="63500">
+          <a:bodyPr wrap="square" lIns="101600" tIns="63500" rIns="101600" bIns="63500" anchor="ctr">
             <a:spAutoFit/>
           </a:bodyPr>
           <a:lstStyle/>
@@ -5772,7 +5547,7 @@
           </a:ln>
         </p:spPr>
         <p:txBody>
-          <a:bodyPr wrap="square" anchor="ctr" lIns="101600" tIns="63500" rIns="101600" bIns="63500">
+          <a:bodyPr wrap="square" lIns="101600" tIns="63500" rIns="101600" bIns="63500" anchor="ctr">
             <a:spAutoFit/>
           </a:bodyPr>
           <a:lstStyle/>
@@ -5818,7 +5593,7 @@
           </a:ln>
         </p:spPr>
         <p:txBody>
-          <a:bodyPr wrap="square" anchor="ctr" lIns="101600" tIns="63500" rIns="101600" bIns="63500">
+          <a:bodyPr wrap="square" lIns="101600" tIns="63500" rIns="101600" bIns="63500" anchor="ctr">
             <a:spAutoFit/>
           </a:bodyPr>
           <a:lstStyle/>
@@ -5864,11 +5639,13 @@
           </a:ln>
         </p:spPr>
         <p:txBody>
-          <a:bodyPr wrap="square" anchor="ctr" lIns="101600" tIns="76200" rIns="101600" bIns="76200">
-            <a:spAutoFit/>
-          </a:bodyPr>
-          <a:lstStyle/>
-          <a:p/>
+          <a:bodyPr wrap="square" lIns="101600" tIns="76200" rIns="101600" bIns="76200" anchor="ctr">
+            <a:spAutoFit/>
+          </a:bodyPr>
+          <a:lstStyle/>
+          <a:p>
+            <a:endParaRPr/>
+          </a:p>
         </p:txBody>
       </p:sp>
       <p:sp>
@@ -5891,7 +5668,7 @@
           </a:ln>
         </p:spPr>
         <p:txBody>
-          <a:bodyPr wrap="square" anchor="ctr" lIns="76200" tIns="50800" rIns="76200" bIns="50800">
+          <a:bodyPr wrap="square" lIns="76200" tIns="50800" rIns="76200" bIns="50800" anchor="ctr">
             <a:spAutoFit/>
           </a:bodyPr>
           <a:lstStyle/>
@@ -5949,7 +5726,7 @@
           </a:ln>
         </p:spPr>
         <p:txBody>
-          <a:bodyPr wrap="square" anchor="ctr" lIns="76200" tIns="50800" rIns="76200" bIns="50800">
+          <a:bodyPr wrap="square" lIns="76200" tIns="50800" rIns="76200" bIns="50800" anchor="ctr">
             <a:spAutoFit/>
           </a:bodyPr>
           <a:lstStyle/>
@@ -6009,11 +5786,13 @@
           </a:ln>
         </p:spPr>
         <p:txBody>
-          <a:bodyPr wrap="square" anchor="ctr" lIns="101600" tIns="76200" rIns="101600" bIns="76200">
-            <a:spAutoFit/>
-          </a:bodyPr>
-          <a:lstStyle/>
-          <a:p/>
+          <a:bodyPr wrap="square" lIns="101600" tIns="76200" rIns="101600" bIns="76200" anchor="ctr">
+            <a:spAutoFit/>
+          </a:bodyPr>
+          <a:lstStyle/>
+          <a:p>
+            <a:endParaRPr/>
+          </a:p>
         </p:txBody>
       </p:sp>
       <p:sp>
@@ -6036,7 +5815,7 @@
           </a:ln>
         </p:spPr>
         <p:txBody>
-          <a:bodyPr wrap="square" anchor="ctr" lIns="76200" tIns="50800" rIns="76200" bIns="50800">
+          <a:bodyPr wrap="square" lIns="76200" tIns="50800" rIns="76200" bIns="50800" anchor="ctr">
             <a:spAutoFit/>
           </a:bodyPr>
           <a:lstStyle/>
@@ -6096,11 +5875,13 @@
           </a:ln>
         </p:spPr>
         <p:txBody>
-          <a:bodyPr wrap="square" anchor="ctr" lIns="101600" tIns="76200" rIns="101600" bIns="76200">
-            <a:spAutoFit/>
-          </a:bodyPr>
-          <a:lstStyle/>
-          <a:p/>
+          <a:bodyPr wrap="square" lIns="101600" tIns="76200" rIns="101600" bIns="76200" anchor="ctr">
+            <a:spAutoFit/>
+          </a:bodyPr>
+          <a:lstStyle/>
+          <a:p>
+            <a:endParaRPr/>
+          </a:p>
         </p:txBody>
       </p:sp>
       <p:sp>
@@ -6123,7 +5904,7 @@
           </a:ln>
         </p:spPr>
         <p:txBody>
-          <a:bodyPr wrap="square" anchor="ctr" lIns="76200" tIns="50800" rIns="76200" bIns="50800">
+          <a:bodyPr wrap="square" lIns="76200" tIns="50800" rIns="76200" bIns="50800" anchor="ctr">
             <a:spAutoFit/>
           </a:bodyPr>
           <a:lstStyle/>
@@ -6183,11 +5964,13 @@
           </a:ln>
         </p:spPr>
         <p:txBody>
-          <a:bodyPr wrap="square" anchor="ctr" lIns="101600" tIns="76200" rIns="101600" bIns="76200">
-            <a:spAutoFit/>
-          </a:bodyPr>
-          <a:lstStyle/>
-          <a:p/>
+          <a:bodyPr wrap="square" lIns="101600" tIns="76200" rIns="101600" bIns="76200" anchor="ctr">
+            <a:spAutoFit/>
+          </a:bodyPr>
+          <a:lstStyle/>
+          <a:p>
+            <a:endParaRPr/>
+          </a:p>
         </p:txBody>
       </p:sp>
       <p:sp>
@@ -6210,7 +5993,7 @@
           </a:ln>
         </p:spPr>
         <p:txBody>
-          <a:bodyPr wrap="square" anchor="ctr" lIns="76200" tIns="50800" rIns="76200" bIns="50800">
+          <a:bodyPr wrap="square" lIns="76200" tIns="50800" rIns="76200" bIns="50800" anchor="ctr">
             <a:spAutoFit/>
           </a:bodyPr>
           <a:lstStyle/>
@@ -6270,11 +6053,13 @@
           </a:ln>
         </p:spPr>
         <p:txBody>
-          <a:bodyPr wrap="square" anchor="ctr" lIns="101600" tIns="76200" rIns="101600" bIns="76200">
-            <a:spAutoFit/>
-          </a:bodyPr>
-          <a:lstStyle/>
-          <a:p/>
+          <a:bodyPr wrap="square" lIns="101600" tIns="76200" rIns="101600" bIns="76200" anchor="ctr">
+            <a:spAutoFit/>
+          </a:bodyPr>
+          <a:lstStyle/>
+          <a:p>
+            <a:endParaRPr/>
+          </a:p>
         </p:txBody>
       </p:sp>
       <p:sp>
@@ -6297,7 +6082,7 @@
           </a:ln>
         </p:spPr>
         <p:txBody>
-          <a:bodyPr wrap="square" anchor="ctr" lIns="76200" tIns="50800" rIns="76200" bIns="50800">
+          <a:bodyPr wrap="square" lIns="76200" tIns="50800" rIns="76200" bIns="50800" anchor="ctr">
             <a:spAutoFit/>
           </a:bodyPr>
           <a:lstStyle/>
@@ -6357,11 +6142,13 @@
           </a:ln>
         </p:spPr>
         <p:txBody>
-          <a:bodyPr wrap="square" anchor="ctr" lIns="101600" tIns="76200" rIns="101600" bIns="76200">
-            <a:spAutoFit/>
-          </a:bodyPr>
-          <a:lstStyle/>
-          <a:p/>
+          <a:bodyPr wrap="square" lIns="101600" tIns="76200" rIns="101600" bIns="76200" anchor="ctr">
+            <a:spAutoFit/>
+          </a:bodyPr>
+          <a:lstStyle/>
+          <a:p>
+            <a:endParaRPr/>
+          </a:p>
         </p:txBody>
       </p:sp>
       <p:sp>
@@ -6384,7 +6171,7 @@
           </a:ln>
         </p:spPr>
         <p:txBody>
-          <a:bodyPr wrap="square" anchor="ctr" lIns="76200" tIns="50800" rIns="76200" bIns="50800">
+          <a:bodyPr wrap="square" lIns="76200" tIns="50800" rIns="76200" bIns="50800" anchor="ctr">
             <a:spAutoFit/>
           </a:bodyPr>
           <a:lstStyle/>
@@ -6444,11 +6231,13 @@
           </a:ln>
         </p:spPr>
         <p:txBody>
-          <a:bodyPr wrap="square" anchor="ctr" lIns="101600" tIns="76200" rIns="101600" bIns="76200">
-            <a:spAutoFit/>
-          </a:bodyPr>
-          <a:lstStyle/>
-          <a:p/>
+          <a:bodyPr wrap="square" lIns="101600" tIns="76200" rIns="101600" bIns="76200" anchor="ctr">
+            <a:spAutoFit/>
+          </a:bodyPr>
+          <a:lstStyle/>
+          <a:p>
+            <a:endParaRPr/>
+          </a:p>
         </p:txBody>
       </p:sp>
       <p:sp>
@@ -6475,11 +6264,13 @@
           </a:ln>
         </p:spPr>
         <p:txBody>
-          <a:bodyPr wrap="square" anchor="ctr" lIns="101600" tIns="76200" rIns="101600" bIns="76200">
-            <a:spAutoFit/>
-          </a:bodyPr>
-          <a:lstStyle/>
-          <a:p/>
+          <a:bodyPr wrap="square" lIns="101600" tIns="76200" rIns="101600" bIns="76200" anchor="ctr">
+            <a:spAutoFit/>
+          </a:bodyPr>
+          <a:lstStyle/>
+          <a:p>
+            <a:endParaRPr/>
+          </a:p>
         </p:txBody>
       </p:sp>
       <p:sp>
@@ -6504,7 +6295,7 @@
           </a:ln>
         </p:spPr>
         <p:txBody>
-          <a:bodyPr wrap="square" anchor="ctr" lIns="685800" tIns="50800" rIns="152400" bIns="50800">
+          <a:bodyPr wrap="square" lIns="685800" tIns="50800" rIns="152400" bIns="50800" anchor="ctr">
             <a:spAutoFit/>
           </a:bodyPr>
           <a:lstStyle/>
@@ -6546,12 +6337,12 @@
           </a:ln>
         </p:spPr>
         <p:txBody>
-          <a:bodyPr wrap="square" anchor="t" lIns="177800" tIns="50800" rIns="127000" bIns="50800">
-            <a:spAutoFit/>
-          </a:bodyPr>
-          <a:lstStyle/>
-          <a:p>
-            <a:pPr algn="l" marL="266700" indent="-266700">
+          <a:bodyPr wrap="square" lIns="177800" tIns="50800" rIns="127000" bIns="50800" anchor="t">
+            <a:spAutoFit/>
+          </a:bodyPr>
+          <a:lstStyle/>
+          <a:p>
+            <a:pPr marL="266700" indent="-266700" algn="l">
               <a:lnSpc>
                 <a:spcPct val="100000"/>
               </a:lnSpc>
@@ -6575,7 +6366,7 @@
             </a:r>
           </a:p>
           <a:p>
-            <a:pPr algn="l" marL="266700" indent="-266700">
+            <a:pPr marL="266700" indent="-266700" algn="l">
               <a:lnSpc>
                 <a:spcPct val="100000"/>
               </a:lnSpc>
@@ -6599,7 +6390,7 @@
             </a:r>
           </a:p>
           <a:p>
-            <a:pPr algn="l" marL="266700" indent="-266700">
+            <a:pPr marL="266700" indent="-266700" algn="l">
               <a:lnSpc>
                 <a:spcPct val="100000"/>
               </a:lnSpc>
@@ -6623,7 +6414,7 @@
             </a:r>
           </a:p>
           <a:p>
-            <a:pPr algn="l" marL="266700" indent="-266700">
+            <a:pPr marL="266700" indent="-266700" algn="l">
               <a:lnSpc>
                 <a:spcPct val="100000"/>
               </a:lnSpc>
@@ -6647,7 +6438,7 @@
             </a:r>
           </a:p>
           <a:p>
-            <a:pPr algn="l" marL="266700" indent="-266700">
+            <a:pPr marL="266700" indent="-266700" algn="l">
               <a:lnSpc>
                 <a:spcPct val="100000"/>
               </a:lnSpc>
@@ -6696,11 +6487,13 @@
           </a:ln>
         </p:spPr>
         <p:txBody>
-          <a:bodyPr wrap="square" anchor="ctr" lIns="101600" tIns="76200" rIns="101600" bIns="76200">
-            <a:spAutoFit/>
-          </a:bodyPr>
-          <a:lstStyle/>
-          <a:p/>
+          <a:bodyPr wrap="square" lIns="101600" tIns="76200" rIns="101600" bIns="76200" anchor="ctr">
+            <a:spAutoFit/>
+          </a:bodyPr>
+          <a:lstStyle/>
+          <a:p>
+            <a:endParaRPr/>
+          </a:p>
         </p:txBody>
       </p:sp>
       <p:sp>
@@ -6725,7 +6518,7 @@
           </a:ln>
         </p:spPr>
         <p:txBody>
-          <a:bodyPr wrap="square" anchor="ctr" lIns="685800" tIns="50800" rIns="152400" bIns="50800">
+          <a:bodyPr wrap="square" lIns="685800" tIns="50800" rIns="152400" bIns="50800" anchor="ctr">
             <a:spAutoFit/>
           </a:bodyPr>
           <a:lstStyle/>
@@ -6767,12 +6560,12 @@
           </a:ln>
         </p:spPr>
         <p:txBody>
-          <a:bodyPr wrap="square" anchor="t" lIns="177800" tIns="50800" rIns="127000" bIns="50800">
-            <a:spAutoFit/>
-          </a:bodyPr>
-          <a:lstStyle/>
-          <a:p>
-            <a:pPr algn="l" marL="266700" indent="-266700">
+          <a:bodyPr wrap="square" lIns="177800" tIns="50800" rIns="127000" bIns="50800" anchor="t">
+            <a:spAutoFit/>
+          </a:bodyPr>
+          <a:lstStyle/>
+          <a:p>
+            <a:pPr marL="266700" indent="-266700" algn="l">
               <a:lnSpc>
                 <a:spcPct val="100000"/>
               </a:lnSpc>
@@ -6796,7 +6589,7 @@
             </a:r>
           </a:p>
           <a:p>
-            <a:pPr algn="l" marL="266700" indent="-266700">
+            <a:pPr marL="266700" indent="-266700" algn="l">
               <a:lnSpc>
                 <a:spcPct val="100000"/>
               </a:lnSpc>
@@ -6820,7 +6613,7 @@
             </a:r>
           </a:p>
           <a:p>
-            <a:pPr algn="l" marL="266700" indent="-266700">
+            <a:pPr marL="266700" indent="-266700" algn="l">
               <a:lnSpc>
                 <a:spcPct val="100000"/>
               </a:lnSpc>
@@ -6844,7 +6637,7 @@
             </a:r>
           </a:p>
           <a:p>
-            <a:pPr algn="l" marL="266700" indent="-266700">
+            <a:pPr marL="266700" indent="-266700" algn="l">
               <a:lnSpc>
                 <a:spcPct val="100000"/>
               </a:lnSpc>
@@ -6868,7 +6661,7 @@
             </a:r>
           </a:p>
           <a:p>
-            <a:pPr algn="l" marL="266700" indent="-266700">
+            <a:pPr marL="266700" indent="-266700" algn="l">
               <a:lnSpc>
                 <a:spcPct val="100000"/>
               </a:lnSpc>
@@ -6917,11 +6710,13 @@
           </a:ln>
         </p:spPr>
         <p:txBody>
-          <a:bodyPr wrap="square" anchor="ctr" lIns="101600" tIns="76200" rIns="101600" bIns="76200">
-            <a:spAutoFit/>
-          </a:bodyPr>
-          <a:lstStyle/>
-          <a:p/>
+          <a:bodyPr wrap="square" lIns="101600" tIns="76200" rIns="101600" bIns="76200" anchor="ctr">
+            <a:spAutoFit/>
+          </a:bodyPr>
+          <a:lstStyle/>
+          <a:p>
+            <a:endParaRPr/>
+          </a:p>
         </p:txBody>
       </p:sp>
       <p:sp>
@@ -6944,7 +6739,7 @@
           </a:ln>
         </p:spPr>
         <p:txBody>
-          <a:bodyPr wrap="square" anchor="ctr" lIns="127000" tIns="50800" rIns="127000" bIns="50800">
+          <a:bodyPr wrap="square" lIns="127000" tIns="50800" rIns="127000" bIns="50800" anchor="ctr">
             <a:spAutoFit/>
           </a:bodyPr>
           <a:lstStyle/>
@@ -7004,11 +6799,13 @@
           </a:ln>
         </p:spPr>
         <p:txBody>
-          <a:bodyPr wrap="square" anchor="ctr" lIns="101600" tIns="76200" rIns="101600" bIns="76200">
-            <a:spAutoFit/>
-          </a:bodyPr>
-          <a:lstStyle/>
-          <a:p/>
+          <a:bodyPr wrap="square" lIns="101600" tIns="76200" rIns="101600" bIns="76200" anchor="ctr">
+            <a:spAutoFit/>
+          </a:bodyPr>
+          <a:lstStyle/>
+          <a:p>
+            <a:endParaRPr/>
+          </a:p>
         </p:txBody>
       </p:sp>
       <p:sp>
@@ -7031,7 +6828,7 @@
           </a:ln>
         </p:spPr>
         <p:txBody>
-          <a:bodyPr wrap="square" anchor="ctr" lIns="101600" tIns="76200" rIns="101600" bIns="76200">
+          <a:bodyPr wrap="square" lIns="101600" tIns="76200" rIns="101600" bIns="76200" anchor="ctr">
             <a:spAutoFit/>
           </a:bodyPr>
           <a:lstStyle/>
@@ -7073,7 +6870,7 @@
           </a:ln>
         </p:spPr>
         <p:txBody>
-          <a:bodyPr wrap="square" anchor="ctr" lIns="127000" tIns="50800" rIns="127000" bIns="50800">
+          <a:bodyPr wrap="square" lIns="127000" tIns="50800" rIns="127000" bIns="50800" anchor="ctr">
             <a:spAutoFit/>
           </a:bodyPr>
           <a:lstStyle/>
@@ -7265,7 +7062,7 @@
       </p:pic>
       <p:grpSp>
         <p:nvGrpSpPr>
-          <p:cNvPr id="2" name="Group 9">
+          <p:cNvPr id="57" name="Group 9">
             <a:extLst>
               <a:ext uri="{FF2B5EF4-FFF2-40B4-BE49-F238E27FC236}">
                 <a16:creationId xmlns:a16="http://schemas.microsoft.com/office/drawing/2014/main" id="{845BFFFD-418A-2294-CBB5-FAD28755715C}"/>
@@ -7285,7 +7082,7 @@
         </p:grpSpPr>
         <p:sp>
           <p:nvSpPr>
-            <p:cNvPr id="3" name="Freeform 10">
+            <p:cNvPr id="58" name="Freeform 10">
               <a:extLst>
                 <a:ext uri="{FF2B5EF4-FFF2-40B4-BE49-F238E27FC236}">
                   <a16:creationId xmlns:a16="http://schemas.microsoft.com/office/drawing/2014/main" id="{323561B9-7303-DA2B-C9D3-E0748159D6AE}"/>
@@ -7390,7 +7187,7 @@
           </a:ln>
         </p:spPr>
         <p:txBody>
-          <a:bodyPr wrap="square" anchor="ctr" lIns="101600" tIns="76200" rIns="101600" bIns="76200">
+          <a:bodyPr wrap="square" lIns="101600" tIns="76200" rIns="101600" bIns="76200" anchor="ctr">
             <a:spAutoFit/>
           </a:bodyPr>
           <a:lstStyle/>
@@ -7432,7 +7229,7 @@
           </a:ln>
         </p:spPr>
         <p:txBody>
-          <a:bodyPr wrap="square" anchor="ctr" lIns="101600" tIns="76200" rIns="101600" bIns="76200">
+          <a:bodyPr wrap="square" lIns="101600" tIns="76200" rIns="101600" bIns="76200" anchor="ctr">
             <a:spAutoFit/>
           </a:bodyPr>
           <a:lstStyle/>
@@ -7474,7 +7271,7 @@
           </a:ln>
         </p:spPr>
         <p:txBody>
-          <a:bodyPr wrap="square" anchor="ctr" lIns="101600" tIns="76200" rIns="101600" bIns="76200">
+          <a:bodyPr wrap="square" lIns="101600" tIns="76200" rIns="101600" bIns="76200" anchor="ctr">
             <a:spAutoFit/>
           </a:bodyPr>
           <a:lstStyle/>
@@ -7518,7 +7315,7 @@
           </a:ln>
         </p:spPr>
         <p:txBody>
-          <a:bodyPr wrap="square" anchor="ctr" lIns="101600" tIns="76200" rIns="101600" bIns="76200">
+          <a:bodyPr wrap="square" lIns="101600" tIns="76200" rIns="101600" bIns="76200" anchor="ctr">
             <a:spAutoFit/>
           </a:bodyPr>
           <a:lstStyle/>
@@ -7560,7 +7357,7 @@
           </a:ln>
         </p:spPr>
         <p:txBody>
-          <a:bodyPr wrap="square" anchor="ctr" lIns="50800" tIns="50800" rIns="127000" bIns="50800">
+          <a:bodyPr wrap="square" lIns="50800" tIns="50800" rIns="127000" bIns="50800" anchor="ctr">
             <a:spAutoFit/>
           </a:bodyPr>
           <a:lstStyle/>
@@ -7606,7 +7403,7 @@
           </a:ln>
         </p:spPr>
         <p:txBody>
-          <a:bodyPr wrap="square" anchor="ctr" lIns="152400" tIns="127000" rIns="152400" bIns="127000">
+          <a:bodyPr wrap="square" lIns="152400" tIns="127000" rIns="152400" bIns="127000" anchor="ctr">
             <a:spAutoFit/>
           </a:bodyPr>
           <a:lstStyle/>
@@ -7664,7 +7461,7 @@
           </a:ln>
         </p:spPr>
         <p:txBody>
-          <a:bodyPr wrap="square" anchor="ctr" lIns="101600" tIns="76200" rIns="101600" bIns="76200">
+          <a:bodyPr wrap="square" lIns="101600" tIns="76200" rIns="101600" bIns="76200" anchor="ctr">
             <a:spAutoFit/>
           </a:bodyPr>
           <a:lstStyle/>
@@ -7710,7 +7507,7 @@
           </a:ln>
         </p:spPr>
         <p:txBody>
-          <a:bodyPr wrap="square" anchor="ctr" lIns="152400" tIns="127000" rIns="152400" bIns="127000">
+          <a:bodyPr wrap="square" lIns="152400" tIns="127000" rIns="152400" bIns="127000" anchor="ctr">
             <a:spAutoFit/>
           </a:bodyPr>
           <a:lstStyle/>
@@ -7768,7 +7565,7 @@
           </a:ln>
         </p:spPr>
         <p:txBody>
-          <a:bodyPr wrap="square" anchor="ctr" lIns="101600" tIns="76200" rIns="101600" bIns="76200">
+          <a:bodyPr wrap="square" lIns="101600" tIns="76200" rIns="101600" bIns="76200" anchor="ctr">
             <a:spAutoFit/>
           </a:bodyPr>
           <a:lstStyle/>
@@ -7814,7 +7611,7 @@
           </a:ln>
         </p:spPr>
         <p:txBody>
-          <a:bodyPr wrap="square" anchor="ctr" lIns="152400" tIns="127000" rIns="152400" bIns="127000">
+          <a:bodyPr wrap="square" lIns="152400" tIns="127000" rIns="152400" bIns="127000" anchor="ctr">
             <a:spAutoFit/>
           </a:bodyPr>
           <a:lstStyle/>
@@ -7872,7 +7669,7 @@
           </a:ln>
         </p:spPr>
         <p:txBody>
-          <a:bodyPr wrap="square" anchor="ctr" lIns="101600" tIns="76200" rIns="101600" bIns="76200">
+          <a:bodyPr wrap="square" lIns="101600" tIns="76200" rIns="101600" bIns="76200" anchor="ctr">
             <a:spAutoFit/>
           </a:bodyPr>
           <a:lstStyle/>
@@ -7918,7 +7715,7 @@
           </a:ln>
         </p:spPr>
         <p:txBody>
-          <a:bodyPr wrap="square" anchor="ctr" lIns="152400" tIns="127000" rIns="152400" bIns="127000">
+          <a:bodyPr wrap="square" lIns="152400" tIns="127000" rIns="152400" bIns="127000" anchor="ctr">
             <a:spAutoFit/>
           </a:bodyPr>
           <a:lstStyle/>
@@ -7976,7 +7773,7 @@
           </a:ln>
         </p:spPr>
         <p:txBody>
-          <a:bodyPr wrap="square" anchor="ctr" lIns="101600" tIns="76200" rIns="101600" bIns="76200">
+          <a:bodyPr wrap="square" lIns="101600" tIns="76200" rIns="101600" bIns="76200" anchor="ctr">
             <a:spAutoFit/>
           </a:bodyPr>
           <a:lstStyle/>
@@ -8022,7 +7819,7 @@
           </a:ln>
         </p:spPr>
         <p:txBody>
-          <a:bodyPr wrap="square" anchor="ctr" lIns="152400" tIns="127000" rIns="152400" bIns="127000">
+          <a:bodyPr wrap="square" lIns="152400" tIns="127000" rIns="152400" bIns="127000" anchor="ctr">
             <a:spAutoFit/>
           </a:bodyPr>
           <a:lstStyle/>
@@ -8080,7 +7877,7 @@
           </a:ln>
         </p:spPr>
         <p:txBody>
-          <a:bodyPr wrap="square" anchor="ctr" lIns="101600" tIns="76200" rIns="101600" bIns="76200">
+          <a:bodyPr wrap="square" lIns="101600" tIns="76200" rIns="101600" bIns="76200" anchor="ctr">
             <a:spAutoFit/>
           </a:bodyPr>
           <a:lstStyle/>
@@ -8124,7 +7921,7 @@
           </a:ln>
         </p:spPr>
         <p:txBody>
-          <a:bodyPr wrap="square" anchor="ctr" lIns="101600" tIns="76200" rIns="101600" bIns="76200">
+          <a:bodyPr wrap="square" lIns="101600" tIns="76200" rIns="101600" bIns="76200" anchor="ctr">
             <a:spAutoFit/>
           </a:bodyPr>
           <a:lstStyle/>
@@ -8168,7 +7965,7 @@
           </a:ln>
         </p:spPr>
         <p:txBody>
-          <a:bodyPr wrap="square" anchor="ctr" lIns="101600" tIns="76200" rIns="101600" bIns="76200">
+          <a:bodyPr wrap="square" lIns="101600" tIns="76200" rIns="101600" bIns="76200" anchor="ctr">
             <a:spAutoFit/>
           </a:bodyPr>
           <a:lstStyle/>
@@ -8209,16 +8006,46 @@
                 <a:tableStyleId>{5C22544A-7EE6-4342-B048-85BDC9FD1C3A}</a:tableStyleId>
               </a:tblPr>
               <a:tblGrid>
-                <a:gridCol w="2743200"/>
-                <a:gridCol w="1691640"/>
-                <a:gridCol w="1508760"/>
-                <a:gridCol w="1463040"/>
-                <a:gridCol w="1481328"/>
+                <a:gridCol w="2743200">
+                  <a:extLst>
+                    <a:ext uri="{9D8B030D-6E8A-4147-A177-3AD203B41FA5}">
+                      <a16:colId xmlns:a16="http://schemas.microsoft.com/office/drawing/2014/main" val="20000"/>
+                    </a:ext>
+                  </a:extLst>
+                </a:gridCol>
+                <a:gridCol w="1691640">
+                  <a:extLst>
+                    <a:ext uri="{9D8B030D-6E8A-4147-A177-3AD203B41FA5}">
+                      <a16:colId xmlns:a16="http://schemas.microsoft.com/office/drawing/2014/main" val="20001"/>
+                    </a:ext>
+                  </a:extLst>
+                </a:gridCol>
+                <a:gridCol w="1508760">
+                  <a:extLst>
+                    <a:ext uri="{9D8B030D-6E8A-4147-A177-3AD203B41FA5}">
+                      <a16:colId xmlns:a16="http://schemas.microsoft.com/office/drawing/2014/main" val="20002"/>
+                    </a:ext>
+                  </a:extLst>
+                </a:gridCol>
+                <a:gridCol w="1463040">
+                  <a:extLst>
+                    <a:ext uri="{9D8B030D-6E8A-4147-A177-3AD203B41FA5}">
+                      <a16:colId xmlns:a16="http://schemas.microsoft.com/office/drawing/2014/main" val="20003"/>
+                    </a:ext>
+                  </a:extLst>
+                </a:gridCol>
+                <a:gridCol w="1481328">
+                  <a:extLst>
+                    <a:ext uri="{9D8B030D-6E8A-4147-A177-3AD203B41FA5}">
+                      <a16:colId xmlns:a16="http://schemas.microsoft.com/office/drawing/2014/main" val="20004"/>
+                    </a:ext>
+                  </a:extLst>
+                </a:gridCol>
               </a:tblGrid>
               <a:tr h="634594">
                 <a:tc>
                   <a:txBody>
-                    <a:bodyPr wrap="square"/>
+                    <a:bodyPr/>
                     <a:lstStyle/>
                     <a:p>
                       <a:pPr algn="l">
@@ -8237,7 +8064,7 @@
                       </a:r>
                     </a:p>
                   </a:txBody>
-                  <a:tcPr anchor="ctr" marL="76200" marR="76200" marT="38100" marB="38100">
+                  <a:tcPr marL="76200" marR="76200" marT="38100" marB="38100" anchor="ctr">
                     <a:lnL w="6350">
                       <a:solidFill>
                         <a:srgbClr val="F3F1ED"/>
@@ -8265,7 +8092,7 @@
                 </a:tc>
                 <a:tc>
                   <a:txBody>
-                    <a:bodyPr wrap="square"/>
+                    <a:bodyPr/>
                     <a:lstStyle/>
                     <a:p>
                       <a:pPr algn="ctr">
@@ -8284,7 +8111,7 @@
                       </a:r>
                     </a:p>
                   </a:txBody>
-                  <a:tcPr anchor="ctr" marL="76200" marR="76200" marT="38100" marB="38100">
+                  <a:tcPr marL="76200" marR="76200" marT="38100" marB="38100" anchor="ctr">
                     <a:lnL w="6350">
                       <a:solidFill>
                         <a:srgbClr val="F3F1ED"/>
@@ -8312,7 +8139,7 @@
                 </a:tc>
                 <a:tc>
                   <a:txBody>
-                    <a:bodyPr wrap="square"/>
+                    <a:bodyPr/>
                     <a:lstStyle/>
                     <a:p>
                       <a:pPr algn="ctr">
@@ -8331,7 +8158,7 @@
                       </a:r>
                     </a:p>
                   </a:txBody>
-                  <a:tcPr anchor="ctr" marL="76200" marR="76200" marT="38100" marB="38100">
+                  <a:tcPr marL="76200" marR="76200" marT="38100" marB="38100" anchor="ctr">
                     <a:lnL w="6350">
                       <a:solidFill>
                         <a:srgbClr val="F3F1ED"/>
@@ -8359,7 +8186,7 @@
                 </a:tc>
                 <a:tc>
                   <a:txBody>
-                    <a:bodyPr wrap="square"/>
+                    <a:bodyPr/>
                     <a:lstStyle/>
                     <a:p>
                       <a:pPr algn="ctr">
@@ -8378,7 +8205,7 @@
                       </a:r>
                     </a:p>
                   </a:txBody>
-                  <a:tcPr anchor="ctr" marL="76200" marR="76200" marT="38100" marB="38100">
+                  <a:tcPr marL="76200" marR="76200" marT="38100" marB="38100" anchor="ctr">
                     <a:lnL w="6350">
                       <a:solidFill>
                         <a:srgbClr val="F3F1ED"/>
@@ -8406,7 +8233,7 @@
                 </a:tc>
                 <a:tc>
                   <a:txBody>
-                    <a:bodyPr wrap="square"/>
+                    <a:bodyPr/>
                     <a:lstStyle/>
                     <a:p>
                       <a:pPr algn="ctr">
@@ -8425,7 +8252,7 @@
                       </a:r>
                     </a:p>
                   </a:txBody>
-                  <a:tcPr anchor="ctr" marL="76200" marR="76200" marT="38100" marB="38100">
+                  <a:tcPr marL="76200" marR="76200" marT="38100" marB="38100" anchor="ctr">
                     <a:lnL w="6350">
                       <a:solidFill>
                         <a:srgbClr val="F3F1ED"/>
@@ -8451,11 +8278,16 @@
                     </a:solidFill>
                   </a:tcPr>
                 </a:tc>
+                <a:extLst>
+                  <a:ext uri="{0D108BD9-81ED-4DB2-BD59-A6C34878D82A}">
+                    <a16:rowId xmlns:a16="http://schemas.microsoft.com/office/drawing/2014/main" val="10000"/>
+                  </a:ext>
+                </a:extLst>
               </a:tr>
               <a:tr h="748894">
                 <a:tc>
                   <a:txBody>
-                    <a:bodyPr wrap="square"/>
+                    <a:bodyPr/>
                     <a:lstStyle/>
                     <a:p>
                       <a:pPr algn="l">
@@ -8474,7 +8306,7 @@
                       </a:r>
                     </a:p>
                   </a:txBody>
-                  <a:tcPr anchor="ctr" marL="76200" marR="76200" marT="38100" marB="38100">
+                  <a:tcPr marL="76200" marR="76200" marT="38100" marB="38100" anchor="ctr">
                     <a:lnL w="6350">
                       <a:solidFill>
                         <a:srgbClr val="F3F1ED"/>
@@ -8502,7 +8334,7 @@
                 </a:tc>
                 <a:tc>
                   <a:txBody>
-                    <a:bodyPr wrap="square"/>
+                    <a:bodyPr/>
                     <a:lstStyle/>
                     <a:p>
                       <a:pPr algn="ctr">
@@ -8521,7 +8353,7 @@
                       </a:r>
                     </a:p>
                   </a:txBody>
-                  <a:tcPr anchor="ctr" marL="76200" marR="76200" marT="38100" marB="38100">
+                  <a:tcPr marL="76200" marR="76200" marT="38100" marB="38100" anchor="ctr">
                     <a:lnL w="6350">
                       <a:solidFill>
                         <a:srgbClr val="F3F1ED"/>
@@ -8549,7 +8381,7 @@
                 </a:tc>
                 <a:tc>
                   <a:txBody>
-                    <a:bodyPr wrap="square"/>
+                    <a:bodyPr/>
                     <a:lstStyle/>
                     <a:p>
                       <a:pPr algn="ctr">
@@ -8568,7 +8400,7 @@
                       </a:r>
                     </a:p>
                   </a:txBody>
-                  <a:tcPr anchor="ctr" marL="76200" marR="76200" marT="38100" marB="38100">
+                  <a:tcPr marL="76200" marR="76200" marT="38100" marB="38100" anchor="ctr">
                     <a:lnL w="6350">
                       <a:solidFill>
                         <a:srgbClr val="F3F1ED"/>
@@ -8596,7 +8428,7 @@
                 </a:tc>
                 <a:tc>
                   <a:txBody>
-                    <a:bodyPr wrap="square"/>
+                    <a:bodyPr/>
                     <a:lstStyle/>
                     <a:p>
                       <a:pPr algn="ctr">
@@ -8615,7 +8447,7 @@
                       </a:r>
                     </a:p>
                   </a:txBody>
-                  <a:tcPr anchor="ctr" marL="76200" marR="76200" marT="38100" marB="38100">
+                  <a:tcPr marL="76200" marR="76200" marT="38100" marB="38100" anchor="ctr">
                     <a:lnL w="6350">
                       <a:solidFill>
                         <a:srgbClr val="F3F1ED"/>
@@ -8643,7 +8475,7 @@
                 </a:tc>
                 <a:tc>
                   <a:txBody>
-                    <a:bodyPr wrap="square"/>
+                    <a:bodyPr/>
                     <a:lstStyle/>
                     <a:p>
                       <a:pPr algn="ctr">
@@ -8662,7 +8494,7 @@
                       </a:r>
                     </a:p>
                   </a:txBody>
-                  <a:tcPr anchor="ctr" marL="76200" marR="76200" marT="38100" marB="38100">
+                  <a:tcPr marL="76200" marR="76200" marT="38100" marB="38100" anchor="ctr">
                     <a:lnL w="6350">
                       <a:solidFill>
                         <a:srgbClr val="F3F1ED"/>
@@ -8688,11 +8520,16 @@
                     </a:solidFill>
                   </a:tcPr>
                 </a:tc>
+                <a:extLst>
+                  <a:ext uri="{0D108BD9-81ED-4DB2-BD59-A6C34878D82A}">
+                    <a16:rowId xmlns:a16="http://schemas.microsoft.com/office/drawing/2014/main" val="10001"/>
+                  </a:ext>
+                </a:extLst>
               </a:tr>
               <a:tr h="748894">
                 <a:tc>
                   <a:txBody>
-                    <a:bodyPr wrap="square"/>
+                    <a:bodyPr/>
                     <a:lstStyle/>
                     <a:p>
                       <a:pPr algn="l">
@@ -8711,7 +8548,7 @@
                       </a:r>
                     </a:p>
                   </a:txBody>
-                  <a:tcPr anchor="ctr" marL="76200" marR="76200" marT="38100" marB="38100">
+                  <a:tcPr marL="76200" marR="76200" marT="38100" marB="38100" anchor="ctr">
                     <a:lnL w="6350">
                       <a:solidFill>
                         <a:srgbClr val="F3F1ED"/>
@@ -8739,7 +8576,7 @@
                 </a:tc>
                 <a:tc>
                   <a:txBody>
-                    <a:bodyPr wrap="square"/>
+                    <a:bodyPr/>
                     <a:lstStyle/>
                     <a:p>
                       <a:pPr algn="ctr">
@@ -8758,7 +8595,7 @@
                       </a:r>
                     </a:p>
                   </a:txBody>
-                  <a:tcPr anchor="ctr" marL="76200" marR="76200" marT="38100" marB="38100">
+                  <a:tcPr marL="76200" marR="76200" marT="38100" marB="38100" anchor="ctr">
                     <a:lnL w="6350">
                       <a:solidFill>
                         <a:srgbClr val="F3F1ED"/>
@@ -8786,7 +8623,7 @@
                 </a:tc>
                 <a:tc>
                   <a:txBody>
-                    <a:bodyPr wrap="square"/>
+                    <a:bodyPr/>
                     <a:lstStyle/>
                     <a:p>
                       <a:pPr algn="ctr">
@@ -8805,7 +8642,7 @@
                       </a:r>
                     </a:p>
                   </a:txBody>
-                  <a:tcPr anchor="ctr" marL="76200" marR="76200" marT="38100" marB="38100">
+                  <a:tcPr marL="76200" marR="76200" marT="38100" marB="38100" anchor="ctr">
                     <a:lnL w="6350">
                       <a:solidFill>
                         <a:srgbClr val="F3F1ED"/>
@@ -8833,7 +8670,7 @@
                 </a:tc>
                 <a:tc>
                   <a:txBody>
-                    <a:bodyPr wrap="square"/>
+                    <a:bodyPr/>
                     <a:lstStyle/>
                     <a:p>
                       <a:pPr algn="ctr">
@@ -8852,7 +8689,7 @@
                       </a:r>
                     </a:p>
                   </a:txBody>
-                  <a:tcPr anchor="ctr" marL="76200" marR="76200" marT="38100" marB="38100">
+                  <a:tcPr marL="76200" marR="76200" marT="38100" marB="38100" anchor="ctr">
                     <a:lnL w="6350">
                       <a:solidFill>
                         <a:srgbClr val="F3F1ED"/>
@@ -8880,7 +8717,7 @@
                 </a:tc>
                 <a:tc>
                   <a:txBody>
-                    <a:bodyPr wrap="square"/>
+                    <a:bodyPr/>
                     <a:lstStyle/>
                     <a:p>
                       <a:pPr algn="ctr">
@@ -8899,7 +8736,7 @@
                       </a:r>
                     </a:p>
                   </a:txBody>
-                  <a:tcPr anchor="ctr" marL="76200" marR="76200" marT="38100" marB="38100">
+                  <a:tcPr marL="76200" marR="76200" marT="38100" marB="38100" anchor="ctr">
                     <a:lnL w="6350">
                       <a:solidFill>
                         <a:srgbClr val="F3F1ED"/>
@@ -8925,11 +8762,16 @@
                     </a:solidFill>
                   </a:tcPr>
                 </a:tc>
+                <a:extLst>
+                  <a:ext uri="{0D108BD9-81ED-4DB2-BD59-A6C34878D82A}">
+                    <a16:rowId xmlns:a16="http://schemas.microsoft.com/office/drawing/2014/main" val="10002"/>
+                  </a:ext>
+                </a:extLst>
               </a:tr>
               <a:tr h="748894">
                 <a:tc>
                   <a:txBody>
-                    <a:bodyPr wrap="square"/>
+                    <a:bodyPr/>
                     <a:lstStyle/>
                     <a:p>
                       <a:pPr algn="l">
@@ -8948,7 +8790,7 @@
                       </a:r>
                     </a:p>
                   </a:txBody>
-                  <a:tcPr anchor="ctr" marL="76200" marR="76200" marT="38100" marB="38100">
+                  <a:tcPr marL="76200" marR="76200" marT="38100" marB="38100" anchor="ctr">
                     <a:lnL w="6350">
                       <a:solidFill>
                         <a:srgbClr val="F3F1ED"/>
@@ -8976,7 +8818,7 @@
                 </a:tc>
                 <a:tc>
                   <a:txBody>
-                    <a:bodyPr wrap="square"/>
+                    <a:bodyPr/>
                     <a:lstStyle/>
                     <a:p>
                       <a:pPr algn="ctr">
@@ -8995,7 +8837,7 @@
                       </a:r>
                     </a:p>
                   </a:txBody>
-                  <a:tcPr anchor="ctr" marL="76200" marR="76200" marT="38100" marB="38100">
+                  <a:tcPr marL="76200" marR="76200" marT="38100" marB="38100" anchor="ctr">
                     <a:lnL w="6350">
                       <a:solidFill>
                         <a:srgbClr val="F3F1ED"/>
@@ -9023,7 +8865,7 @@
                 </a:tc>
                 <a:tc>
                   <a:txBody>
-                    <a:bodyPr wrap="square"/>
+                    <a:bodyPr/>
                     <a:lstStyle/>
                     <a:p>
                       <a:pPr algn="ctr">
@@ -9042,7 +8884,7 @@
                       </a:r>
                     </a:p>
                   </a:txBody>
-                  <a:tcPr anchor="ctr" marL="76200" marR="76200" marT="38100" marB="38100">
+                  <a:tcPr marL="76200" marR="76200" marT="38100" marB="38100" anchor="ctr">
                     <a:lnL w="6350">
                       <a:solidFill>
                         <a:srgbClr val="F3F1ED"/>
@@ -9070,7 +8912,7 @@
                 </a:tc>
                 <a:tc>
                   <a:txBody>
-                    <a:bodyPr wrap="square"/>
+                    <a:bodyPr/>
                     <a:lstStyle/>
                     <a:p>
                       <a:pPr algn="ctr">
@@ -9089,7 +8931,7 @@
                       </a:r>
                     </a:p>
                   </a:txBody>
-                  <a:tcPr anchor="ctr" marL="76200" marR="76200" marT="38100" marB="38100">
+                  <a:tcPr marL="76200" marR="76200" marT="38100" marB="38100" anchor="ctr">
                     <a:lnL w="6350">
                       <a:solidFill>
                         <a:srgbClr val="F3F1ED"/>
@@ -9117,7 +8959,7 @@
                 </a:tc>
                 <a:tc>
                   <a:txBody>
-                    <a:bodyPr wrap="square"/>
+                    <a:bodyPr/>
                     <a:lstStyle/>
                     <a:p>
                       <a:pPr algn="ctr">
@@ -9136,7 +8978,7 @@
                       </a:r>
                     </a:p>
                   </a:txBody>
-                  <a:tcPr anchor="ctr" marL="76200" marR="76200" marT="38100" marB="38100">
+                  <a:tcPr marL="76200" marR="76200" marT="38100" marB="38100" anchor="ctr">
                     <a:lnL w="6350">
                       <a:solidFill>
                         <a:srgbClr val="F3F1ED"/>
@@ -9162,11 +9004,16 @@
                     </a:solidFill>
                   </a:tcPr>
                 </a:tc>
+                <a:extLst>
+                  <a:ext uri="{0D108BD9-81ED-4DB2-BD59-A6C34878D82A}">
+                    <a16:rowId xmlns:a16="http://schemas.microsoft.com/office/drawing/2014/main" val="10003"/>
+                  </a:ext>
+                </a:extLst>
               </a:tr>
               <a:tr h="748894">
                 <a:tc>
                   <a:txBody>
-                    <a:bodyPr wrap="square"/>
+                    <a:bodyPr/>
                     <a:lstStyle/>
                     <a:p>
                       <a:pPr algn="l">
@@ -9185,7 +9032,7 @@
                       </a:r>
                     </a:p>
                   </a:txBody>
-                  <a:tcPr anchor="ctr" marL="76200" marR="76200" marT="38100" marB="38100">
+                  <a:tcPr marL="76200" marR="76200" marT="38100" marB="38100" anchor="ctr">
                     <a:lnL w="6350">
                       <a:solidFill>
                         <a:srgbClr val="F3F1ED"/>
@@ -9213,7 +9060,7 @@
                 </a:tc>
                 <a:tc>
                   <a:txBody>
-                    <a:bodyPr wrap="square"/>
+                    <a:bodyPr/>
                     <a:lstStyle/>
                     <a:p>
                       <a:pPr algn="ctr">
@@ -9232,7 +9079,7 @@
                       </a:r>
                     </a:p>
                   </a:txBody>
-                  <a:tcPr anchor="ctr" marL="76200" marR="76200" marT="38100" marB="38100">
+                  <a:tcPr marL="76200" marR="76200" marT="38100" marB="38100" anchor="ctr">
                     <a:lnL w="6350">
                       <a:solidFill>
                         <a:srgbClr val="F3F1ED"/>
@@ -9260,7 +9107,7 @@
                 </a:tc>
                 <a:tc>
                   <a:txBody>
-                    <a:bodyPr wrap="square"/>
+                    <a:bodyPr/>
                     <a:lstStyle/>
                     <a:p>
                       <a:pPr algn="ctr">
@@ -9279,7 +9126,7 @@
                       </a:r>
                     </a:p>
                   </a:txBody>
-                  <a:tcPr anchor="ctr" marL="76200" marR="76200" marT="38100" marB="38100">
+                  <a:tcPr marL="76200" marR="76200" marT="38100" marB="38100" anchor="ctr">
                     <a:lnL w="6350">
                       <a:solidFill>
                         <a:srgbClr val="F3F1ED"/>
@@ -9307,7 +9154,7 @@
                 </a:tc>
                 <a:tc>
                   <a:txBody>
-                    <a:bodyPr wrap="square"/>
+                    <a:bodyPr/>
                     <a:lstStyle/>
                     <a:p>
                       <a:pPr algn="ctr">
@@ -9326,7 +9173,7 @@
                       </a:r>
                     </a:p>
                   </a:txBody>
-                  <a:tcPr anchor="ctr" marL="76200" marR="76200" marT="38100" marB="38100">
+                  <a:tcPr marL="76200" marR="76200" marT="38100" marB="38100" anchor="ctr">
                     <a:lnL w="6350">
                       <a:solidFill>
                         <a:srgbClr val="F3F1ED"/>
@@ -9354,7 +9201,7 @@
                 </a:tc>
                 <a:tc>
                   <a:txBody>
-                    <a:bodyPr wrap="square"/>
+                    <a:bodyPr/>
                     <a:lstStyle/>
                     <a:p>
                       <a:pPr algn="ctr">
@@ -9373,7 +9220,7 @@
                       </a:r>
                     </a:p>
                   </a:txBody>
-                  <a:tcPr anchor="ctr" marL="76200" marR="76200" marT="38100" marB="38100">
+                  <a:tcPr marL="76200" marR="76200" marT="38100" marB="38100" anchor="ctr">
                     <a:lnL w="6350">
                       <a:solidFill>
                         <a:srgbClr val="F3F1ED"/>
@@ -9399,11 +9246,16 @@
                     </a:solidFill>
                   </a:tcPr>
                 </a:tc>
+                <a:extLst>
+                  <a:ext uri="{0D108BD9-81ED-4DB2-BD59-A6C34878D82A}">
+                    <a16:rowId xmlns:a16="http://schemas.microsoft.com/office/drawing/2014/main" val="10004"/>
+                  </a:ext>
+                </a:extLst>
               </a:tr>
               <a:tr h="748894">
                 <a:tc>
                   <a:txBody>
-                    <a:bodyPr wrap="square"/>
+                    <a:bodyPr/>
                     <a:lstStyle/>
                     <a:p>
                       <a:pPr algn="l">
@@ -9422,7 +9274,7 @@
                       </a:r>
                     </a:p>
                   </a:txBody>
-                  <a:tcPr anchor="ctr" marL="76200" marR="76200" marT="38100" marB="38100">
+                  <a:tcPr marL="76200" marR="76200" marT="38100" marB="38100" anchor="ctr">
                     <a:lnL w="6350">
                       <a:solidFill>
                         <a:srgbClr val="F3F1ED"/>
@@ -9450,7 +9302,7 @@
                 </a:tc>
                 <a:tc>
                   <a:txBody>
-                    <a:bodyPr wrap="square"/>
+                    <a:bodyPr/>
                     <a:lstStyle/>
                     <a:p>
                       <a:pPr algn="ctr">
@@ -9469,7 +9321,7 @@
                       </a:r>
                     </a:p>
                   </a:txBody>
-                  <a:tcPr anchor="ctr" marL="76200" marR="76200" marT="38100" marB="38100">
+                  <a:tcPr marL="76200" marR="76200" marT="38100" marB="38100" anchor="ctr">
                     <a:lnL w="6350">
                       <a:solidFill>
                         <a:srgbClr val="F3F1ED"/>
@@ -9497,7 +9349,7 @@
                 </a:tc>
                 <a:tc>
                   <a:txBody>
-                    <a:bodyPr wrap="square"/>
+                    <a:bodyPr/>
                     <a:lstStyle/>
                     <a:p>
                       <a:pPr algn="ctr">
@@ -9516,7 +9368,7 @@
                       </a:r>
                     </a:p>
                   </a:txBody>
-                  <a:tcPr anchor="ctr" marL="76200" marR="76200" marT="38100" marB="38100">
+                  <a:tcPr marL="76200" marR="76200" marT="38100" marB="38100" anchor="ctr">
                     <a:lnL w="6350">
                       <a:solidFill>
                         <a:srgbClr val="F3F1ED"/>
@@ -9544,7 +9396,7 @@
                 </a:tc>
                 <a:tc>
                   <a:txBody>
-                    <a:bodyPr wrap="square"/>
+                    <a:bodyPr/>
                     <a:lstStyle/>
                     <a:p>
                       <a:pPr algn="ctr">
@@ -9563,7 +9415,7 @@
                       </a:r>
                     </a:p>
                   </a:txBody>
-                  <a:tcPr anchor="ctr" marL="76200" marR="76200" marT="38100" marB="38100">
+                  <a:tcPr marL="76200" marR="76200" marT="38100" marB="38100" anchor="ctr">
                     <a:lnL w="6350">
                       <a:solidFill>
                         <a:srgbClr val="F3F1ED"/>
@@ -9591,7 +9443,7 @@
                 </a:tc>
                 <a:tc>
                   <a:txBody>
-                    <a:bodyPr wrap="square"/>
+                    <a:bodyPr/>
                     <a:lstStyle/>
                     <a:p>
                       <a:pPr algn="ctr">
@@ -9610,7 +9462,7 @@
                       </a:r>
                     </a:p>
                   </a:txBody>
-                  <a:tcPr anchor="ctr" marL="76200" marR="76200" marT="38100" marB="38100">
+                  <a:tcPr marL="76200" marR="76200" marT="38100" marB="38100" anchor="ctr">
                     <a:lnL w="6350">
                       <a:solidFill>
                         <a:srgbClr val="F3F1ED"/>
@@ -9636,11 +9488,16 @@
                     </a:solidFill>
                   </a:tcPr>
                 </a:tc>
+                <a:extLst>
+                  <a:ext uri="{0D108BD9-81ED-4DB2-BD59-A6C34878D82A}">
+                    <a16:rowId xmlns:a16="http://schemas.microsoft.com/office/drawing/2014/main" val="10005"/>
+                  </a:ext>
+                </a:extLst>
               </a:tr>
               <a:tr h="748894">
                 <a:tc>
                   <a:txBody>
-                    <a:bodyPr wrap="square"/>
+                    <a:bodyPr/>
                     <a:lstStyle/>
                     <a:p>
                       <a:pPr algn="l">
@@ -9659,7 +9516,7 @@
                       </a:r>
                     </a:p>
                   </a:txBody>
-                  <a:tcPr anchor="ctr" marL="76200" marR="76200" marT="38100" marB="38100">
+                  <a:tcPr marL="76200" marR="76200" marT="38100" marB="38100" anchor="ctr">
                     <a:lnL w="6350">
                       <a:solidFill>
                         <a:srgbClr val="F3F1ED"/>
@@ -9687,7 +9544,7 @@
                 </a:tc>
                 <a:tc>
                   <a:txBody>
-                    <a:bodyPr wrap="square"/>
+                    <a:bodyPr/>
                     <a:lstStyle/>
                     <a:p>
                       <a:pPr algn="ctr">
@@ -9706,7 +9563,7 @@
                       </a:r>
                     </a:p>
                   </a:txBody>
-                  <a:tcPr anchor="ctr" marL="76200" marR="76200" marT="38100" marB="38100">
+                  <a:tcPr marL="76200" marR="76200" marT="38100" marB="38100" anchor="ctr">
                     <a:lnL w="6350">
                       <a:solidFill>
                         <a:srgbClr val="F3F1ED"/>
@@ -9734,7 +9591,7 @@
                 </a:tc>
                 <a:tc>
                   <a:txBody>
-                    <a:bodyPr wrap="square"/>
+                    <a:bodyPr/>
                     <a:lstStyle/>
                     <a:p>
                       <a:pPr algn="ctr">
@@ -9753,7 +9610,7 @@
                       </a:r>
                     </a:p>
                   </a:txBody>
-                  <a:tcPr anchor="ctr" marL="76200" marR="76200" marT="38100" marB="38100">
+                  <a:tcPr marL="76200" marR="76200" marT="38100" marB="38100" anchor="ctr">
                     <a:lnL w="6350">
                       <a:solidFill>
                         <a:srgbClr val="F3F1ED"/>
@@ -9781,7 +9638,7 @@
                 </a:tc>
                 <a:tc>
                   <a:txBody>
-                    <a:bodyPr wrap="square"/>
+                    <a:bodyPr/>
                     <a:lstStyle/>
                     <a:p>
                       <a:pPr algn="ctr">
@@ -9800,7 +9657,7 @@
                       </a:r>
                     </a:p>
                   </a:txBody>
-                  <a:tcPr anchor="ctr" marL="76200" marR="76200" marT="38100" marB="38100">
+                  <a:tcPr marL="76200" marR="76200" marT="38100" marB="38100" anchor="ctr">
                     <a:lnL w="6350">
                       <a:solidFill>
                         <a:srgbClr val="F3F1ED"/>
@@ -9828,7 +9685,7 @@
                 </a:tc>
                 <a:tc>
                   <a:txBody>
-                    <a:bodyPr wrap="square"/>
+                    <a:bodyPr/>
                     <a:lstStyle/>
                     <a:p>
                       <a:pPr algn="ctr">
@@ -9847,7 +9704,7 @@
                       </a:r>
                     </a:p>
                   </a:txBody>
-                  <a:tcPr anchor="ctr" marL="76200" marR="76200" marT="38100" marB="38100">
+                  <a:tcPr marL="76200" marR="76200" marT="38100" marB="38100" anchor="ctr">
                     <a:lnL w="6350">
                       <a:solidFill>
                         <a:srgbClr val="F3F1ED"/>
@@ -9873,6 +9730,11 @@
                     </a:solidFill>
                   </a:tcPr>
                 </a:tc>
+                <a:extLst>
+                  <a:ext uri="{0D108BD9-81ED-4DB2-BD59-A6C34878D82A}">
+                    <a16:rowId xmlns:a16="http://schemas.microsoft.com/office/drawing/2014/main" val="10006"/>
+                  </a:ext>
+                </a:extLst>
               </a:tr>
             </a:tbl>
           </a:graphicData>
@@ -9902,7 +9764,7 @@
           </a:ln>
         </p:spPr>
         <p:txBody>
-          <a:bodyPr wrap="square" anchor="ctr" lIns="101600" tIns="101600" rIns="101600" bIns="101600">
+          <a:bodyPr wrap="square" lIns="101600" tIns="101600" rIns="101600" bIns="101600" anchor="ctr">
             <a:spAutoFit/>
           </a:bodyPr>
           <a:lstStyle/>
@@ -9964,7 +9826,7 @@
           </a:ln>
         </p:spPr>
         <p:txBody>
-          <a:bodyPr wrap="square" anchor="ctr" lIns="101600" tIns="101600" rIns="101600" bIns="101600">
+          <a:bodyPr wrap="square" lIns="101600" tIns="101600" rIns="101600" bIns="101600" anchor="ctr">
             <a:spAutoFit/>
           </a:bodyPr>
           <a:lstStyle/>
@@ -10026,7 +9888,7 @@
           </a:ln>
         </p:spPr>
         <p:txBody>
-          <a:bodyPr wrap="square" anchor="ctr" lIns="101600" tIns="101600" rIns="101600" bIns="101600">
+          <a:bodyPr wrap="square" lIns="101600" tIns="101600" rIns="101600" bIns="101600" anchor="ctr">
             <a:spAutoFit/>
           </a:bodyPr>
           <a:lstStyle/>
@@ -10088,7 +9950,7 @@
           </a:ln>
         </p:spPr>
         <p:txBody>
-          <a:bodyPr wrap="square" anchor="ctr" lIns="101600" tIns="101600" rIns="101600" bIns="101600">
+          <a:bodyPr wrap="square" lIns="101600" tIns="101600" rIns="101600" bIns="101600" anchor="ctr">
             <a:spAutoFit/>
           </a:bodyPr>
           <a:lstStyle/>
@@ -10150,11 +10012,13 @@
           </a:ln>
         </p:spPr>
         <p:txBody>
-          <a:bodyPr wrap="square" anchor="ctr" lIns="101600" tIns="76200" rIns="101600" bIns="76200">
-            <a:spAutoFit/>
-          </a:bodyPr>
-          <a:lstStyle/>
-          <a:p/>
+          <a:bodyPr wrap="square" lIns="101600" tIns="76200" rIns="101600" bIns="76200" anchor="ctr">
+            <a:spAutoFit/>
+          </a:bodyPr>
+          <a:lstStyle/>
+          <a:p>
+            <a:endParaRPr/>
+          </a:p>
         </p:txBody>
       </p:sp>
       <p:sp>
@@ -10179,7 +10043,7 @@
           </a:ln>
         </p:spPr>
         <p:txBody>
-          <a:bodyPr wrap="square" anchor="ctr" lIns="101600" tIns="76200" rIns="101600" bIns="76200">
+          <a:bodyPr wrap="square" lIns="101600" tIns="76200" rIns="101600" bIns="76200" anchor="ctr">
             <a:spAutoFit/>
           </a:bodyPr>
           <a:lstStyle/>
@@ -10221,7 +10085,7 @@
           </a:ln>
         </p:spPr>
         <p:txBody>
-          <a:bodyPr wrap="square" anchor="t" lIns="152400" tIns="76200" rIns="127000" bIns="76200">
+          <a:bodyPr wrap="square" lIns="152400" tIns="76200" rIns="127000" bIns="76200" anchor="t">
             <a:spAutoFit/>
           </a:bodyPr>
           <a:lstStyle/>
@@ -10356,11 +10220,13 @@
           </a:ln>
         </p:spPr>
         <p:txBody>
-          <a:bodyPr wrap="square" anchor="ctr" lIns="101600" tIns="76200" rIns="101600" bIns="76200">
-            <a:spAutoFit/>
-          </a:bodyPr>
-          <a:lstStyle/>
-          <a:p/>
+          <a:bodyPr wrap="square" lIns="101600" tIns="76200" rIns="101600" bIns="76200" anchor="ctr">
+            <a:spAutoFit/>
+          </a:bodyPr>
+          <a:lstStyle/>
+          <a:p>
+            <a:endParaRPr/>
+          </a:p>
         </p:txBody>
       </p:sp>
       <p:sp>
@@ -10385,7 +10251,7 @@
           </a:ln>
         </p:spPr>
         <p:txBody>
-          <a:bodyPr wrap="square" anchor="ctr" lIns="101600" tIns="76200" rIns="101600" bIns="76200">
+          <a:bodyPr wrap="square" lIns="101600" tIns="76200" rIns="101600" bIns="76200" anchor="ctr">
             <a:spAutoFit/>
           </a:bodyPr>
           <a:lstStyle/>
@@ -10427,7 +10293,7 @@
           </a:ln>
         </p:spPr>
         <p:txBody>
-          <a:bodyPr wrap="square" anchor="t" lIns="152400" tIns="76200" rIns="127000" bIns="76200">
+          <a:bodyPr wrap="square" lIns="152400" tIns="76200" rIns="127000" bIns="76200" anchor="t">
             <a:spAutoFit/>
           </a:bodyPr>
           <a:lstStyle/>
@@ -10780,7 +10646,7 @@
       </p:pic>
       <p:grpSp>
         <p:nvGrpSpPr>
-          <p:cNvPr id="2" name="Group 9">
+          <p:cNvPr id="30" name="Group 9">
             <a:extLst>
               <a:ext uri="{FF2B5EF4-FFF2-40B4-BE49-F238E27FC236}">
                 <a16:creationId xmlns:a16="http://schemas.microsoft.com/office/drawing/2014/main" id="{23BA2282-F019-EEB1-5B51-8FD96797F08B}"/>
@@ -10800,7 +10666,7 @@
         </p:grpSpPr>
         <p:sp>
           <p:nvSpPr>
-            <p:cNvPr id="3" name="Freeform 10">
+            <p:cNvPr id="31" name="Freeform 10">
               <a:extLst>
                 <a:ext uri="{FF2B5EF4-FFF2-40B4-BE49-F238E27FC236}">
                   <a16:creationId xmlns:a16="http://schemas.microsoft.com/office/drawing/2014/main" id="{5A386E9E-3DED-F41A-ECC7-49B24FCAE7CA}"/>
@@ -10905,7 +10771,7 @@
           </a:ln>
         </p:spPr>
         <p:txBody>
-          <a:bodyPr wrap="square" anchor="ctr" lIns="101600" tIns="76200" rIns="101600" bIns="76200">
+          <a:bodyPr wrap="square" lIns="101600" tIns="76200" rIns="101600" bIns="76200" anchor="ctr">
             <a:spAutoFit/>
           </a:bodyPr>
           <a:lstStyle/>
@@ -10947,7 +10813,7 @@
           </a:ln>
         </p:spPr>
         <p:txBody>
-          <a:bodyPr wrap="square" anchor="ctr" lIns="101600" tIns="76200" rIns="101600" bIns="76200">
+          <a:bodyPr wrap="square" lIns="101600" tIns="76200" rIns="101600" bIns="76200" anchor="ctr">
             <a:spAutoFit/>
           </a:bodyPr>
           <a:lstStyle/>
@@ -10991,7 +10857,7 @@
           </a:ln>
         </p:spPr>
         <p:txBody>
-          <a:bodyPr wrap="square" anchor="ctr" lIns="101600" tIns="76200" rIns="101600" bIns="76200">
+          <a:bodyPr wrap="square" lIns="101600" tIns="76200" rIns="101600" bIns="76200" anchor="ctr">
             <a:spAutoFit/>
           </a:bodyPr>
           <a:lstStyle/>
@@ -11033,7 +10899,7 @@
           </a:ln>
         </p:spPr>
         <p:txBody>
-          <a:bodyPr wrap="square" anchor="ctr" lIns="50800" tIns="50800" rIns="127000" bIns="50800">
+          <a:bodyPr wrap="square" lIns="50800" tIns="50800" rIns="127000" bIns="50800" anchor="ctr">
             <a:spAutoFit/>
           </a:bodyPr>
           <a:lstStyle/>
@@ -11079,11 +10945,13 @@
           </a:ln>
         </p:spPr>
         <p:txBody>
-          <a:bodyPr wrap="square" anchor="ctr" lIns="101600" tIns="76200" rIns="101600" bIns="76200">
-            <a:spAutoFit/>
-          </a:bodyPr>
-          <a:lstStyle/>
-          <a:p/>
+          <a:bodyPr wrap="square" lIns="101600" tIns="76200" rIns="101600" bIns="76200" anchor="ctr">
+            <a:spAutoFit/>
+          </a:bodyPr>
+          <a:lstStyle/>
+          <a:p>
+            <a:endParaRPr/>
+          </a:p>
         </p:txBody>
       </p:sp>
       <p:sp>
@@ -11108,7 +10976,7 @@
           </a:ln>
         </p:spPr>
         <p:txBody>
-          <a:bodyPr wrap="square" anchor="ctr" lIns="101600" tIns="76200" rIns="101600" bIns="76200">
+          <a:bodyPr wrap="square" lIns="101600" tIns="76200" rIns="101600" bIns="76200" anchor="ctr">
             <a:spAutoFit/>
           </a:bodyPr>
           <a:lstStyle/>
@@ -11150,7 +11018,7 @@
           </a:ln>
         </p:spPr>
         <p:txBody>
-          <a:bodyPr wrap="square" anchor="t" lIns="101600" tIns="76200" rIns="101600" bIns="76200">
+          <a:bodyPr wrap="square" lIns="101600" tIns="76200" rIns="101600" bIns="76200" anchor="t">
             <a:spAutoFit/>
           </a:bodyPr>
           <a:lstStyle/>
@@ -11171,7 +11039,7 @@
             </a:r>
           </a:p>
           <a:p>
-            <a:pPr algn="l" marL="171450" indent="-171450">
+            <a:pPr marL="171450" indent="-171450" algn="l">
               <a:lnSpc>
                 <a:spcPct val="96000"/>
               </a:lnSpc>
@@ -11195,7 +11063,7 @@
             </a:r>
           </a:p>
           <a:p>
-            <a:pPr algn="l" marL="171450" indent="-171450">
+            <a:pPr marL="171450" indent="-171450" algn="l">
               <a:lnSpc>
                 <a:spcPct val="96000"/>
               </a:lnSpc>
@@ -11219,7 +11087,7 @@
             </a:r>
           </a:p>
           <a:p>
-            <a:pPr algn="l" marL="171450" indent="-171450">
+            <a:pPr marL="171450" indent="-171450" algn="l">
               <a:lnSpc>
                 <a:spcPct val="96000"/>
               </a:lnSpc>
@@ -11264,7 +11132,7 @@
           </a:ln>
         </p:spPr>
         <p:txBody>
-          <a:bodyPr wrap="square" anchor="t" lIns="101600" tIns="76200" rIns="101600" bIns="76200">
+          <a:bodyPr wrap="square" lIns="101600" tIns="76200" rIns="101600" bIns="76200" anchor="t">
             <a:spAutoFit/>
           </a:bodyPr>
           <a:lstStyle/>
@@ -11285,7 +11153,7 @@
             </a:r>
           </a:p>
           <a:p>
-            <a:pPr algn="l" marL="171450" indent="-171450">
+            <a:pPr marL="171450" indent="-171450" algn="l">
               <a:lnSpc>
                 <a:spcPct val="96000"/>
               </a:lnSpc>
@@ -11309,7 +11177,7 @@
             </a:r>
           </a:p>
           <a:p>
-            <a:pPr algn="l" marL="171450" indent="-171450">
+            <a:pPr marL="171450" indent="-171450" algn="l">
               <a:lnSpc>
                 <a:spcPct val="96000"/>
               </a:lnSpc>
@@ -11333,7 +11201,7 @@
             </a:r>
           </a:p>
           <a:p>
-            <a:pPr algn="l" marL="171450" indent="-171450">
+            <a:pPr marL="171450" indent="-171450" algn="l">
               <a:lnSpc>
                 <a:spcPct val="96000"/>
               </a:lnSpc>
@@ -11378,7 +11246,7 @@
           </a:ln>
         </p:spPr>
         <p:txBody>
-          <a:bodyPr wrap="square" anchor="t" lIns="101600" tIns="76200" rIns="101600" bIns="76200">
+          <a:bodyPr wrap="square" lIns="101600" tIns="76200" rIns="101600" bIns="76200" anchor="t">
             <a:spAutoFit/>
           </a:bodyPr>
           <a:lstStyle/>
@@ -11399,7 +11267,7 @@
             </a:r>
           </a:p>
           <a:p>
-            <a:pPr algn="l" marL="171450" indent="-171450">
+            <a:pPr marL="171450" indent="-171450" algn="l">
               <a:lnSpc>
                 <a:spcPct val="96000"/>
               </a:lnSpc>
@@ -11423,7 +11291,7 @@
             </a:r>
           </a:p>
           <a:p>
-            <a:pPr algn="l" marL="171450" indent="-171450">
+            <a:pPr marL="171450" indent="-171450" algn="l">
               <a:lnSpc>
                 <a:spcPct val="96000"/>
               </a:lnSpc>
@@ -11468,7 +11336,7 @@
           </a:ln>
         </p:spPr>
         <p:txBody>
-          <a:bodyPr wrap="square" anchor="t" lIns="101600" tIns="76200" rIns="101600" bIns="76200">
+          <a:bodyPr wrap="square" lIns="101600" tIns="76200" rIns="101600" bIns="76200" anchor="t">
             <a:spAutoFit/>
           </a:bodyPr>
           <a:lstStyle/>
@@ -11489,7 +11357,7 @@
             </a:r>
           </a:p>
           <a:p>
-            <a:pPr algn="l" marL="171450" indent="-171450">
+            <a:pPr marL="171450" indent="-171450" algn="l">
               <a:lnSpc>
                 <a:spcPct val="96000"/>
               </a:lnSpc>
@@ -11513,7 +11381,7 @@
             </a:r>
           </a:p>
           <a:p>
-            <a:pPr algn="l" marL="171450" indent="-171450">
+            <a:pPr marL="171450" indent="-171450" algn="l">
               <a:lnSpc>
                 <a:spcPct val="96000"/>
               </a:lnSpc>
@@ -11537,7 +11405,7 @@
             </a:r>
           </a:p>
           <a:p>
-            <a:pPr algn="l" marL="171450" indent="-171450">
+            <a:pPr marL="171450" indent="-171450" algn="l">
               <a:lnSpc>
                 <a:spcPct val="96000"/>
               </a:lnSpc>
@@ -11561,7 +11429,7 @@
             </a:r>
           </a:p>
           <a:p>
-            <a:pPr algn="l" marL="171450" indent="-171450">
+            <a:pPr marL="171450" indent="-171450" algn="l">
               <a:lnSpc>
                 <a:spcPct val="96000"/>
               </a:lnSpc>
@@ -11606,7 +11474,7 @@
           </a:ln>
         </p:spPr>
         <p:txBody>
-          <a:bodyPr wrap="square" anchor="t" lIns="101600" tIns="76200" rIns="101600" bIns="76200">
+          <a:bodyPr wrap="square" lIns="101600" tIns="76200" rIns="101600" bIns="76200" anchor="t">
             <a:spAutoFit/>
           </a:bodyPr>
           <a:lstStyle/>
@@ -11627,7 +11495,7 @@
             </a:r>
           </a:p>
           <a:p>
-            <a:pPr algn="l" marL="171450" indent="-171450">
+            <a:pPr marL="171450" indent="-171450" algn="l">
               <a:lnSpc>
                 <a:spcPct val="96000"/>
               </a:lnSpc>
@@ -11651,7 +11519,7 @@
             </a:r>
           </a:p>
           <a:p>
-            <a:pPr algn="l" marL="171450" indent="-171450">
+            <a:pPr marL="171450" indent="-171450" algn="l">
               <a:lnSpc>
                 <a:spcPct val="96000"/>
               </a:lnSpc>
@@ -11675,7 +11543,7 @@
             </a:r>
           </a:p>
           <a:p>
-            <a:pPr algn="l" marL="171450" indent="-171450">
+            <a:pPr marL="171450" indent="-171450" algn="l">
               <a:lnSpc>
                 <a:spcPct val="96000"/>
               </a:lnSpc>
@@ -11722,11 +11590,13 @@
           </a:ln>
         </p:spPr>
         <p:txBody>
-          <a:bodyPr wrap="square" anchor="ctr" lIns="101600" tIns="76200" rIns="101600" bIns="76200">
-            <a:spAutoFit/>
-          </a:bodyPr>
-          <a:lstStyle/>
-          <a:p/>
+          <a:bodyPr wrap="square" lIns="101600" tIns="76200" rIns="101600" bIns="76200" anchor="ctr">
+            <a:spAutoFit/>
+          </a:bodyPr>
+          <a:lstStyle/>
+          <a:p>
+            <a:endParaRPr/>
+          </a:p>
         </p:txBody>
       </p:sp>
       <p:sp>
@@ -11751,11 +11621,13 @@
           </a:ln>
         </p:spPr>
         <p:txBody>
-          <a:bodyPr wrap="square" anchor="ctr" lIns="101600" tIns="76200" rIns="101600" bIns="76200">
-            <a:spAutoFit/>
-          </a:bodyPr>
-          <a:lstStyle/>
-          <a:p/>
+          <a:bodyPr wrap="square" lIns="101600" tIns="76200" rIns="101600" bIns="76200" anchor="ctr">
+            <a:spAutoFit/>
+          </a:bodyPr>
+          <a:lstStyle/>
+          <a:p>
+            <a:endParaRPr/>
+          </a:p>
         </p:txBody>
       </p:sp>
       <p:sp>
@@ -11780,11 +11652,13 @@
           </a:ln>
         </p:spPr>
         <p:txBody>
-          <a:bodyPr wrap="square" anchor="ctr" lIns="101600" tIns="76200" rIns="101600" bIns="76200">
-            <a:spAutoFit/>
-          </a:bodyPr>
-          <a:lstStyle/>
-          <a:p/>
+          <a:bodyPr wrap="square" lIns="101600" tIns="76200" rIns="101600" bIns="76200" anchor="ctr">
+            <a:spAutoFit/>
+          </a:bodyPr>
+          <a:lstStyle/>
+          <a:p>
+            <a:endParaRPr/>
+          </a:p>
         </p:txBody>
       </p:sp>
       <p:sp>
@@ -11809,11 +11683,13 @@
           </a:ln>
         </p:spPr>
         <p:txBody>
-          <a:bodyPr wrap="square" anchor="ctr" lIns="101600" tIns="76200" rIns="101600" bIns="76200">
-            <a:spAutoFit/>
-          </a:bodyPr>
-          <a:lstStyle/>
-          <a:p/>
+          <a:bodyPr wrap="square" lIns="101600" tIns="76200" rIns="101600" bIns="76200" anchor="ctr">
+            <a:spAutoFit/>
+          </a:bodyPr>
+          <a:lstStyle/>
+          <a:p>
+            <a:endParaRPr/>
+          </a:p>
         </p:txBody>
       </p:sp>
       <p:sp>
@@ -11840,11 +11716,13 @@
           </a:ln>
         </p:spPr>
         <p:txBody>
-          <a:bodyPr wrap="square" anchor="ctr" lIns="101600" tIns="76200" rIns="101600" bIns="76200">
-            <a:spAutoFit/>
-          </a:bodyPr>
-          <a:lstStyle/>
-          <a:p/>
+          <a:bodyPr wrap="square" lIns="101600" tIns="76200" rIns="101600" bIns="76200" anchor="ctr">
+            <a:spAutoFit/>
+          </a:bodyPr>
+          <a:lstStyle/>
+          <a:p>
+            <a:endParaRPr/>
+          </a:p>
         </p:txBody>
       </p:sp>
       <p:sp>
@@ -11869,7 +11747,7 @@
           </a:ln>
         </p:spPr>
         <p:txBody>
-          <a:bodyPr wrap="square" anchor="ctr" lIns="101600" tIns="76200" rIns="101600" bIns="76200">
+          <a:bodyPr wrap="square" lIns="101600" tIns="76200" rIns="101600" bIns="76200" anchor="ctr">
             <a:spAutoFit/>
           </a:bodyPr>
           <a:lstStyle/>
@@ -11915,7 +11793,7 @@
           </a:ln>
         </p:spPr>
         <p:txBody>
-          <a:bodyPr wrap="square" anchor="ctr" lIns="101600" tIns="76200" rIns="101600" bIns="76200">
+          <a:bodyPr wrap="square" lIns="101600" tIns="76200" rIns="101600" bIns="76200" anchor="ctr">
             <a:spAutoFit/>
           </a:bodyPr>
           <a:lstStyle/>
@@ -11977,7 +11855,7 @@
           </a:ln>
         </p:spPr>
         <p:txBody>
-          <a:bodyPr wrap="square" anchor="ctr" lIns="101600" tIns="76200" rIns="101600" bIns="76200">
+          <a:bodyPr wrap="square" lIns="101600" tIns="76200" rIns="101600" bIns="76200" anchor="ctr">
             <a:spAutoFit/>
           </a:bodyPr>
           <a:lstStyle/>
@@ -12055,11 +11933,13 @@
           </a:ln>
         </p:spPr>
         <p:txBody>
-          <a:bodyPr wrap="square" anchor="ctr" lIns="101600" tIns="76200" rIns="101600" bIns="76200">
-            <a:spAutoFit/>
-          </a:bodyPr>
-          <a:lstStyle/>
-          <a:p/>
+          <a:bodyPr wrap="square" lIns="101600" tIns="76200" rIns="101600" bIns="76200" anchor="ctr">
+            <a:spAutoFit/>
+          </a:bodyPr>
+          <a:lstStyle/>
+          <a:p>
+            <a:endParaRPr/>
+          </a:p>
         </p:txBody>
       </p:sp>
       <p:sp>
@@ -12082,7 +11962,7 @@
           </a:ln>
         </p:spPr>
         <p:txBody>
-          <a:bodyPr wrap="square" anchor="ctr" lIns="101600" tIns="76200" rIns="101600" bIns="76200">
+          <a:bodyPr wrap="square" lIns="101600" tIns="76200" rIns="101600" bIns="76200" anchor="ctr">
             <a:spAutoFit/>
           </a:bodyPr>
           <a:lstStyle/>
@@ -12124,12 +12004,12 @@
           </a:ln>
         </p:spPr>
         <p:txBody>
-          <a:bodyPr wrap="square" anchor="t" lIns="101600" tIns="76200" rIns="101600" bIns="76200">
-            <a:spAutoFit/>
-          </a:bodyPr>
-          <a:lstStyle/>
-          <a:p>
-            <a:pPr algn="l" marL="152400" indent="-152400">
+          <a:bodyPr wrap="square" lIns="101600" tIns="76200" rIns="101600" bIns="76200" anchor="t">
+            <a:spAutoFit/>
+          </a:bodyPr>
+          <a:lstStyle/>
+          <a:p>
+            <a:pPr marL="152400" indent="-152400" algn="l">
               <a:lnSpc>
                 <a:spcPct val="96000"/>
               </a:lnSpc>
@@ -12150,7 +12030,7 @@
             </a:r>
           </a:p>
           <a:p>
-            <a:pPr algn="l" marL="152400" indent="-152400">
+            <a:pPr marL="152400" indent="-152400" algn="l">
               <a:lnSpc>
                 <a:spcPct val="96000"/>
               </a:lnSpc>
@@ -12171,7 +12051,7 @@
             </a:r>
           </a:p>
           <a:p>
-            <a:pPr algn="l" marL="152400" indent="-152400">
+            <a:pPr marL="152400" indent="-152400" algn="l">
               <a:lnSpc>
                 <a:spcPct val="96000"/>
               </a:lnSpc>
@@ -12213,12 +12093,12 @@
           </a:ln>
         </p:spPr>
         <p:txBody>
-          <a:bodyPr wrap="square" anchor="t" lIns="101600" tIns="76200" rIns="101600" bIns="76200">
-            <a:spAutoFit/>
-          </a:bodyPr>
-          <a:lstStyle/>
-          <a:p>
-            <a:pPr algn="l" marL="152400" indent="-152400">
+          <a:bodyPr wrap="square" lIns="101600" tIns="76200" rIns="101600" bIns="76200" anchor="t">
+            <a:spAutoFit/>
+          </a:bodyPr>
+          <a:lstStyle/>
+          <a:p>
+            <a:pPr marL="152400" indent="-152400" algn="l">
               <a:lnSpc>
                 <a:spcPct val="96000"/>
               </a:lnSpc>
@@ -12239,7 +12119,7 @@
             </a:r>
           </a:p>
           <a:p>
-            <a:pPr algn="l" marL="152400" indent="-152400">
+            <a:pPr marL="152400" indent="-152400" algn="l">
               <a:lnSpc>
                 <a:spcPct val="96000"/>
               </a:lnSpc>
@@ -12260,7 +12140,7 @@
             </a:r>
           </a:p>
           <a:p>
-            <a:pPr algn="l" marL="152400" indent="-152400">
+            <a:pPr marL="152400" indent="-152400" algn="l">
               <a:lnSpc>
                 <a:spcPct val="96000"/>
               </a:lnSpc>
@@ -12306,7 +12186,7 @@
           </a:ln>
         </p:spPr>
         <p:txBody>
-          <a:bodyPr wrap="square" anchor="ctr" lIns="101600" tIns="76200" rIns="101600" bIns="76200">
+          <a:bodyPr wrap="square" lIns="101600" tIns="76200" rIns="101600" bIns="76200" anchor="ctr">
             <a:spAutoFit/>
           </a:bodyPr>
           <a:lstStyle/>
@@ -12368,11 +12248,13 @@
           </a:ln>
         </p:spPr>
         <p:txBody>
-          <a:bodyPr wrap="square" anchor="ctr" lIns="101600" tIns="76200" rIns="101600" bIns="76200">
-            <a:spAutoFit/>
-          </a:bodyPr>
-          <a:lstStyle/>
-          <a:p/>
+          <a:bodyPr wrap="square" lIns="101600" tIns="76200" rIns="101600" bIns="76200" anchor="ctr">
+            <a:spAutoFit/>
+          </a:bodyPr>
+          <a:lstStyle/>
+          <a:p>
+            <a:endParaRPr/>
+          </a:p>
         </p:txBody>
       </p:sp>
       <p:sp>
@@ -12395,7 +12277,7 @@
           </a:ln>
         </p:spPr>
         <p:txBody>
-          <a:bodyPr wrap="square" anchor="ctr" lIns="101600" tIns="76200" rIns="101600" bIns="76200">
+          <a:bodyPr wrap="square" lIns="101600" tIns="76200" rIns="101600" bIns="76200" anchor="ctr">
             <a:spAutoFit/>
           </a:bodyPr>
           <a:lstStyle/>
@@ -12437,12 +12319,12 @@
           </a:ln>
         </p:spPr>
         <p:txBody>
-          <a:bodyPr wrap="square" anchor="t" lIns="101600" tIns="76200" rIns="101600" bIns="76200">
-            <a:spAutoFit/>
-          </a:bodyPr>
-          <a:lstStyle/>
-          <a:p>
-            <a:pPr algn="l" marL="152400" indent="-152400">
+          <a:bodyPr wrap="square" lIns="101600" tIns="76200" rIns="101600" bIns="76200" anchor="t">
+            <a:spAutoFit/>
+          </a:bodyPr>
+          <a:lstStyle/>
+          <a:p>
+            <a:pPr marL="152400" indent="-152400" algn="l">
               <a:lnSpc>
                 <a:spcPct val="96000"/>
               </a:lnSpc>
@@ -12466,7 +12348,7 @@
             </a:r>
           </a:p>
           <a:p>
-            <a:pPr algn="l" marL="152400" indent="-152400">
+            <a:pPr marL="152400" indent="-152400" algn="l">
               <a:lnSpc>
                 <a:spcPct val="96000"/>
               </a:lnSpc>
@@ -12490,7 +12372,7 @@
             </a:r>
           </a:p>
           <a:p>
-            <a:pPr algn="l" marL="152400" indent="-152400">
+            <a:pPr marL="152400" indent="-152400" algn="l">
               <a:lnSpc>
                 <a:spcPct val="96000"/>
               </a:lnSpc>
@@ -12514,7 +12396,7 @@
             </a:r>
           </a:p>
           <a:p>
-            <a:pPr algn="l" marL="152400" indent="-152400">
+            <a:pPr marL="152400" indent="-152400" algn="l">
               <a:lnSpc>
                 <a:spcPct val="96000"/>
               </a:lnSpc>
@@ -12559,7 +12441,7 @@
           </a:ln>
         </p:spPr>
         <p:txBody>
-          <a:bodyPr wrap="square" anchor="ctr" lIns="101600" tIns="76200" rIns="101600" bIns="76200">
+          <a:bodyPr wrap="square" lIns="101600" tIns="76200" rIns="101600" bIns="76200" anchor="ctr">
             <a:spAutoFit/>
           </a:bodyPr>
           <a:lstStyle/>
@@ -12605,11 +12487,13 @@
           </a:ln>
         </p:spPr>
         <p:txBody>
-          <a:bodyPr wrap="square" anchor="ctr" lIns="101600" tIns="76200" rIns="101600" bIns="76200">
-            <a:spAutoFit/>
-          </a:bodyPr>
-          <a:lstStyle/>
-          <a:p/>
+          <a:bodyPr wrap="square" lIns="101600" tIns="76200" rIns="101600" bIns="76200" anchor="ctr">
+            <a:spAutoFit/>
+          </a:bodyPr>
+          <a:lstStyle/>
+          <a:p>
+            <a:endParaRPr/>
+          </a:p>
         </p:txBody>
       </p:sp>
       <p:sp>
@@ -12632,7 +12516,7 @@
           </a:ln>
         </p:spPr>
         <p:txBody>
-          <a:bodyPr wrap="square" anchor="ctr" lIns="101600" tIns="76200" rIns="101600" bIns="76200">
+          <a:bodyPr wrap="square" lIns="101600" tIns="76200" rIns="101600" bIns="76200" anchor="ctr">
             <a:spAutoFit/>
           </a:bodyPr>
           <a:lstStyle/>
@@ -12674,12 +12558,12 @@
           </a:ln>
         </p:spPr>
         <p:txBody>
-          <a:bodyPr wrap="square" anchor="t" lIns="101600" tIns="76200" rIns="101600" bIns="76200">
-            <a:spAutoFit/>
-          </a:bodyPr>
-          <a:lstStyle/>
-          <a:p>
-            <a:pPr algn="l" marL="152400" indent="-152400">
+          <a:bodyPr wrap="square" lIns="101600" tIns="76200" rIns="101600" bIns="76200" anchor="t">
+            <a:spAutoFit/>
+          </a:bodyPr>
+          <a:lstStyle/>
+          <a:p>
+            <a:pPr marL="152400" indent="-152400" algn="l">
               <a:lnSpc>
                 <a:spcPct val="96000"/>
               </a:lnSpc>
@@ -12703,7 +12587,7 @@
             </a:r>
           </a:p>
           <a:p>
-            <a:pPr algn="l" marL="152400" indent="-152400">
+            <a:pPr marL="152400" indent="-152400" algn="l">
               <a:lnSpc>
                 <a:spcPct val="96000"/>
               </a:lnSpc>
@@ -12727,7 +12611,7 @@
             </a:r>
           </a:p>
           <a:p>
-            <a:pPr algn="l" marL="152400" indent="-152400">
+            <a:pPr marL="152400" indent="-152400" algn="l">
               <a:lnSpc>
                 <a:spcPct val="96000"/>
               </a:lnSpc>
@@ -12751,7 +12635,7 @@
             </a:r>
           </a:p>
           <a:p>
-            <a:pPr algn="l" marL="152400" indent="-152400">
+            <a:pPr marL="152400" indent="-152400" algn="l">
               <a:lnSpc>
                 <a:spcPct val="96000"/>
               </a:lnSpc>
@@ -12796,7 +12680,7 @@
           </a:ln>
         </p:spPr>
         <p:txBody>
-          <a:bodyPr wrap="square" anchor="ctr" lIns="101600" tIns="76200" rIns="101600" bIns="76200">
+          <a:bodyPr wrap="square" lIns="101600" tIns="76200" rIns="101600" bIns="76200" anchor="ctr">
             <a:spAutoFit/>
           </a:bodyPr>
           <a:lstStyle/>
@@ -12842,11 +12726,13 @@
           </a:ln>
         </p:spPr>
         <p:txBody>
-          <a:bodyPr wrap="square" anchor="ctr" lIns="101600" tIns="76200" rIns="101600" bIns="76200">
-            <a:spAutoFit/>
-          </a:bodyPr>
-          <a:lstStyle/>
-          <a:p/>
+          <a:bodyPr wrap="square" lIns="101600" tIns="76200" rIns="101600" bIns="76200" anchor="ctr">
+            <a:spAutoFit/>
+          </a:bodyPr>
+          <a:lstStyle/>
+          <a:p>
+            <a:endParaRPr/>
+          </a:p>
         </p:txBody>
       </p:sp>
       <p:sp>
@@ -12869,7 +12755,7 @@
           </a:ln>
         </p:spPr>
         <p:txBody>
-          <a:bodyPr wrap="square" anchor="ctr" lIns="101600" tIns="76200" rIns="101600" bIns="76200">
+          <a:bodyPr wrap="square" lIns="101600" tIns="76200" rIns="101600" bIns="76200" anchor="ctr">
             <a:spAutoFit/>
           </a:bodyPr>
           <a:lstStyle/>
@@ -12911,12 +12797,12 @@
           </a:ln>
         </p:spPr>
         <p:txBody>
-          <a:bodyPr wrap="square" anchor="t" lIns="101600" tIns="76200" rIns="101600" bIns="76200">
-            <a:spAutoFit/>
-          </a:bodyPr>
-          <a:lstStyle/>
-          <a:p>
-            <a:pPr algn="l" marL="152400" indent="-152400">
+          <a:bodyPr wrap="square" lIns="101600" tIns="76200" rIns="101600" bIns="76200" anchor="t">
+            <a:spAutoFit/>
+          </a:bodyPr>
+          <a:lstStyle/>
+          <a:p>
+            <a:pPr marL="152400" indent="-152400" algn="l">
               <a:lnSpc>
                 <a:spcPct val="96000"/>
               </a:lnSpc>
@@ -12940,7 +12826,7 @@
             </a:r>
           </a:p>
           <a:p>
-            <a:pPr algn="l" marL="152400" indent="-152400">
+            <a:pPr marL="152400" indent="-152400" algn="l">
               <a:lnSpc>
                 <a:spcPct val="96000"/>
               </a:lnSpc>
@@ -12964,7 +12850,7 @@
             </a:r>
           </a:p>
           <a:p>
-            <a:pPr algn="l" marL="152400" indent="-152400">
+            <a:pPr marL="152400" indent="-152400" algn="l">
               <a:lnSpc>
                 <a:spcPct val="96000"/>
               </a:lnSpc>
@@ -12988,7 +12874,7 @@
             </a:r>
           </a:p>
           <a:p>
-            <a:pPr algn="l" marL="152400" indent="-152400">
+            <a:pPr marL="152400" indent="-152400" algn="l">
               <a:lnSpc>
                 <a:spcPct val="96000"/>
               </a:lnSpc>
@@ -13033,7 +12919,7 @@
           </a:ln>
         </p:spPr>
         <p:txBody>
-          <a:bodyPr wrap="square" anchor="ctr" lIns="101600" tIns="76200" rIns="101600" bIns="76200">
+          <a:bodyPr wrap="square" lIns="101600" tIns="76200" rIns="101600" bIns="76200" anchor="ctr">
             <a:spAutoFit/>
           </a:bodyPr>
           <a:lstStyle/>
@@ -13079,7 +12965,7 @@
           </a:ln>
         </p:spPr>
         <p:txBody>
-          <a:bodyPr wrap="square" anchor="ctr" lIns="101600" tIns="76200" rIns="101600" bIns="76200">
+          <a:bodyPr wrap="square" lIns="101600" tIns="76200" rIns="101600" bIns="76200" anchor="ctr">
             <a:spAutoFit/>
           </a:bodyPr>
           <a:lstStyle/>
@@ -13141,11 +13027,13 @@
           </a:ln>
         </p:spPr>
         <p:txBody>
-          <a:bodyPr wrap="square" anchor="ctr" lIns="101600" tIns="76200" rIns="101600" bIns="76200">
-            <a:spAutoFit/>
-          </a:bodyPr>
-          <a:lstStyle/>
-          <a:p/>
+          <a:bodyPr wrap="square" lIns="101600" tIns="76200" rIns="101600" bIns="76200" anchor="ctr">
+            <a:spAutoFit/>
+          </a:bodyPr>
+          <a:lstStyle/>
+          <a:p>
+            <a:endParaRPr/>
+          </a:p>
         </p:txBody>
       </p:sp>
       <p:sp>
@@ -13168,7 +13056,7 @@
           </a:ln>
         </p:spPr>
         <p:txBody>
-          <a:bodyPr wrap="square" anchor="ctr" lIns="101600" tIns="76200" rIns="101600" bIns="76200">
+          <a:bodyPr wrap="square" lIns="101600" tIns="76200" rIns="101600" bIns="76200" anchor="ctr">
             <a:spAutoFit/>
           </a:bodyPr>
           <a:lstStyle/>
@@ -13210,12 +13098,12 @@
           </a:ln>
         </p:spPr>
         <p:txBody>
-          <a:bodyPr wrap="square" anchor="t" lIns="101600" tIns="76200" rIns="101600" bIns="76200">
-            <a:spAutoFit/>
-          </a:bodyPr>
-          <a:lstStyle/>
-          <a:p>
-            <a:pPr algn="l" marL="152400" indent="-152400">
+          <a:bodyPr wrap="square" lIns="101600" tIns="76200" rIns="101600" bIns="76200" anchor="t">
+            <a:spAutoFit/>
+          </a:bodyPr>
+          <a:lstStyle/>
+          <a:p>
+            <a:pPr marL="152400" indent="-152400" algn="l">
               <a:lnSpc>
                 <a:spcPct val="94000"/>
               </a:lnSpc>
@@ -13236,7 +13124,7 @@
             </a:r>
           </a:p>
           <a:p>
-            <a:pPr algn="l" marL="152400" indent="-152400">
+            <a:pPr marL="152400" indent="-152400" algn="l">
               <a:lnSpc>
                 <a:spcPct val="94000"/>
               </a:lnSpc>
@@ -13278,12 +13166,12 @@
           </a:ln>
         </p:spPr>
         <p:txBody>
-          <a:bodyPr wrap="square" anchor="t" lIns="101600" tIns="76200" rIns="101600" bIns="76200">
-            <a:spAutoFit/>
-          </a:bodyPr>
-          <a:lstStyle/>
-          <a:p>
-            <a:pPr algn="l" marL="152400" indent="-152400">
+          <a:bodyPr wrap="square" lIns="101600" tIns="76200" rIns="101600" bIns="76200" anchor="t">
+            <a:spAutoFit/>
+          </a:bodyPr>
+          <a:lstStyle/>
+          <a:p>
+            <a:pPr marL="152400" indent="-152400" algn="l">
               <a:lnSpc>
                 <a:spcPct val="94000"/>
               </a:lnSpc>
@@ -13304,7 +13192,7 @@
             </a:r>
           </a:p>
           <a:p>
-            <a:pPr algn="l" marL="152400" indent="-152400">
+            <a:pPr marL="152400" indent="-152400" algn="l">
               <a:lnSpc>
                 <a:spcPct val="94000"/>
               </a:lnSpc>
@@ -13334,8 +13222,8 @@
         </p:nvSpPr>
         <p:spPr>
           <a:xfrm>
-            <a:off x="8577072" y="2194560"/>
-            <a:ext cx="228600" cy="219456"/>
+            <a:off x="8577072" y="2257044"/>
+            <a:ext cx="310896" cy="147828"/>
           </a:xfrm>
           <a:prstGeom prst="downArrow">
             <a:avLst/>
@@ -13367,6 +13255,7 @@
           <a:lstStyle/>
           <a:p>
             <a:pPr algn="ctr"/>
+            <a:endParaRPr/>
           </a:p>
         </p:txBody>
       </p:sp>
@@ -13411,6 +13300,7 @@
           <a:lstStyle/>
           <a:p>
             <a:pPr algn="ctr"/>
+            <a:endParaRPr/>
           </a:p>
         </p:txBody>
       </p:sp>
@@ -13455,6 +13345,7 @@
           <a:lstStyle/>
           <a:p>
             <a:pPr algn="ctr"/>
+            <a:endParaRPr/>
           </a:p>
         </p:txBody>
       </p:sp>
@@ -13499,6 +13390,7 @@
           <a:lstStyle/>
           <a:p>
             <a:pPr algn="ctr"/>
+            <a:endParaRPr/>
           </a:p>
         </p:txBody>
       </p:sp>
@@ -13543,6 +13435,7 @@
           <a:lstStyle/>
           <a:p>
             <a:pPr algn="ctr"/>
+            <a:endParaRPr/>
           </a:p>
         </p:txBody>
       </p:sp>
@@ -13587,6 +13480,7 @@
           <a:lstStyle/>
           <a:p>
             <a:pPr algn="ctr"/>
+            <a:endParaRPr/>
           </a:p>
         </p:txBody>
       </p:sp>
@@ -13631,6 +13525,7 @@
           <a:lstStyle/>
           <a:p>
             <a:pPr algn="ctr"/>
+            <a:endParaRPr/>
           </a:p>
         </p:txBody>
       </p:sp>
@@ -13675,6 +13570,7 @@
           <a:lstStyle/>
           <a:p>
             <a:pPr algn="ctr"/>
+            <a:endParaRPr/>
           </a:p>
         </p:txBody>
       </p:sp>
@@ -13719,6 +13615,7 @@
           <a:lstStyle/>
           <a:p>
             <a:pPr algn="ctr"/>
+            <a:endParaRPr/>
           </a:p>
         </p:txBody>
       </p:sp>
@@ -13763,6 +13660,7 @@
           <a:lstStyle/>
           <a:p>
             <a:pPr algn="ctr"/>
+            <a:endParaRPr/>
           </a:p>
         </p:txBody>
       </p:sp>
@@ -13807,6 +13705,7 @@
           <a:lstStyle/>
           <a:p>
             <a:pPr algn="ctr"/>
+            <a:endParaRPr/>
           </a:p>
         </p:txBody>
       </p:sp>
@@ -13851,6 +13750,7 @@
           <a:lstStyle/>
           <a:p>
             <a:pPr algn="ctr"/>
+            <a:endParaRPr/>
           </a:p>
         </p:txBody>
       </p:sp>
@@ -13895,6 +13795,7 @@
           <a:lstStyle/>
           <a:p>
             <a:pPr algn="ctr"/>
+            <a:endParaRPr/>
           </a:p>
         </p:txBody>
       </p:sp>
@@ -13939,6 +13840,7 @@
           <a:lstStyle/>
           <a:p>
             <a:pPr algn="ctr"/>
+            <a:endParaRPr/>
           </a:p>
         </p:txBody>
       </p:sp>
@@ -13983,6 +13885,7 @@
           <a:lstStyle/>
           <a:p>
             <a:pPr algn="ctr"/>
+            <a:endParaRPr/>
           </a:p>
         </p:txBody>
       </p:sp>
@@ -14027,6 +13930,7 @@
           <a:lstStyle/>
           <a:p>
             <a:pPr algn="ctr"/>
+            <a:endParaRPr/>
           </a:p>
         </p:txBody>
       </p:sp>
@@ -14054,11 +13958,13 @@
           </a:ln>
         </p:spPr>
         <p:txBody>
-          <a:bodyPr wrap="square" anchor="ctr" lIns="101600" tIns="76200" rIns="101600" bIns="76200">
-            <a:spAutoFit/>
-          </a:bodyPr>
-          <a:lstStyle/>
-          <a:p/>
+          <a:bodyPr wrap="square" lIns="101600" tIns="76200" rIns="101600" bIns="76200" anchor="ctr">
+            <a:spAutoFit/>
+          </a:bodyPr>
+          <a:lstStyle/>
+          <a:p>
+            <a:endParaRPr/>
+          </a:p>
         </p:txBody>
       </p:sp>
       <p:sp>
@@ -14083,7 +13989,7 @@
           </a:ln>
         </p:spPr>
         <p:txBody>
-          <a:bodyPr wrap="square" anchor="ctr" lIns="101600" tIns="76200" rIns="101600" bIns="76200">
+          <a:bodyPr wrap="square" lIns="101600" tIns="76200" rIns="101600" bIns="76200" anchor="ctr">
             <a:spAutoFit/>
           </a:bodyPr>
           <a:lstStyle/>
@@ -14125,7 +14031,7 @@
           </a:ln>
         </p:spPr>
         <p:txBody>
-          <a:bodyPr wrap="square" anchor="t" lIns="101600" tIns="76200" rIns="101600" bIns="76200">
+          <a:bodyPr wrap="square" lIns="101600" tIns="76200" rIns="101600" bIns="76200" anchor="t">
             <a:spAutoFit/>
           </a:bodyPr>
           <a:lstStyle/>
@@ -14183,7 +14089,7 @@
           </a:ln>
         </p:spPr>
         <p:txBody>
-          <a:bodyPr wrap="square" anchor="t" lIns="101600" tIns="76200" rIns="101600" bIns="76200">
+          <a:bodyPr wrap="square" lIns="101600" tIns="76200" rIns="101600" bIns="76200" anchor="t">
             <a:spAutoFit/>
           </a:bodyPr>
           <a:lstStyle/>
@@ -14243,11 +14149,13 @@
           </a:ln>
         </p:spPr>
         <p:txBody>
-          <a:bodyPr wrap="square" anchor="ctr" lIns="101600" tIns="76200" rIns="101600" bIns="76200">
-            <a:spAutoFit/>
-          </a:bodyPr>
-          <a:lstStyle/>
-          <a:p/>
+          <a:bodyPr wrap="square" lIns="101600" tIns="76200" rIns="101600" bIns="76200" anchor="ctr">
+            <a:spAutoFit/>
+          </a:bodyPr>
+          <a:lstStyle/>
+          <a:p>
+            <a:endParaRPr/>
+          </a:p>
         </p:txBody>
       </p:sp>
       <p:sp>
@@ -14270,7 +14178,7 @@
           </a:ln>
         </p:spPr>
         <p:txBody>
-          <a:bodyPr wrap="square" anchor="t" lIns="101600" tIns="76200" rIns="101600" bIns="76200">
+          <a:bodyPr wrap="square" lIns="101600" tIns="76200" rIns="101600" bIns="76200" anchor="t">
             <a:spAutoFit/>
           </a:bodyPr>
           <a:lstStyle/>
@@ -14281,7 +14189,7 @@
               </a:lnSpc>
             </a:pPr>
             <a:r>
-              <a:rPr sz="1450" b="1" i="0">
+              <a:rPr sz="1450" b="1" i="0" dirty="0">
                 <a:solidFill>
                   <a:srgbClr val="1C1C1E"/>
                 </a:solidFill>
@@ -14297,7 +14205,7 @@
               </a:lnSpc>
             </a:pPr>
             <a:r>
-              <a:rPr sz="1300" b="0" i="0">
+              <a:rPr sz="1300" b="0" i="0" dirty="0">
                 <a:solidFill>
                   <a:srgbClr val="3A4149"/>
                 </a:solidFill>
@@ -14330,11 +14238,13 @@
           </a:ln>
         </p:spPr>
         <p:txBody>
-          <a:bodyPr wrap="square" anchor="ctr" lIns="101600" tIns="76200" rIns="101600" bIns="76200">
-            <a:spAutoFit/>
-          </a:bodyPr>
-          <a:lstStyle/>
-          <a:p/>
+          <a:bodyPr wrap="square" lIns="101600" tIns="76200" rIns="101600" bIns="76200" anchor="ctr">
+            <a:spAutoFit/>
+          </a:bodyPr>
+          <a:lstStyle/>
+          <a:p>
+            <a:endParaRPr/>
+          </a:p>
         </p:txBody>
       </p:sp>
       <p:sp>
@@ -14357,7 +14267,7 @@
           </a:ln>
         </p:spPr>
         <p:txBody>
-          <a:bodyPr wrap="square" anchor="t" lIns="101600" tIns="76200" rIns="101600" bIns="76200">
+          <a:bodyPr wrap="square" lIns="101600" tIns="76200" rIns="101600" bIns="76200" anchor="t">
             <a:spAutoFit/>
           </a:bodyPr>
           <a:lstStyle/>
@@ -14417,11 +14327,13 @@
           </a:ln>
         </p:spPr>
         <p:txBody>
-          <a:bodyPr wrap="square" anchor="ctr" lIns="101600" tIns="76200" rIns="101600" bIns="76200">
-            <a:spAutoFit/>
-          </a:bodyPr>
-          <a:lstStyle/>
-          <a:p/>
+          <a:bodyPr wrap="square" lIns="101600" tIns="76200" rIns="101600" bIns="76200" anchor="ctr">
+            <a:spAutoFit/>
+          </a:bodyPr>
+          <a:lstStyle/>
+          <a:p>
+            <a:endParaRPr/>
+          </a:p>
         </p:txBody>
       </p:sp>
       <p:sp>
@@ -14444,7 +14356,7 @@
           </a:ln>
         </p:spPr>
         <p:txBody>
-          <a:bodyPr wrap="square" anchor="t" lIns="101600" tIns="76200" rIns="101600" bIns="76200">
+          <a:bodyPr wrap="square" lIns="101600" tIns="76200" rIns="101600" bIns="76200" anchor="t">
             <a:spAutoFit/>
           </a:bodyPr>
           <a:lstStyle/>
@@ -14504,11 +14416,13 @@
           </a:ln>
         </p:spPr>
         <p:txBody>
-          <a:bodyPr wrap="square" anchor="ctr" lIns="101600" tIns="76200" rIns="101600" bIns="76200">
-            <a:spAutoFit/>
-          </a:bodyPr>
-          <a:lstStyle/>
-          <a:p/>
+          <a:bodyPr wrap="square" lIns="101600" tIns="76200" rIns="101600" bIns="76200" anchor="ctr">
+            <a:spAutoFit/>
+          </a:bodyPr>
+          <a:lstStyle/>
+          <a:p>
+            <a:endParaRPr/>
+          </a:p>
         </p:txBody>
       </p:sp>
       <p:sp>
@@ -14531,7 +14445,7 @@
           </a:ln>
         </p:spPr>
         <p:txBody>
-          <a:bodyPr wrap="square" anchor="t" lIns="101600" tIns="76200" rIns="101600" bIns="76200">
+          <a:bodyPr wrap="square" lIns="101600" tIns="76200" rIns="101600" bIns="76200" anchor="t">
             <a:spAutoFit/>
           </a:bodyPr>
           <a:lstStyle/>
@@ -14591,11 +14505,13 @@
           </a:ln>
         </p:spPr>
         <p:txBody>
-          <a:bodyPr wrap="square" anchor="ctr" lIns="101600" tIns="76200" rIns="101600" bIns="76200">
-            <a:spAutoFit/>
-          </a:bodyPr>
-          <a:lstStyle/>
-          <a:p/>
+          <a:bodyPr wrap="square" lIns="101600" tIns="76200" rIns="101600" bIns="76200" anchor="ctr">
+            <a:spAutoFit/>
+          </a:bodyPr>
+          <a:lstStyle/>
+          <a:p>
+            <a:endParaRPr/>
+          </a:p>
         </p:txBody>
       </p:sp>
       <p:sp>
@@ -14618,7 +14534,7 @@
           </a:ln>
         </p:spPr>
         <p:txBody>
-          <a:bodyPr wrap="square" anchor="t" lIns="101600" tIns="76200" rIns="101600" bIns="76200">
+          <a:bodyPr wrap="square" lIns="101600" tIns="76200" rIns="101600" bIns="76200" anchor="t">
             <a:spAutoFit/>
           </a:bodyPr>
           <a:lstStyle/>
@@ -14678,11 +14594,13 @@
           </a:ln>
         </p:spPr>
         <p:txBody>
-          <a:bodyPr wrap="square" anchor="ctr" lIns="101600" tIns="76200" rIns="101600" bIns="76200">
-            <a:spAutoFit/>
-          </a:bodyPr>
-          <a:lstStyle/>
-          <a:p/>
+          <a:bodyPr wrap="square" lIns="101600" tIns="76200" rIns="101600" bIns="76200" anchor="ctr">
+            <a:spAutoFit/>
+          </a:bodyPr>
+          <a:lstStyle/>
+          <a:p>
+            <a:endParaRPr/>
+          </a:p>
         </p:txBody>
       </p:sp>
       <p:sp>
@@ -14709,11 +14627,13 @@
           </a:ln>
         </p:spPr>
         <p:txBody>
-          <a:bodyPr wrap="square" anchor="ctr" lIns="101600" tIns="76200" rIns="101600" bIns="76200">
-            <a:spAutoFit/>
-          </a:bodyPr>
-          <a:lstStyle/>
-          <a:p/>
+          <a:bodyPr wrap="square" lIns="101600" tIns="76200" rIns="101600" bIns="76200" anchor="ctr">
+            <a:spAutoFit/>
+          </a:bodyPr>
+          <a:lstStyle/>
+          <a:p>
+            <a:endParaRPr/>
+          </a:p>
         </p:txBody>
       </p:sp>
       <p:sp>
@@ -14738,7 +14658,7 @@
           </a:ln>
         </p:spPr>
         <p:txBody>
-          <a:bodyPr wrap="square" anchor="ctr" lIns="101600" tIns="76200" rIns="101600" bIns="76200">
+          <a:bodyPr wrap="square" lIns="101600" tIns="76200" rIns="101600" bIns="76200" anchor="ctr">
             <a:spAutoFit/>
           </a:bodyPr>
           <a:lstStyle/>
@@ -14782,7 +14702,7 @@
           </a:ln>
         </p:spPr>
         <p:txBody>
-          <a:bodyPr wrap="square" anchor="ctr" lIns="0" tIns="76200" rIns="0" bIns="76200">
+          <a:bodyPr wrap="square" lIns="0" tIns="76200" rIns="0" bIns="76200" anchor="ctr">
             <a:spAutoFit/>
           </a:bodyPr>
           <a:lstStyle/>
@@ -14824,7 +14744,7 @@
           </a:ln>
         </p:spPr>
         <p:txBody>
-          <a:bodyPr wrap="square" anchor="ctr" lIns="101600" tIns="76200" rIns="101600" bIns="76200">
+          <a:bodyPr wrap="square" lIns="101600" tIns="76200" rIns="101600" bIns="76200" anchor="ctr">
             <a:spAutoFit/>
           </a:bodyPr>
           <a:lstStyle/>
@@ -14868,7 +14788,7 @@
           </a:ln>
         </p:spPr>
         <p:txBody>
-          <a:bodyPr wrap="square" anchor="ctr" lIns="0" tIns="76200" rIns="0" bIns="76200">
+          <a:bodyPr wrap="square" lIns="0" tIns="76200" rIns="0" bIns="76200" anchor="ctr">
             <a:spAutoFit/>
           </a:bodyPr>
           <a:lstStyle/>
@@ -14910,7 +14830,7 @@
           </a:ln>
         </p:spPr>
         <p:txBody>
-          <a:bodyPr wrap="square" anchor="ctr" lIns="101600" tIns="76200" rIns="101600" bIns="76200">
+          <a:bodyPr wrap="square" lIns="101600" tIns="76200" rIns="101600" bIns="76200" anchor="ctr">
             <a:spAutoFit/>
           </a:bodyPr>
           <a:lstStyle/>
@@ -14954,7 +14874,7 @@
           </a:ln>
         </p:spPr>
         <p:txBody>
-          <a:bodyPr wrap="square" anchor="ctr" lIns="0" tIns="76200" rIns="0" bIns="76200">
+          <a:bodyPr wrap="square" lIns="0" tIns="76200" rIns="0" bIns="76200" anchor="ctr">
             <a:spAutoFit/>
           </a:bodyPr>
           <a:lstStyle/>
@@ -14996,7 +14916,7 @@
           </a:ln>
         </p:spPr>
         <p:txBody>
-          <a:bodyPr wrap="square" anchor="ctr" lIns="101600" tIns="76200" rIns="101600" bIns="76200">
+          <a:bodyPr wrap="square" lIns="101600" tIns="76200" rIns="101600" bIns="76200" anchor="ctr">
             <a:spAutoFit/>
           </a:bodyPr>
           <a:lstStyle/>
@@ -15040,7 +14960,7 @@
           </a:ln>
         </p:spPr>
         <p:txBody>
-          <a:bodyPr wrap="square" anchor="ctr" lIns="0" tIns="76200" rIns="0" bIns="76200">
+          <a:bodyPr wrap="square" lIns="0" tIns="76200" rIns="0" bIns="76200" anchor="ctr">
             <a:spAutoFit/>
           </a:bodyPr>
           <a:lstStyle/>
@@ -15082,7 +15002,7 @@
           </a:ln>
         </p:spPr>
         <p:txBody>
-          <a:bodyPr wrap="square" anchor="ctr" lIns="101600" tIns="76200" rIns="101600" bIns="76200">
+          <a:bodyPr wrap="square" lIns="101600" tIns="76200" rIns="101600" bIns="76200" anchor="ctr">
             <a:spAutoFit/>
           </a:bodyPr>
           <a:lstStyle/>
@@ -15126,7 +15046,7 @@
           </a:ln>
         </p:spPr>
         <p:txBody>
-          <a:bodyPr wrap="square" anchor="ctr" lIns="0" tIns="76200" rIns="0" bIns="76200">
+          <a:bodyPr wrap="square" lIns="0" tIns="76200" rIns="0" bIns="76200" anchor="ctr">
             <a:spAutoFit/>
           </a:bodyPr>
           <a:lstStyle/>
@@ -15168,7 +15088,7 @@
           </a:ln>
         </p:spPr>
         <p:txBody>
-          <a:bodyPr wrap="square" anchor="ctr" lIns="101600" tIns="76200" rIns="101600" bIns="76200">
+          <a:bodyPr wrap="square" lIns="101600" tIns="76200" rIns="101600" bIns="76200" anchor="ctr">
             <a:spAutoFit/>
           </a:bodyPr>
           <a:lstStyle/>
@@ -15212,7 +15132,7 @@
           </a:ln>
         </p:spPr>
         <p:txBody>
-          <a:bodyPr wrap="square" anchor="ctr" lIns="0" tIns="76200" rIns="0" bIns="76200">
+          <a:bodyPr wrap="square" lIns="0" tIns="76200" rIns="0" bIns="76200" anchor="ctr">
             <a:spAutoFit/>
           </a:bodyPr>
           <a:lstStyle/>
@@ -15254,7 +15174,7 @@
           </a:ln>
         </p:spPr>
         <p:txBody>
-          <a:bodyPr wrap="square" anchor="ctr" lIns="101600" tIns="76200" rIns="101600" bIns="76200">
+          <a:bodyPr wrap="square" lIns="101600" tIns="76200" rIns="101600" bIns="76200" anchor="ctr">
             <a:spAutoFit/>
           </a:bodyPr>
           <a:lstStyle/>
@@ -15398,7 +15318,7 @@
       </p:pic>
       <p:grpSp>
         <p:nvGrpSpPr>
-          <p:cNvPr id="2" name="Group 9">
+          <p:cNvPr id="88" name="Group 9">
             <a:extLst>
               <a:ext uri="{FF2B5EF4-FFF2-40B4-BE49-F238E27FC236}">
                 <a16:creationId xmlns:a16="http://schemas.microsoft.com/office/drawing/2014/main" id="{E9A9D87C-BB39-2D16-4511-A207967FDB70}"/>
@@ -15418,7 +15338,7 @@
         </p:grpSpPr>
         <p:sp>
           <p:nvSpPr>
-            <p:cNvPr id="3" name="Freeform 10">
+            <p:cNvPr id="89" name="Freeform 10">
               <a:extLst>
                 <a:ext uri="{FF2B5EF4-FFF2-40B4-BE49-F238E27FC236}">
                   <a16:creationId xmlns:a16="http://schemas.microsoft.com/office/drawing/2014/main" id="{1A470FA5-53C2-D319-EA99-E68E9B026C96}"/>
@@ -15523,7 +15443,7 @@
           </a:ln>
         </p:spPr>
         <p:txBody>
-          <a:bodyPr wrap="square" anchor="ctr" lIns="101600" tIns="76200" rIns="101600" bIns="76200">
+          <a:bodyPr wrap="square" lIns="101600" tIns="76200" rIns="101600" bIns="76200" anchor="ctr">
             <a:spAutoFit/>
           </a:bodyPr>
           <a:lstStyle/>
@@ -15565,7 +15485,7 @@
           </a:ln>
         </p:spPr>
         <p:txBody>
-          <a:bodyPr wrap="square" anchor="ctr" lIns="101600" tIns="76200" rIns="101600" bIns="76200">
+          <a:bodyPr wrap="square" lIns="101600" tIns="76200" rIns="101600" bIns="76200" anchor="ctr">
             <a:spAutoFit/>
           </a:bodyPr>
           <a:lstStyle/>
@@ -15609,7 +15529,7 @@
           </a:ln>
         </p:spPr>
         <p:txBody>
-          <a:bodyPr wrap="square" anchor="ctr" lIns="101600" tIns="76200" rIns="101600" bIns="76200">
+          <a:bodyPr wrap="square" lIns="101600" tIns="76200" rIns="101600" bIns="76200" anchor="ctr">
             <a:spAutoFit/>
           </a:bodyPr>
           <a:lstStyle/>
@@ -15651,7 +15571,7 @@
           </a:ln>
         </p:spPr>
         <p:txBody>
-          <a:bodyPr wrap="square" anchor="ctr" lIns="50800" tIns="50800" rIns="127000" bIns="50800">
+          <a:bodyPr wrap="square" lIns="50800" tIns="50800" rIns="127000" bIns="50800" anchor="ctr">
             <a:spAutoFit/>
           </a:bodyPr>
           <a:lstStyle/>
@@ -15697,11 +15617,13 @@
           </a:ln>
         </p:spPr>
         <p:txBody>
-          <a:bodyPr wrap="square" anchor="ctr" lIns="101600" tIns="76200" rIns="101600" bIns="76200">
-            <a:spAutoFit/>
-          </a:bodyPr>
-          <a:lstStyle/>
-          <a:p/>
+          <a:bodyPr wrap="square" lIns="101600" tIns="76200" rIns="101600" bIns="76200" anchor="ctr">
+            <a:spAutoFit/>
+          </a:bodyPr>
+          <a:lstStyle/>
+          <a:p>
+            <a:endParaRPr/>
+          </a:p>
         </p:txBody>
       </p:sp>
       <p:sp>
@@ -15726,7 +15648,7 @@
           </a:ln>
         </p:spPr>
         <p:txBody>
-          <a:bodyPr wrap="square" anchor="ctr" lIns="101600" tIns="76200" rIns="101600" bIns="76200">
+          <a:bodyPr wrap="square" lIns="101600" tIns="76200" rIns="101600" bIns="76200" anchor="ctr">
             <a:spAutoFit/>
           </a:bodyPr>
           <a:lstStyle/>
@@ -15757,7 +15679,7 @@
           <p:nvPr/>
         </p:nvPicPr>
         <p:blipFill>
-          <a:blip r:embed="rId8"/>
+          <a:blip r:embed="rId2"/>
           <a:stretch>
             <a:fillRect/>
           </a:stretch>
@@ -15792,7 +15714,7 @@
           </a:ln>
         </p:spPr>
         <p:txBody>
-          <a:bodyPr wrap="square" anchor="ctr" lIns="101600" tIns="76200" rIns="101600" bIns="76200">
+          <a:bodyPr wrap="square" lIns="101600" tIns="76200" rIns="101600" bIns="76200" anchor="ctr">
             <a:spAutoFit/>
           </a:bodyPr>
           <a:lstStyle/>
@@ -15838,11 +15760,13 @@
           </a:ln>
         </p:spPr>
         <p:txBody>
-          <a:bodyPr wrap="square" anchor="ctr" lIns="101600" tIns="76200" rIns="101600" bIns="76200">
-            <a:spAutoFit/>
-          </a:bodyPr>
-          <a:lstStyle/>
-          <a:p/>
+          <a:bodyPr wrap="square" lIns="101600" tIns="76200" rIns="101600" bIns="76200" anchor="ctr">
+            <a:spAutoFit/>
+          </a:bodyPr>
+          <a:lstStyle/>
+          <a:p>
+            <a:endParaRPr/>
+          </a:p>
         </p:txBody>
       </p:sp>
       <p:sp>
@@ -15867,7 +15791,7 @@
           </a:ln>
         </p:spPr>
         <p:txBody>
-          <a:bodyPr wrap="square" anchor="ctr" lIns="101600" tIns="76200" rIns="101600" bIns="76200">
+          <a:bodyPr wrap="square" lIns="101600" tIns="76200" rIns="101600" bIns="76200" anchor="ctr">
             <a:spAutoFit/>
           </a:bodyPr>
           <a:lstStyle/>
@@ -15909,7 +15833,7 @@
           </a:ln>
         </p:spPr>
         <p:txBody>
-          <a:bodyPr wrap="square" anchor="ctr" lIns="101600" tIns="76200" rIns="101600" bIns="76200">
+          <a:bodyPr wrap="square" lIns="101600" tIns="76200" rIns="101600" bIns="76200" anchor="ctr">
             <a:spAutoFit/>
           </a:bodyPr>
           <a:lstStyle/>
@@ -15967,7 +15891,7 @@
           </a:ln>
         </p:spPr>
         <p:txBody>
-          <a:bodyPr wrap="square" anchor="ctr" lIns="101600" tIns="76200" rIns="101600" bIns="76200">
+          <a:bodyPr wrap="square" lIns="101600" tIns="76200" rIns="101600" bIns="76200" anchor="ctr">
             <a:spAutoFit/>
           </a:bodyPr>
           <a:lstStyle/>
@@ -16011,11 +15935,13 @@
           </a:ln>
         </p:spPr>
         <p:txBody>
-          <a:bodyPr wrap="square" anchor="ctr" lIns="101600" tIns="76200" rIns="101600" bIns="76200">
-            <a:spAutoFit/>
-          </a:bodyPr>
-          <a:lstStyle/>
-          <a:p/>
+          <a:bodyPr wrap="square" lIns="101600" tIns="76200" rIns="101600" bIns="76200" anchor="ctr">
+            <a:spAutoFit/>
+          </a:bodyPr>
+          <a:lstStyle/>
+          <a:p>
+            <a:endParaRPr/>
+          </a:p>
         </p:txBody>
       </p:sp>
       <p:sp>
@@ -16042,11 +15968,13 @@
           </a:ln>
         </p:spPr>
         <p:txBody>
-          <a:bodyPr wrap="square" anchor="ctr" lIns="101600" tIns="76200" rIns="101600" bIns="76200">
-            <a:spAutoFit/>
-          </a:bodyPr>
-          <a:lstStyle/>
-          <a:p/>
+          <a:bodyPr wrap="square" lIns="101600" tIns="76200" rIns="101600" bIns="76200" anchor="ctr">
+            <a:spAutoFit/>
+          </a:bodyPr>
+          <a:lstStyle/>
+          <a:p>
+            <a:endParaRPr/>
+          </a:p>
         </p:txBody>
       </p:sp>
       <p:sp>
@@ -16069,7 +15997,7 @@
           </a:ln>
         </p:spPr>
         <p:txBody>
-          <a:bodyPr wrap="square" anchor="ctr" lIns="101600" tIns="76200" rIns="101600" bIns="76200">
+          <a:bodyPr wrap="square" lIns="101600" tIns="76200" rIns="101600" bIns="76200" anchor="ctr">
             <a:spAutoFit/>
           </a:bodyPr>
           <a:lstStyle/>
@@ -16111,7 +16039,7 @@
           </a:ln>
         </p:spPr>
         <p:txBody>
-          <a:bodyPr wrap="square" anchor="ctr" lIns="101600" tIns="76200" rIns="101600" bIns="76200">
+          <a:bodyPr wrap="square" lIns="101600" tIns="76200" rIns="101600" bIns="76200" anchor="ctr">
             <a:spAutoFit/>
           </a:bodyPr>
           <a:lstStyle/>
@@ -16157,7 +16085,7 @@
           </a:ln>
         </p:spPr>
         <p:txBody>
-          <a:bodyPr wrap="square" anchor="ctr" lIns="101600" tIns="76200" rIns="101600" bIns="76200">
+          <a:bodyPr wrap="square" lIns="101600" tIns="76200" rIns="101600" bIns="76200" anchor="ctr">
             <a:spAutoFit/>
           </a:bodyPr>
           <a:lstStyle/>
@@ -16219,7 +16147,7 @@
           </a:ln>
         </p:spPr>
         <p:txBody>
-          <a:bodyPr wrap="square" anchor="ctr" lIns="101600" tIns="76200" rIns="101600" bIns="76200">
+          <a:bodyPr wrap="square" lIns="101600" tIns="76200" rIns="101600" bIns="76200" anchor="ctr">
             <a:spAutoFit/>
           </a:bodyPr>
           <a:lstStyle/>
@@ -16281,11 +16209,13 @@
           </a:ln>
         </p:spPr>
         <p:txBody>
-          <a:bodyPr wrap="square" anchor="ctr" lIns="101600" tIns="76200" rIns="101600" bIns="76200">
-            <a:spAutoFit/>
-          </a:bodyPr>
-          <a:lstStyle/>
-          <a:p/>
+          <a:bodyPr wrap="square" lIns="101600" tIns="76200" rIns="101600" bIns="76200" anchor="ctr">
+            <a:spAutoFit/>
+          </a:bodyPr>
+          <a:lstStyle/>
+          <a:p>
+            <a:endParaRPr/>
+          </a:p>
         </p:txBody>
       </p:sp>
       <p:sp>
@@ -16310,7 +16240,7 @@
           </a:ln>
         </p:spPr>
         <p:txBody>
-          <a:bodyPr wrap="square" anchor="ctr" lIns="101600" tIns="76200" rIns="101600" bIns="76200">
+          <a:bodyPr wrap="square" lIns="101600" tIns="76200" rIns="101600" bIns="76200" anchor="ctr">
             <a:spAutoFit/>
           </a:bodyPr>
           <a:lstStyle/>
@@ -16352,7 +16282,7 @@
           </a:ln>
         </p:spPr>
         <p:txBody>
-          <a:bodyPr wrap="square" anchor="ctr" lIns="76200" tIns="50800" rIns="50800" bIns="50800">
+          <a:bodyPr wrap="square" lIns="76200" tIns="50800" rIns="50800" bIns="50800" anchor="ctr">
             <a:spAutoFit/>
           </a:bodyPr>
           <a:lstStyle/>
@@ -16394,7 +16324,7 @@
           </a:ln>
         </p:spPr>
         <p:txBody>
-          <a:bodyPr wrap="square" anchor="ctr" lIns="50800" tIns="50800" rIns="50800" bIns="50800">
+          <a:bodyPr wrap="square" lIns="50800" tIns="50800" rIns="50800" bIns="50800" anchor="ctr">
             <a:spAutoFit/>
           </a:bodyPr>
           <a:lstStyle/>
@@ -16436,7 +16366,7 @@
           </a:ln>
         </p:spPr>
         <p:txBody>
-          <a:bodyPr wrap="square" anchor="ctr" lIns="50800" tIns="50800" rIns="50800" bIns="50800">
+          <a:bodyPr wrap="square" lIns="50800" tIns="50800" rIns="50800" bIns="50800" anchor="ctr">
             <a:spAutoFit/>
           </a:bodyPr>
           <a:lstStyle/>
@@ -16480,11 +16410,13 @@
           </a:ln>
         </p:spPr>
         <p:txBody>
-          <a:bodyPr wrap="square" anchor="ctr" lIns="101600" tIns="76200" rIns="101600" bIns="76200">
-            <a:spAutoFit/>
-          </a:bodyPr>
-          <a:lstStyle/>
-          <a:p/>
+          <a:bodyPr wrap="square" lIns="101600" tIns="76200" rIns="101600" bIns="76200" anchor="ctr">
+            <a:spAutoFit/>
+          </a:bodyPr>
+          <a:lstStyle/>
+          <a:p>
+            <a:endParaRPr/>
+          </a:p>
         </p:txBody>
       </p:sp>
       <p:sp>
@@ -16507,7 +16439,7 @@
           </a:ln>
         </p:spPr>
         <p:txBody>
-          <a:bodyPr wrap="square" anchor="ctr" lIns="50800" tIns="50800" rIns="50800" bIns="50800">
+          <a:bodyPr wrap="square" lIns="50800" tIns="50800" rIns="50800" bIns="50800" anchor="ctr">
             <a:spAutoFit/>
           </a:bodyPr>
           <a:lstStyle/>
@@ -16551,11 +16483,13 @@
           </a:ln>
         </p:spPr>
         <p:txBody>
-          <a:bodyPr wrap="square" anchor="ctr" lIns="101600" tIns="76200" rIns="101600" bIns="76200">
-            <a:spAutoFit/>
-          </a:bodyPr>
-          <a:lstStyle/>
-          <a:p/>
+          <a:bodyPr wrap="square" lIns="101600" tIns="76200" rIns="101600" bIns="76200" anchor="ctr">
+            <a:spAutoFit/>
+          </a:bodyPr>
+          <a:lstStyle/>
+          <a:p>
+            <a:endParaRPr/>
+          </a:p>
         </p:txBody>
       </p:sp>
       <p:sp>
@@ -16578,7 +16512,7 @@
           </a:ln>
         </p:spPr>
         <p:txBody>
-          <a:bodyPr wrap="square" anchor="ctr" lIns="76200" tIns="50800" rIns="50800" bIns="50800">
+          <a:bodyPr wrap="square" lIns="76200" tIns="50800" rIns="50800" bIns="50800" anchor="ctr">
             <a:spAutoFit/>
           </a:bodyPr>
           <a:lstStyle/>
@@ -16620,7 +16554,7 @@
           </a:ln>
         </p:spPr>
         <p:txBody>
-          <a:bodyPr wrap="square" anchor="ctr" lIns="50800" tIns="50800" rIns="50800" bIns="50800">
+          <a:bodyPr wrap="square" lIns="50800" tIns="50800" rIns="50800" bIns="50800" anchor="ctr">
             <a:spAutoFit/>
           </a:bodyPr>
           <a:lstStyle/>
@@ -16662,7 +16596,7 @@
           </a:ln>
         </p:spPr>
         <p:txBody>
-          <a:bodyPr wrap="square" anchor="ctr" lIns="50800" tIns="50800" rIns="50800" bIns="50800">
+          <a:bodyPr wrap="square" lIns="50800" tIns="50800" rIns="50800" bIns="50800" anchor="ctr">
             <a:spAutoFit/>
           </a:bodyPr>
           <a:lstStyle/>
@@ -16706,11 +16640,13 @@
           </a:ln>
         </p:spPr>
         <p:txBody>
-          <a:bodyPr wrap="square" anchor="ctr" lIns="101600" tIns="76200" rIns="101600" bIns="76200">
-            <a:spAutoFit/>
-          </a:bodyPr>
-          <a:lstStyle/>
-          <a:p/>
+          <a:bodyPr wrap="square" lIns="101600" tIns="76200" rIns="101600" bIns="76200" anchor="ctr">
+            <a:spAutoFit/>
+          </a:bodyPr>
+          <a:lstStyle/>
+          <a:p>
+            <a:endParaRPr/>
+          </a:p>
         </p:txBody>
       </p:sp>
       <p:sp>
@@ -16733,7 +16669,7 @@
           </a:ln>
         </p:spPr>
         <p:txBody>
-          <a:bodyPr wrap="square" anchor="ctr" lIns="50800" tIns="50800" rIns="50800" bIns="50800">
+          <a:bodyPr wrap="square" lIns="50800" tIns="50800" rIns="50800" bIns="50800" anchor="ctr">
             <a:spAutoFit/>
           </a:bodyPr>
           <a:lstStyle/>
@@ -16777,11 +16713,13 @@
           </a:ln>
         </p:spPr>
         <p:txBody>
-          <a:bodyPr wrap="square" anchor="ctr" lIns="101600" tIns="76200" rIns="101600" bIns="76200">
-            <a:spAutoFit/>
-          </a:bodyPr>
-          <a:lstStyle/>
-          <a:p/>
+          <a:bodyPr wrap="square" lIns="101600" tIns="76200" rIns="101600" bIns="76200" anchor="ctr">
+            <a:spAutoFit/>
+          </a:bodyPr>
+          <a:lstStyle/>
+          <a:p>
+            <a:endParaRPr/>
+          </a:p>
         </p:txBody>
       </p:sp>
       <p:sp>
@@ -16806,11 +16744,13 @@
           </a:ln>
         </p:spPr>
         <p:txBody>
-          <a:bodyPr wrap="square" anchor="ctr" lIns="101600" tIns="76200" rIns="101600" bIns="76200">
-            <a:spAutoFit/>
-          </a:bodyPr>
-          <a:lstStyle/>
-          <a:p/>
+          <a:bodyPr wrap="square" lIns="101600" tIns="76200" rIns="101600" bIns="76200" anchor="ctr">
+            <a:spAutoFit/>
+          </a:bodyPr>
+          <a:lstStyle/>
+          <a:p>
+            <a:endParaRPr/>
+          </a:p>
         </p:txBody>
       </p:sp>
       <p:sp>
@@ -16833,7 +16773,7 @@
           </a:ln>
         </p:spPr>
         <p:txBody>
-          <a:bodyPr wrap="square" anchor="ctr" lIns="76200" tIns="50800" rIns="50800" bIns="50800">
+          <a:bodyPr wrap="square" lIns="76200" tIns="50800" rIns="50800" bIns="50800" anchor="ctr">
             <a:spAutoFit/>
           </a:bodyPr>
           <a:lstStyle/>
@@ -16875,7 +16815,7 @@
           </a:ln>
         </p:spPr>
         <p:txBody>
-          <a:bodyPr wrap="square" anchor="ctr" lIns="50800" tIns="50800" rIns="50800" bIns="50800">
+          <a:bodyPr wrap="square" lIns="50800" tIns="50800" rIns="50800" bIns="50800" anchor="ctr">
             <a:spAutoFit/>
           </a:bodyPr>
           <a:lstStyle/>
@@ -16919,11 +16859,13 @@
           </a:ln>
         </p:spPr>
         <p:txBody>
-          <a:bodyPr wrap="square" anchor="ctr" lIns="101600" tIns="76200" rIns="101600" bIns="76200">
-            <a:spAutoFit/>
-          </a:bodyPr>
-          <a:lstStyle/>
-          <a:p/>
+          <a:bodyPr wrap="square" lIns="101600" tIns="76200" rIns="101600" bIns="76200" anchor="ctr">
+            <a:spAutoFit/>
+          </a:bodyPr>
+          <a:lstStyle/>
+          <a:p>
+            <a:endParaRPr/>
+          </a:p>
         </p:txBody>
       </p:sp>
       <p:sp>
@@ -16946,7 +16888,7 @@
           </a:ln>
         </p:spPr>
         <p:txBody>
-          <a:bodyPr wrap="square" anchor="ctr" lIns="76200" tIns="50800" rIns="50800" bIns="50800">
+          <a:bodyPr wrap="square" lIns="76200" tIns="50800" rIns="50800" bIns="50800" anchor="ctr">
             <a:spAutoFit/>
           </a:bodyPr>
           <a:lstStyle/>
@@ -16988,7 +16930,7 @@
           </a:ln>
         </p:spPr>
         <p:txBody>
-          <a:bodyPr wrap="square" anchor="ctr" lIns="50800" tIns="50800" rIns="50800" bIns="50800">
+          <a:bodyPr wrap="square" lIns="50800" tIns="50800" rIns="50800" bIns="50800" anchor="ctr">
             <a:spAutoFit/>
           </a:bodyPr>
           <a:lstStyle/>
@@ -17030,7 +16972,7 @@
           </a:ln>
         </p:spPr>
         <p:txBody>
-          <a:bodyPr wrap="square" anchor="ctr" lIns="50800" tIns="50800" rIns="50800" bIns="50800">
+          <a:bodyPr wrap="square" lIns="50800" tIns="50800" rIns="50800" bIns="50800" anchor="ctr">
             <a:spAutoFit/>
           </a:bodyPr>
           <a:lstStyle/>
@@ -17074,11 +17016,13 @@
           </a:ln>
         </p:spPr>
         <p:txBody>
-          <a:bodyPr wrap="square" anchor="ctr" lIns="101600" tIns="76200" rIns="101600" bIns="76200">
-            <a:spAutoFit/>
-          </a:bodyPr>
-          <a:lstStyle/>
-          <a:p/>
+          <a:bodyPr wrap="square" lIns="101600" tIns="76200" rIns="101600" bIns="76200" anchor="ctr">
+            <a:spAutoFit/>
+          </a:bodyPr>
+          <a:lstStyle/>
+          <a:p>
+            <a:endParaRPr/>
+          </a:p>
         </p:txBody>
       </p:sp>
       <p:sp>
@@ -17101,7 +17045,7 @@
           </a:ln>
         </p:spPr>
         <p:txBody>
-          <a:bodyPr wrap="square" anchor="ctr" lIns="50800" tIns="50800" rIns="50800" bIns="50800">
+          <a:bodyPr wrap="square" lIns="50800" tIns="50800" rIns="50800" bIns="50800" anchor="ctr">
             <a:spAutoFit/>
           </a:bodyPr>
           <a:lstStyle/>
@@ -17145,11 +17089,13 @@
           </a:ln>
         </p:spPr>
         <p:txBody>
-          <a:bodyPr wrap="square" anchor="ctr" lIns="101600" tIns="76200" rIns="101600" bIns="76200">
-            <a:spAutoFit/>
-          </a:bodyPr>
-          <a:lstStyle/>
-          <a:p/>
+          <a:bodyPr wrap="square" lIns="101600" tIns="76200" rIns="101600" bIns="76200" anchor="ctr">
+            <a:spAutoFit/>
+          </a:bodyPr>
+          <a:lstStyle/>
+          <a:p>
+            <a:endParaRPr/>
+          </a:p>
         </p:txBody>
       </p:sp>
       <p:sp>
@@ -17174,11 +17120,13 @@
           </a:ln>
         </p:spPr>
         <p:txBody>
-          <a:bodyPr wrap="square" anchor="ctr" lIns="101600" tIns="76200" rIns="101600" bIns="76200">
-            <a:spAutoFit/>
-          </a:bodyPr>
-          <a:lstStyle/>
-          <a:p/>
+          <a:bodyPr wrap="square" lIns="101600" tIns="76200" rIns="101600" bIns="76200" anchor="ctr">
+            <a:spAutoFit/>
+          </a:bodyPr>
+          <a:lstStyle/>
+          <a:p>
+            <a:endParaRPr/>
+          </a:p>
         </p:txBody>
       </p:sp>
       <p:sp>
@@ -17205,11 +17153,13 @@
           </a:ln>
         </p:spPr>
         <p:txBody>
-          <a:bodyPr wrap="square" anchor="ctr" lIns="101600" tIns="76200" rIns="101600" bIns="76200">
-            <a:spAutoFit/>
-          </a:bodyPr>
-          <a:lstStyle/>
-          <a:p/>
+          <a:bodyPr wrap="square" lIns="101600" tIns="76200" rIns="101600" bIns="76200" anchor="ctr">
+            <a:spAutoFit/>
+          </a:bodyPr>
+          <a:lstStyle/>
+          <a:p>
+            <a:endParaRPr/>
+          </a:p>
         </p:txBody>
       </p:sp>
       <p:sp>
@@ -17232,7 +17182,7 @@
           </a:ln>
         </p:spPr>
         <p:txBody>
-          <a:bodyPr wrap="square" anchor="ctr" lIns="76200" tIns="50800" rIns="76200" bIns="50800">
+          <a:bodyPr wrap="square" lIns="76200" tIns="50800" rIns="76200" bIns="50800" anchor="ctr">
             <a:spAutoFit/>
           </a:bodyPr>
           <a:lstStyle/>
@@ -17290,7 +17240,7 @@
           </a:ln>
         </p:spPr>
         <p:txBody>
-          <a:bodyPr wrap="square" anchor="ctr" lIns="76200" tIns="50800" rIns="76200" bIns="50800">
+          <a:bodyPr wrap="square" lIns="76200" tIns="50800" rIns="76200" bIns="50800" anchor="ctr">
             <a:spAutoFit/>
           </a:bodyPr>
           <a:lstStyle/>
@@ -17350,11 +17300,13 @@
           </a:ln>
         </p:spPr>
         <p:txBody>
-          <a:bodyPr wrap="square" anchor="ctr" lIns="101600" tIns="76200" rIns="101600" bIns="76200">
-            <a:spAutoFit/>
-          </a:bodyPr>
-          <a:lstStyle/>
-          <a:p/>
+          <a:bodyPr wrap="square" lIns="101600" tIns="76200" rIns="101600" bIns="76200" anchor="ctr">
+            <a:spAutoFit/>
+          </a:bodyPr>
+          <a:lstStyle/>
+          <a:p>
+            <a:endParaRPr/>
+          </a:p>
         </p:txBody>
       </p:sp>
       <p:sp>
@@ -17377,7 +17329,7 @@
           </a:ln>
         </p:spPr>
         <p:txBody>
-          <a:bodyPr wrap="square" anchor="ctr" lIns="76200" tIns="50800" rIns="76200" bIns="50800">
+          <a:bodyPr wrap="square" lIns="76200" tIns="50800" rIns="76200" bIns="50800" anchor="ctr">
             <a:spAutoFit/>
           </a:bodyPr>
           <a:lstStyle/>
@@ -17437,11 +17389,13 @@
           </a:ln>
         </p:spPr>
         <p:txBody>
-          <a:bodyPr wrap="square" anchor="ctr" lIns="101600" tIns="76200" rIns="101600" bIns="76200">
-            <a:spAutoFit/>
-          </a:bodyPr>
-          <a:lstStyle/>
-          <a:p/>
+          <a:bodyPr wrap="square" lIns="101600" tIns="76200" rIns="101600" bIns="76200" anchor="ctr">
+            <a:spAutoFit/>
+          </a:bodyPr>
+          <a:lstStyle/>
+          <a:p>
+            <a:endParaRPr/>
+          </a:p>
         </p:txBody>
       </p:sp>
       <p:sp>
@@ -17464,7 +17418,7 @@
           </a:ln>
         </p:spPr>
         <p:txBody>
-          <a:bodyPr wrap="square" anchor="ctr" lIns="76200" tIns="50800" rIns="76200" bIns="50800">
+          <a:bodyPr wrap="square" lIns="76200" tIns="50800" rIns="76200" bIns="50800" anchor="ctr">
             <a:spAutoFit/>
           </a:bodyPr>
           <a:lstStyle/>
@@ -17524,11 +17478,13 @@
           </a:ln>
         </p:spPr>
         <p:txBody>
-          <a:bodyPr wrap="square" anchor="ctr" lIns="101600" tIns="76200" rIns="101600" bIns="76200">
-            <a:spAutoFit/>
-          </a:bodyPr>
-          <a:lstStyle/>
-          <a:p/>
+          <a:bodyPr wrap="square" lIns="101600" tIns="76200" rIns="101600" bIns="76200" anchor="ctr">
+            <a:spAutoFit/>
+          </a:bodyPr>
+          <a:lstStyle/>
+          <a:p>
+            <a:endParaRPr/>
+          </a:p>
         </p:txBody>
       </p:sp>
       <p:sp>
@@ -17551,7 +17507,7 @@
           </a:ln>
         </p:spPr>
         <p:txBody>
-          <a:bodyPr wrap="square" anchor="ctr" lIns="76200" tIns="50800" rIns="76200" bIns="50800">
+          <a:bodyPr wrap="square" lIns="76200" tIns="50800" rIns="76200" bIns="50800" anchor="ctr">
             <a:spAutoFit/>
           </a:bodyPr>
           <a:lstStyle/>
@@ -17611,11 +17567,13 @@
           </a:ln>
         </p:spPr>
         <p:txBody>
-          <a:bodyPr wrap="square" anchor="ctr" lIns="101600" tIns="76200" rIns="101600" bIns="76200">
-            <a:spAutoFit/>
-          </a:bodyPr>
-          <a:lstStyle/>
-          <a:p/>
+          <a:bodyPr wrap="square" lIns="101600" tIns="76200" rIns="101600" bIns="76200" anchor="ctr">
+            <a:spAutoFit/>
+          </a:bodyPr>
+          <a:lstStyle/>
+          <a:p>
+            <a:endParaRPr/>
+          </a:p>
         </p:txBody>
       </p:sp>
       <p:sp>
@@ -17638,7 +17596,7 @@
           </a:ln>
         </p:spPr>
         <p:txBody>
-          <a:bodyPr wrap="square" anchor="ctr" lIns="76200" tIns="50800" rIns="76200" bIns="50800">
+          <a:bodyPr wrap="square" lIns="76200" tIns="50800" rIns="76200" bIns="50800" anchor="ctr">
             <a:spAutoFit/>
           </a:bodyPr>
           <a:lstStyle/>
@@ -17698,11 +17656,13 @@
           </a:ln>
         </p:spPr>
         <p:txBody>
-          <a:bodyPr wrap="square" anchor="ctr" lIns="101600" tIns="76200" rIns="101600" bIns="76200">
-            <a:spAutoFit/>
-          </a:bodyPr>
-          <a:lstStyle/>
-          <a:p/>
+          <a:bodyPr wrap="square" lIns="101600" tIns="76200" rIns="101600" bIns="76200" anchor="ctr">
+            <a:spAutoFit/>
+          </a:bodyPr>
+          <a:lstStyle/>
+          <a:p>
+            <a:endParaRPr/>
+          </a:p>
         </p:txBody>
       </p:sp>
       <p:sp>
@@ -17729,11 +17689,13 @@
           </a:ln>
         </p:spPr>
         <p:txBody>
-          <a:bodyPr wrap="square" anchor="ctr" lIns="101600" tIns="76200" rIns="101600" bIns="76200">
-            <a:spAutoFit/>
-          </a:bodyPr>
-          <a:lstStyle/>
-          <a:p/>
+          <a:bodyPr wrap="square" lIns="101600" tIns="76200" rIns="101600" bIns="76200" anchor="ctr">
+            <a:spAutoFit/>
+          </a:bodyPr>
+          <a:lstStyle/>
+          <a:p>
+            <a:endParaRPr/>
+          </a:p>
         </p:txBody>
       </p:sp>
       <p:sp>
@@ -17758,7 +17720,7 @@
           </a:ln>
         </p:spPr>
         <p:txBody>
-          <a:bodyPr wrap="square" anchor="ctr" lIns="101600" tIns="76200" rIns="101600" bIns="76200">
+          <a:bodyPr wrap="square" lIns="101600" tIns="76200" rIns="101600" bIns="76200" anchor="ctr">
             <a:spAutoFit/>
           </a:bodyPr>
           <a:lstStyle/>
@@ -17800,12 +17762,12 @@
           </a:ln>
         </p:spPr>
         <p:txBody>
-          <a:bodyPr wrap="square" anchor="t" lIns="101600" tIns="76200" rIns="76200" bIns="76200">
-            <a:spAutoFit/>
-          </a:bodyPr>
-          <a:lstStyle/>
-          <a:p>
-            <a:pPr algn="l" marL="190500" indent="-190500">
+          <a:bodyPr wrap="square" lIns="101600" tIns="76200" rIns="76200" bIns="76200" anchor="t">
+            <a:spAutoFit/>
+          </a:bodyPr>
+          <a:lstStyle/>
+          <a:p>
+            <a:pPr marL="190500" indent="-190500" algn="l">
               <a:lnSpc>
                 <a:spcPct val="96000"/>
               </a:lnSpc>
@@ -17829,7 +17791,7 @@
             </a:r>
           </a:p>
           <a:p>
-            <a:pPr algn="l" marL="190500" indent="-190500">
+            <a:pPr marL="190500" indent="-190500" algn="l">
               <a:lnSpc>
                 <a:spcPct val="96000"/>
               </a:lnSpc>
@@ -17853,7 +17815,7 @@
             </a:r>
           </a:p>
           <a:p>
-            <a:pPr algn="l" marL="190500" indent="-190500">
+            <a:pPr marL="190500" indent="-190500" algn="l">
               <a:lnSpc>
                 <a:spcPct val="96000"/>
               </a:lnSpc>
@@ -17877,7 +17839,7 @@
             </a:r>
           </a:p>
           <a:p>
-            <a:pPr algn="l" marL="190500" indent="-190500">
+            <a:pPr marL="190500" indent="-190500" algn="l">
               <a:lnSpc>
                 <a:spcPct val="96000"/>
               </a:lnSpc>
@@ -17926,11 +17888,13 @@
           </a:ln>
         </p:spPr>
         <p:txBody>
-          <a:bodyPr wrap="square" anchor="ctr" lIns="101600" tIns="76200" rIns="101600" bIns="76200">
-            <a:spAutoFit/>
-          </a:bodyPr>
-          <a:lstStyle/>
-          <a:p/>
+          <a:bodyPr wrap="square" lIns="101600" tIns="76200" rIns="101600" bIns="76200" anchor="ctr">
+            <a:spAutoFit/>
+          </a:bodyPr>
+          <a:lstStyle/>
+          <a:p>
+            <a:endParaRPr/>
+          </a:p>
         </p:txBody>
       </p:sp>
       <p:sp>
@@ -17955,7 +17919,7 @@
           </a:ln>
         </p:spPr>
         <p:txBody>
-          <a:bodyPr wrap="square" anchor="ctr" lIns="101600" tIns="76200" rIns="101600" bIns="76200">
+          <a:bodyPr wrap="square" lIns="101600" tIns="76200" rIns="101600" bIns="76200" anchor="ctr">
             <a:spAutoFit/>
           </a:bodyPr>
           <a:lstStyle/>
@@ -17997,12 +17961,12 @@
           </a:ln>
         </p:spPr>
         <p:txBody>
-          <a:bodyPr wrap="square" anchor="t" lIns="101600" tIns="76200" rIns="76200" bIns="76200">
-            <a:spAutoFit/>
-          </a:bodyPr>
-          <a:lstStyle/>
-          <a:p>
-            <a:pPr algn="l" marL="190500" indent="-190500">
+          <a:bodyPr wrap="square" lIns="101600" tIns="76200" rIns="76200" bIns="76200" anchor="t">
+            <a:spAutoFit/>
+          </a:bodyPr>
+          <a:lstStyle/>
+          <a:p>
+            <a:pPr marL="190500" indent="-190500" algn="l">
               <a:lnSpc>
                 <a:spcPct val="96000"/>
               </a:lnSpc>
@@ -18026,7 +17990,7 @@
             </a:r>
           </a:p>
           <a:p>
-            <a:pPr algn="l" marL="190500" indent="-190500">
+            <a:pPr marL="190500" indent="-190500" algn="l">
               <a:lnSpc>
                 <a:spcPct val="96000"/>
               </a:lnSpc>
@@ -18050,7 +18014,7 @@
             </a:r>
           </a:p>
           <a:p>
-            <a:pPr algn="l" marL="190500" indent="-190500">
+            <a:pPr marL="190500" indent="-190500" algn="l">
               <a:lnSpc>
                 <a:spcPct val="96000"/>
               </a:lnSpc>
@@ -18074,7 +18038,7 @@
             </a:r>
           </a:p>
           <a:p>
-            <a:pPr algn="l" marL="190500" indent="-190500">
+            <a:pPr marL="190500" indent="-190500" algn="l">
               <a:lnSpc>
                 <a:spcPct val="96000"/>
               </a:lnSpc>
@@ -18123,11 +18087,13 @@
           </a:ln>
         </p:spPr>
         <p:txBody>
-          <a:bodyPr wrap="square" anchor="ctr" lIns="101600" tIns="76200" rIns="101600" bIns="76200">
-            <a:spAutoFit/>
-          </a:bodyPr>
-          <a:lstStyle/>
-          <a:p/>
+          <a:bodyPr wrap="square" lIns="101600" tIns="76200" rIns="101600" bIns="76200" anchor="ctr">
+            <a:spAutoFit/>
+          </a:bodyPr>
+          <a:lstStyle/>
+          <a:p>
+            <a:endParaRPr/>
+          </a:p>
         </p:txBody>
       </p:sp>
       <p:sp>
@@ -18152,7 +18118,7 @@
           </a:ln>
         </p:spPr>
         <p:txBody>
-          <a:bodyPr wrap="square" anchor="ctr" lIns="101600" tIns="76200" rIns="101600" bIns="76200">
+          <a:bodyPr wrap="square" lIns="101600" tIns="76200" rIns="101600" bIns="76200" anchor="ctr">
             <a:spAutoFit/>
           </a:bodyPr>
           <a:lstStyle/>
@@ -18194,12 +18160,12 @@
           </a:ln>
         </p:spPr>
         <p:txBody>
-          <a:bodyPr wrap="square" anchor="t" lIns="101600" tIns="76200" rIns="76200" bIns="76200">
-            <a:spAutoFit/>
-          </a:bodyPr>
-          <a:lstStyle/>
-          <a:p>
-            <a:pPr algn="l" marL="190500" indent="-190500">
+          <a:bodyPr wrap="square" lIns="101600" tIns="76200" rIns="76200" bIns="76200" anchor="t">
+            <a:spAutoFit/>
+          </a:bodyPr>
+          <a:lstStyle/>
+          <a:p>
+            <a:pPr marL="190500" indent="-190500" algn="l">
               <a:lnSpc>
                 <a:spcPct val="96000"/>
               </a:lnSpc>
@@ -18223,7 +18189,7 @@
             </a:r>
           </a:p>
           <a:p>
-            <a:pPr algn="l" marL="190500" indent="-190500">
+            <a:pPr marL="190500" indent="-190500" algn="l">
               <a:lnSpc>
                 <a:spcPct val="96000"/>
               </a:lnSpc>
@@ -18247,7 +18213,7 @@
             </a:r>
           </a:p>
           <a:p>
-            <a:pPr algn="l" marL="190500" indent="-190500">
+            <a:pPr marL="190500" indent="-190500" algn="l">
               <a:lnSpc>
                 <a:spcPct val="96000"/>
               </a:lnSpc>
@@ -18271,7 +18237,7 @@
             </a:r>
           </a:p>
           <a:p>
-            <a:pPr algn="l" marL="190500" indent="-190500">
+            <a:pPr marL="190500" indent="-190500" algn="l">
               <a:lnSpc>
                 <a:spcPct val="96000"/>
               </a:lnSpc>
@@ -18318,7 +18284,7 @@
           </a:ln>
         </p:spPr>
         <p:txBody>
-          <a:bodyPr wrap="square" anchor="ctr" lIns="101600" tIns="76200" rIns="101600" bIns="76200">
+          <a:bodyPr wrap="square" lIns="101600" tIns="76200" rIns="101600" bIns="76200" anchor="ctr">
             <a:spAutoFit/>
           </a:bodyPr>
           <a:lstStyle/>
@@ -18350,7 +18316,7 @@
         </p:nvGraphicFramePr>
         <p:xfrm>
           <a:off x="7900416" y="5413248"/>
-          <a:ext cx="10085832" cy="3328416"/>
+          <a:ext cx="10085832" cy="3393186"/>
         </p:xfrm>
         <a:graphic>
           <a:graphicData uri="http://schemas.openxmlformats.org/drawingml/2006/table">
@@ -18359,15 +18325,39 @@
                 <a:tableStyleId>{5C22544A-7EE6-4342-B048-85BDC9FD1C3A}</a:tableStyleId>
               </a:tblPr>
               <a:tblGrid>
-                <a:gridCol w="2377440"/>
-                <a:gridCol w="1234440"/>
-                <a:gridCol w="1325880"/>
-                <a:gridCol w="5148072"/>
+                <a:gridCol w="2377440">
+                  <a:extLst>
+                    <a:ext uri="{9D8B030D-6E8A-4147-A177-3AD203B41FA5}">
+                      <a16:colId xmlns:a16="http://schemas.microsoft.com/office/drawing/2014/main" val="20000"/>
+                    </a:ext>
+                  </a:extLst>
+                </a:gridCol>
+                <a:gridCol w="1234440">
+                  <a:extLst>
+                    <a:ext uri="{9D8B030D-6E8A-4147-A177-3AD203B41FA5}">
+                      <a16:colId xmlns:a16="http://schemas.microsoft.com/office/drawing/2014/main" val="20001"/>
+                    </a:ext>
+                  </a:extLst>
+                </a:gridCol>
+                <a:gridCol w="1325880">
+                  <a:extLst>
+                    <a:ext uri="{9D8B030D-6E8A-4147-A177-3AD203B41FA5}">
+                      <a16:colId xmlns:a16="http://schemas.microsoft.com/office/drawing/2014/main" val="20002"/>
+                    </a:ext>
+                  </a:extLst>
+                </a:gridCol>
+                <a:gridCol w="5148072">
+                  <a:extLst>
+                    <a:ext uri="{9D8B030D-6E8A-4147-A177-3AD203B41FA5}">
+                      <a16:colId xmlns:a16="http://schemas.microsoft.com/office/drawing/2014/main" val="20003"/>
+                    </a:ext>
+                  </a:extLst>
+                </a:gridCol>
               </a:tblGrid>
               <a:tr h="369824">
                 <a:tc>
                   <a:txBody>
-                    <a:bodyPr wrap="square"/>
+                    <a:bodyPr/>
                     <a:lstStyle/>
                     <a:p>
                       <a:pPr algn="ctr">
@@ -18386,7 +18376,7 @@
                       </a:r>
                     </a:p>
                   </a:txBody>
-                  <a:tcPr anchor="ctr" marL="76200" marR="76200" marT="38100" marB="38100">
+                  <a:tcPr marL="76200" marR="76200" marT="38100" marB="38100" anchor="ctr">
                     <a:lnL w="6350">
                       <a:solidFill>
                         <a:srgbClr val="F3F1ED"/>
@@ -18414,7 +18404,7 @@
                 </a:tc>
                 <a:tc>
                   <a:txBody>
-                    <a:bodyPr wrap="square"/>
+                    <a:bodyPr/>
                     <a:lstStyle/>
                     <a:p>
                       <a:pPr algn="ctr">
@@ -18433,7 +18423,7 @@
                       </a:r>
                     </a:p>
                   </a:txBody>
-                  <a:tcPr anchor="ctr" marL="76200" marR="76200" marT="38100" marB="38100">
+                  <a:tcPr marL="76200" marR="76200" marT="38100" marB="38100" anchor="ctr">
                     <a:lnL w="6350">
                       <a:solidFill>
                         <a:srgbClr val="F3F1ED"/>
@@ -18461,7 +18451,7 @@
                 </a:tc>
                 <a:tc>
                   <a:txBody>
-                    <a:bodyPr wrap="square"/>
+                    <a:bodyPr/>
                     <a:lstStyle/>
                     <a:p>
                       <a:pPr algn="ctr">
@@ -18480,7 +18470,7 @@
                       </a:r>
                     </a:p>
                   </a:txBody>
-                  <a:tcPr anchor="ctr" marL="76200" marR="76200" marT="38100" marB="38100">
+                  <a:tcPr marL="76200" marR="76200" marT="38100" marB="38100" anchor="ctr">
                     <a:lnL w="6350">
                       <a:solidFill>
                         <a:srgbClr val="F3F1ED"/>
@@ -18508,7 +18498,7 @@
                 </a:tc>
                 <a:tc>
                   <a:txBody>
-                    <a:bodyPr wrap="square"/>
+                    <a:bodyPr/>
                     <a:lstStyle/>
                     <a:p>
                       <a:pPr algn="l">
@@ -18527,7 +18517,7 @@
                       </a:r>
                     </a:p>
                   </a:txBody>
-                  <a:tcPr anchor="ctr" marL="76200" marR="76200" marT="38100" marB="38100">
+                  <a:tcPr marL="76200" marR="76200" marT="38100" marB="38100" anchor="ctr">
                     <a:lnL w="6350">
                       <a:solidFill>
                         <a:srgbClr val="F3F1ED"/>
@@ -18553,11 +18543,16 @@
                     </a:solidFill>
                   </a:tcPr>
                 </a:tc>
+                <a:extLst>
+                  <a:ext uri="{0D108BD9-81ED-4DB2-BD59-A6C34878D82A}">
+                    <a16:rowId xmlns:a16="http://schemas.microsoft.com/office/drawing/2014/main" val="10000"/>
+                  </a:ext>
+                </a:extLst>
               </a:tr>
               <a:tr h="369824">
                 <a:tc>
                   <a:txBody>
-                    <a:bodyPr wrap="square"/>
+                    <a:bodyPr/>
                     <a:lstStyle/>
                     <a:p>
                       <a:pPr algn="l">
@@ -18576,7 +18571,7 @@
                       </a:r>
                     </a:p>
                   </a:txBody>
-                  <a:tcPr anchor="ctr" marL="76200" marR="76200" marT="38100" marB="38100">
+                  <a:tcPr marL="76200" marR="76200" marT="38100" marB="38100" anchor="ctr">
                     <a:lnL w="6350">
                       <a:solidFill>
                         <a:srgbClr val="F3F1ED"/>
@@ -18604,7 +18599,7 @@
                 </a:tc>
                 <a:tc>
                   <a:txBody>
-                    <a:bodyPr wrap="square"/>
+                    <a:bodyPr/>
                     <a:lstStyle/>
                     <a:p>
                       <a:pPr algn="ctr">
@@ -18623,7 +18618,7 @@
                       </a:r>
                     </a:p>
                   </a:txBody>
-                  <a:tcPr anchor="ctr" marL="76200" marR="76200" marT="38100" marB="38100">
+                  <a:tcPr marL="76200" marR="76200" marT="38100" marB="38100" anchor="ctr">
                     <a:lnL w="6350">
                       <a:solidFill>
                         <a:srgbClr val="F3F1ED"/>
@@ -18651,7 +18646,7 @@
                 </a:tc>
                 <a:tc>
                   <a:txBody>
-                    <a:bodyPr wrap="square"/>
+                    <a:bodyPr/>
                     <a:lstStyle/>
                     <a:p>
                       <a:pPr algn="ctr">
@@ -18670,7 +18665,7 @@
                       </a:r>
                     </a:p>
                   </a:txBody>
-                  <a:tcPr anchor="ctr" marL="76200" marR="76200" marT="38100" marB="38100">
+                  <a:tcPr marL="76200" marR="76200" marT="38100" marB="38100" anchor="ctr">
                     <a:lnL w="6350">
                       <a:solidFill>
                         <a:srgbClr val="F3F1ED"/>
@@ -18698,7 +18693,7 @@
                 </a:tc>
                 <a:tc>
                   <a:txBody>
-                    <a:bodyPr wrap="square"/>
+                    <a:bodyPr/>
                     <a:lstStyle/>
                     <a:p>
                       <a:pPr algn="l">
@@ -18717,7 +18712,7 @@
                       </a:r>
                     </a:p>
                   </a:txBody>
-                  <a:tcPr anchor="ctr" marL="76200" marR="76200" marT="38100" marB="38100">
+                  <a:tcPr marL="76200" marR="76200" marT="38100" marB="38100" anchor="ctr">
                     <a:lnL w="6350">
                       <a:solidFill>
                         <a:srgbClr val="F3F1ED"/>
@@ -18743,11 +18738,16 @@
                     </a:solidFill>
                   </a:tcPr>
                 </a:tc>
+                <a:extLst>
+                  <a:ext uri="{0D108BD9-81ED-4DB2-BD59-A6C34878D82A}">
+                    <a16:rowId xmlns:a16="http://schemas.microsoft.com/office/drawing/2014/main" val="10001"/>
+                  </a:ext>
+                </a:extLst>
               </a:tr>
               <a:tr h="369824">
                 <a:tc>
                   <a:txBody>
-                    <a:bodyPr wrap="square"/>
+                    <a:bodyPr/>
                     <a:lstStyle/>
                     <a:p>
                       <a:pPr algn="l">
@@ -18766,7 +18766,7 @@
                       </a:r>
                     </a:p>
                   </a:txBody>
-                  <a:tcPr anchor="ctr" marL="76200" marR="76200" marT="38100" marB="38100">
+                  <a:tcPr marL="76200" marR="76200" marT="38100" marB="38100" anchor="ctr">
                     <a:lnL w="6350">
                       <a:solidFill>
                         <a:srgbClr val="F3F1ED"/>
@@ -18794,7 +18794,7 @@
                 </a:tc>
                 <a:tc>
                   <a:txBody>
-                    <a:bodyPr wrap="square"/>
+                    <a:bodyPr/>
                     <a:lstStyle/>
                     <a:p>
                       <a:pPr algn="ctr">
@@ -18813,7 +18813,7 @@
                       </a:r>
                     </a:p>
                   </a:txBody>
-                  <a:tcPr anchor="ctr" marL="76200" marR="76200" marT="38100" marB="38100">
+                  <a:tcPr marL="76200" marR="76200" marT="38100" marB="38100" anchor="ctr">
                     <a:lnL w="6350">
                       <a:solidFill>
                         <a:srgbClr val="F3F1ED"/>
@@ -18841,7 +18841,7 @@
                 </a:tc>
                 <a:tc>
                   <a:txBody>
-                    <a:bodyPr wrap="square"/>
+                    <a:bodyPr/>
                     <a:lstStyle/>
                     <a:p>
                       <a:pPr algn="ctr">
@@ -18860,7 +18860,7 @@
                       </a:r>
                     </a:p>
                   </a:txBody>
-                  <a:tcPr anchor="ctr" marL="76200" marR="76200" marT="38100" marB="38100">
+                  <a:tcPr marL="76200" marR="76200" marT="38100" marB="38100" anchor="ctr">
                     <a:lnL w="6350">
                       <a:solidFill>
                         <a:srgbClr val="F3F1ED"/>
@@ -18888,7 +18888,7 @@
                 </a:tc>
                 <a:tc>
                   <a:txBody>
-                    <a:bodyPr wrap="square"/>
+                    <a:bodyPr/>
                     <a:lstStyle/>
                     <a:p>
                       <a:pPr algn="l">
@@ -18907,7 +18907,7 @@
                       </a:r>
                     </a:p>
                   </a:txBody>
-                  <a:tcPr anchor="ctr" marL="76200" marR="76200" marT="38100" marB="38100">
+                  <a:tcPr marL="76200" marR="76200" marT="38100" marB="38100" anchor="ctr">
                     <a:lnL w="6350">
                       <a:solidFill>
                         <a:srgbClr val="F3F1ED"/>
@@ -18933,11 +18933,16 @@
                     </a:solidFill>
                   </a:tcPr>
                 </a:tc>
+                <a:extLst>
+                  <a:ext uri="{0D108BD9-81ED-4DB2-BD59-A6C34878D82A}">
+                    <a16:rowId xmlns:a16="http://schemas.microsoft.com/office/drawing/2014/main" val="10002"/>
+                  </a:ext>
+                </a:extLst>
               </a:tr>
               <a:tr h="369824">
                 <a:tc>
                   <a:txBody>
-                    <a:bodyPr wrap="square"/>
+                    <a:bodyPr/>
                     <a:lstStyle/>
                     <a:p>
                       <a:pPr algn="l">
@@ -18956,7 +18961,7 @@
                       </a:r>
                     </a:p>
                   </a:txBody>
-                  <a:tcPr anchor="ctr" marL="76200" marR="76200" marT="38100" marB="38100">
+                  <a:tcPr marL="76200" marR="76200" marT="38100" marB="38100" anchor="ctr">
                     <a:lnL w="6350">
                       <a:solidFill>
                         <a:srgbClr val="F3F1ED"/>
@@ -18984,7 +18989,7 @@
                 </a:tc>
                 <a:tc>
                   <a:txBody>
-                    <a:bodyPr wrap="square"/>
+                    <a:bodyPr/>
                     <a:lstStyle/>
                     <a:p>
                       <a:pPr algn="ctr">
@@ -19003,7 +19008,7 @@
                       </a:r>
                     </a:p>
                   </a:txBody>
-                  <a:tcPr anchor="ctr" marL="76200" marR="76200" marT="38100" marB="38100">
+                  <a:tcPr marL="76200" marR="76200" marT="38100" marB="38100" anchor="ctr">
                     <a:lnL w="6350">
                       <a:solidFill>
                         <a:srgbClr val="F3F1ED"/>
@@ -19031,7 +19036,7 @@
                 </a:tc>
                 <a:tc>
                   <a:txBody>
-                    <a:bodyPr wrap="square"/>
+                    <a:bodyPr/>
                     <a:lstStyle/>
                     <a:p>
                       <a:pPr algn="ctr">
@@ -19050,7 +19055,7 @@
                       </a:r>
                     </a:p>
                   </a:txBody>
-                  <a:tcPr anchor="ctr" marL="76200" marR="76200" marT="38100" marB="38100">
+                  <a:tcPr marL="76200" marR="76200" marT="38100" marB="38100" anchor="ctr">
                     <a:lnL w="6350">
                       <a:solidFill>
                         <a:srgbClr val="F3F1ED"/>
@@ -19078,7 +19083,7 @@
                 </a:tc>
                 <a:tc>
                   <a:txBody>
-                    <a:bodyPr wrap="square"/>
+                    <a:bodyPr/>
                     <a:lstStyle/>
                     <a:p>
                       <a:pPr algn="l">
@@ -19097,7 +19102,7 @@
                       </a:r>
                     </a:p>
                   </a:txBody>
-                  <a:tcPr anchor="ctr" marL="76200" marR="76200" marT="38100" marB="38100">
+                  <a:tcPr marL="76200" marR="76200" marT="38100" marB="38100" anchor="ctr">
                     <a:lnL w="6350">
                       <a:solidFill>
                         <a:srgbClr val="F3F1ED"/>
@@ -19123,11 +19128,16 @@
                     </a:solidFill>
                   </a:tcPr>
                 </a:tc>
+                <a:extLst>
+                  <a:ext uri="{0D108BD9-81ED-4DB2-BD59-A6C34878D82A}">
+                    <a16:rowId xmlns:a16="http://schemas.microsoft.com/office/drawing/2014/main" val="10003"/>
+                  </a:ext>
+                </a:extLst>
               </a:tr>
               <a:tr h="369824">
                 <a:tc>
                   <a:txBody>
-                    <a:bodyPr wrap="square"/>
+                    <a:bodyPr/>
                     <a:lstStyle/>
                     <a:p>
                       <a:pPr algn="l">
@@ -19146,7 +19156,7 @@
                       </a:r>
                     </a:p>
                   </a:txBody>
-                  <a:tcPr anchor="ctr" marL="76200" marR="76200" marT="38100" marB="38100">
+                  <a:tcPr marL="76200" marR="76200" marT="38100" marB="38100" anchor="ctr">
                     <a:lnL w="6350">
                       <a:solidFill>
                         <a:srgbClr val="F3F1ED"/>
@@ -19174,7 +19184,7 @@
                 </a:tc>
                 <a:tc>
                   <a:txBody>
-                    <a:bodyPr wrap="square"/>
+                    <a:bodyPr/>
                     <a:lstStyle/>
                     <a:p>
                       <a:pPr algn="ctr">
@@ -19193,7 +19203,7 @@
                       </a:r>
                     </a:p>
                   </a:txBody>
-                  <a:tcPr anchor="ctr" marL="76200" marR="76200" marT="38100" marB="38100">
+                  <a:tcPr marL="76200" marR="76200" marT="38100" marB="38100" anchor="ctr">
                     <a:lnL w="6350">
                       <a:solidFill>
                         <a:srgbClr val="F3F1ED"/>
@@ -19221,7 +19231,7 @@
                 </a:tc>
                 <a:tc>
                   <a:txBody>
-                    <a:bodyPr wrap="square"/>
+                    <a:bodyPr/>
                     <a:lstStyle/>
                     <a:p>
                       <a:pPr algn="ctr">
@@ -19240,7 +19250,7 @@
                       </a:r>
                     </a:p>
                   </a:txBody>
-                  <a:tcPr anchor="ctr" marL="76200" marR="76200" marT="38100" marB="38100">
+                  <a:tcPr marL="76200" marR="76200" marT="38100" marB="38100" anchor="ctr">
                     <a:lnL w="6350">
                       <a:solidFill>
                         <a:srgbClr val="F3F1ED"/>
@@ -19268,7 +19278,7 @@
                 </a:tc>
                 <a:tc>
                   <a:txBody>
-                    <a:bodyPr wrap="square"/>
+                    <a:bodyPr/>
                     <a:lstStyle/>
                     <a:p>
                       <a:pPr algn="l">
@@ -19287,7 +19297,7 @@
                       </a:r>
                     </a:p>
                   </a:txBody>
-                  <a:tcPr anchor="ctr" marL="76200" marR="76200" marT="38100" marB="38100">
+                  <a:tcPr marL="76200" marR="76200" marT="38100" marB="38100" anchor="ctr">
                     <a:lnL w="6350">
                       <a:solidFill>
                         <a:srgbClr val="F3F1ED"/>
@@ -19313,11 +19323,16 @@
                     </a:solidFill>
                   </a:tcPr>
                 </a:tc>
+                <a:extLst>
+                  <a:ext uri="{0D108BD9-81ED-4DB2-BD59-A6C34878D82A}">
+                    <a16:rowId xmlns:a16="http://schemas.microsoft.com/office/drawing/2014/main" val="10004"/>
+                  </a:ext>
+                </a:extLst>
               </a:tr>
               <a:tr h="369824">
                 <a:tc>
                   <a:txBody>
-                    <a:bodyPr wrap="square"/>
+                    <a:bodyPr/>
                     <a:lstStyle/>
                     <a:p>
                       <a:pPr algn="l">
@@ -19336,7 +19351,7 @@
                       </a:r>
                     </a:p>
                   </a:txBody>
-                  <a:tcPr anchor="ctr" marL="76200" marR="76200" marT="38100" marB="38100">
+                  <a:tcPr marL="76200" marR="76200" marT="38100" marB="38100" anchor="ctr">
                     <a:lnL w="6350">
                       <a:solidFill>
                         <a:srgbClr val="F3F1ED"/>
@@ -19364,7 +19379,7 @@
                 </a:tc>
                 <a:tc>
                   <a:txBody>
-                    <a:bodyPr wrap="square"/>
+                    <a:bodyPr/>
                     <a:lstStyle/>
                     <a:p>
                       <a:pPr algn="ctr">
@@ -19383,7 +19398,7 @@
                       </a:r>
                     </a:p>
                   </a:txBody>
-                  <a:tcPr anchor="ctr" marL="76200" marR="76200" marT="38100" marB="38100">
+                  <a:tcPr marL="76200" marR="76200" marT="38100" marB="38100" anchor="ctr">
                     <a:lnL w="6350">
                       <a:solidFill>
                         <a:srgbClr val="F3F1ED"/>
@@ -19411,7 +19426,7 @@
                 </a:tc>
                 <a:tc>
                   <a:txBody>
-                    <a:bodyPr wrap="square"/>
+                    <a:bodyPr/>
                     <a:lstStyle/>
                     <a:p>
                       <a:pPr algn="ctr">
@@ -19430,7 +19445,7 @@
                       </a:r>
                     </a:p>
                   </a:txBody>
-                  <a:tcPr anchor="ctr" marL="76200" marR="76200" marT="38100" marB="38100">
+                  <a:tcPr marL="76200" marR="76200" marT="38100" marB="38100" anchor="ctr">
                     <a:lnL w="6350">
                       <a:solidFill>
                         <a:srgbClr val="F3F1ED"/>
@@ -19458,7 +19473,7 @@
                 </a:tc>
                 <a:tc>
                   <a:txBody>
-                    <a:bodyPr wrap="square"/>
+                    <a:bodyPr/>
                     <a:lstStyle/>
                     <a:p>
                       <a:pPr algn="l">
@@ -19477,7 +19492,7 @@
                       </a:r>
                     </a:p>
                   </a:txBody>
-                  <a:tcPr anchor="ctr" marL="76200" marR="76200" marT="38100" marB="38100">
+                  <a:tcPr marL="76200" marR="76200" marT="38100" marB="38100" anchor="ctr">
                     <a:lnL w="6350">
                       <a:solidFill>
                         <a:srgbClr val="F3F1ED"/>
@@ -19503,11 +19518,16 @@
                     </a:solidFill>
                   </a:tcPr>
                 </a:tc>
+                <a:extLst>
+                  <a:ext uri="{0D108BD9-81ED-4DB2-BD59-A6C34878D82A}">
+                    <a16:rowId xmlns:a16="http://schemas.microsoft.com/office/drawing/2014/main" val="10005"/>
+                  </a:ext>
+                </a:extLst>
               </a:tr>
               <a:tr h="369824">
                 <a:tc>
                   <a:txBody>
-                    <a:bodyPr wrap="square"/>
+                    <a:bodyPr/>
                     <a:lstStyle/>
                     <a:p>
                       <a:pPr algn="l">
@@ -19526,7 +19546,7 @@
                       </a:r>
                     </a:p>
                   </a:txBody>
-                  <a:tcPr anchor="ctr" marL="76200" marR="76200" marT="38100" marB="38100">
+                  <a:tcPr marL="76200" marR="76200" marT="38100" marB="38100" anchor="ctr">
                     <a:lnL w="6350">
                       <a:solidFill>
                         <a:srgbClr val="F3F1ED"/>
@@ -19554,7 +19574,7 @@
                 </a:tc>
                 <a:tc>
                   <a:txBody>
-                    <a:bodyPr wrap="square"/>
+                    <a:bodyPr/>
                     <a:lstStyle/>
                     <a:p>
                       <a:pPr algn="ctr">
@@ -19573,7 +19593,7 @@
                       </a:r>
                     </a:p>
                   </a:txBody>
-                  <a:tcPr anchor="ctr" marL="76200" marR="76200" marT="38100" marB="38100">
+                  <a:tcPr marL="76200" marR="76200" marT="38100" marB="38100" anchor="ctr">
                     <a:lnL w="6350">
                       <a:solidFill>
                         <a:srgbClr val="F3F1ED"/>
@@ -19601,7 +19621,7 @@
                 </a:tc>
                 <a:tc>
                   <a:txBody>
-                    <a:bodyPr wrap="square"/>
+                    <a:bodyPr/>
                     <a:lstStyle/>
                     <a:p>
                       <a:pPr algn="ctr">
@@ -19620,7 +19640,7 @@
                       </a:r>
                     </a:p>
                   </a:txBody>
-                  <a:tcPr anchor="ctr" marL="76200" marR="76200" marT="38100" marB="38100">
+                  <a:tcPr marL="76200" marR="76200" marT="38100" marB="38100" anchor="ctr">
                     <a:lnL w="6350">
                       <a:solidFill>
                         <a:srgbClr val="F3F1ED"/>
@@ -19648,7 +19668,7 @@
                 </a:tc>
                 <a:tc>
                   <a:txBody>
-                    <a:bodyPr wrap="square"/>
+                    <a:bodyPr/>
                     <a:lstStyle/>
                     <a:p>
                       <a:pPr algn="l">
@@ -19667,7 +19687,7 @@
                       </a:r>
                     </a:p>
                   </a:txBody>
-                  <a:tcPr anchor="ctr" marL="76200" marR="76200" marT="38100" marB="38100">
+                  <a:tcPr marL="76200" marR="76200" marT="38100" marB="38100" anchor="ctr">
                     <a:lnL w="6350">
                       <a:solidFill>
                         <a:srgbClr val="F3F1ED"/>
@@ -19693,11 +19713,16 @@
                     </a:solidFill>
                   </a:tcPr>
                 </a:tc>
+                <a:extLst>
+                  <a:ext uri="{0D108BD9-81ED-4DB2-BD59-A6C34878D82A}">
+                    <a16:rowId xmlns:a16="http://schemas.microsoft.com/office/drawing/2014/main" val="10006"/>
+                  </a:ext>
+                </a:extLst>
               </a:tr>
               <a:tr h="369824">
                 <a:tc>
                   <a:txBody>
-                    <a:bodyPr wrap="square"/>
+                    <a:bodyPr/>
                     <a:lstStyle/>
                     <a:p>
                       <a:pPr algn="l">
@@ -19716,7 +19741,7 @@
                       </a:r>
                     </a:p>
                   </a:txBody>
-                  <a:tcPr anchor="ctr" marL="76200" marR="76200" marT="38100" marB="38100">
+                  <a:tcPr marL="76200" marR="76200" marT="38100" marB="38100" anchor="ctr">
                     <a:lnL w="6350">
                       <a:solidFill>
                         <a:srgbClr val="F3F1ED"/>
@@ -19744,7 +19769,7 @@
                 </a:tc>
                 <a:tc>
                   <a:txBody>
-                    <a:bodyPr wrap="square"/>
+                    <a:bodyPr/>
                     <a:lstStyle/>
                     <a:p>
                       <a:pPr algn="ctr">
@@ -19763,7 +19788,7 @@
                       </a:r>
                     </a:p>
                   </a:txBody>
-                  <a:tcPr anchor="ctr" marL="76200" marR="76200" marT="38100" marB="38100">
+                  <a:tcPr marL="76200" marR="76200" marT="38100" marB="38100" anchor="ctr">
                     <a:lnL w="6350">
                       <a:solidFill>
                         <a:srgbClr val="F3F1ED"/>
@@ -19791,7 +19816,7 @@
                 </a:tc>
                 <a:tc>
                   <a:txBody>
-                    <a:bodyPr wrap="square"/>
+                    <a:bodyPr/>
                     <a:lstStyle/>
                     <a:p>
                       <a:pPr algn="ctr">
@@ -19810,7 +19835,7 @@
                       </a:r>
                     </a:p>
                   </a:txBody>
-                  <a:tcPr anchor="ctr" marL="76200" marR="76200" marT="38100" marB="38100">
+                  <a:tcPr marL="76200" marR="76200" marT="38100" marB="38100" anchor="ctr">
                     <a:lnL w="6350">
                       <a:solidFill>
                         <a:srgbClr val="F3F1ED"/>
@@ -19838,7 +19863,7 @@
                 </a:tc>
                 <a:tc>
                   <a:txBody>
-                    <a:bodyPr wrap="square"/>
+                    <a:bodyPr/>
                     <a:lstStyle/>
                     <a:p>
                       <a:pPr algn="l">
@@ -19857,7 +19882,7 @@
                       </a:r>
                     </a:p>
                   </a:txBody>
-                  <a:tcPr anchor="ctr" marL="76200" marR="76200" marT="38100" marB="38100">
+                  <a:tcPr marL="76200" marR="76200" marT="38100" marB="38100" anchor="ctr">
                     <a:lnL w="6350">
                       <a:solidFill>
                         <a:srgbClr val="F3F1ED"/>
@@ -19883,11 +19908,16 @@
                     </a:solidFill>
                   </a:tcPr>
                 </a:tc>
+                <a:extLst>
+                  <a:ext uri="{0D108BD9-81ED-4DB2-BD59-A6C34878D82A}">
+                    <a16:rowId xmlns:a16="http://schemas.microsoft.com/office/drawing/2014/main" val="10007"/>
+                  </a:ext>
+                </a:extLst>
               </a:tr>
               <a:tr h="369824">
                 <a:tc>
                   <a:txBody>
-                    <a:bodyPr wrap="square"/>
+                    <a:bodyPr/>
                     <a:lstStyle/>
                     <a:p>
                       <a:pPr algn="l">
@@ -19906,7 +19936,7 @@
                       </a:r>
                     </a:p>
                   </a:txBody>
-                  <a:tcPr anchor="ctr" marL="76200" marR="76200" marT="38100" marB="38100">
+                  <a:tcPr marL="76200" marR="76200" marT="38100" marB="38100" anchor="ctr">
                     <a:lnL w="6350">
                       <a:solidFill>
                         <a:srgbClr val="F3F1ED"/>
@@ -19934,7 +19964,7 @@
                 </a:tc>
                 <a:tc>
                   <a:txBody>
-                    <a:bodyPr wrap="square"/>
+                    <a:bodyPr/>
                     <a:lstStyle/>
                     <a:p>
                       <a:pPr algn="ctr">
@@ -19953,7 +19983,7 @@
                       </a:r>
                     </a:p>
                   </a:txBody>
-                  <a:tcPr anchor="ctr" marL="76200" marR="76200" marT="38100" marB="38100">
+                  <a:tcPr marL="76200" marR="76200" marT="38100" marB="38100" anchor="ctr">
                     <a:lnL w="6350">
                       <a:solidFill>
                         <a:srgbClr val="F3F1ED"/>
@@ -19981,7 +20011,7 @@
                 </a:tc>
                 <a:tc>
                   <a:txBody>
-                    <a:bodyPr wrap="square"/>
+                    <a:bodyPr/>
                     <a:lstStyle/>
                     <a:p>
                       <a:pPr algn="ctr">
@@ -20000,7 +20030,7 @@
                       </a:r>
                     </a:p>
                   </a:txBody>
-                  <a:tcPr anchor="ctr" marL="76200" marR="76200" marT="38100" marB="38100">
+                  <a:tcPr marL="76200" marR="76200" marT="38100" marB="38100" anchor="ctr">
                     <a:lnL w="6350">
                       <a:solidFill>
                         <a:srgbClr val="F3F1ED"/>
@@ -20028,7 +20058,7 @@
                 </a:tc>
                 <a:tc>
                   <a:txBody>
-                    <a:bodyPr wrap="square"/>
+                    <a:bodyPr/>
                     <a:lstStyle/>
                     <a:p>
                       <a:pPr algn="l">
@@ -20047,7 +20077,7 @@
                       </a:r>
                     </a:p>
                   </a:txBody>
-                  <a:tcPr anchor="ctr" marL="76200" marR="76200" marT="38100" marB="38100">
+                  <a:tcPr marL="76200" marR="76200" marT="38100" marB="38100" anchor="ctr">
                     <a:lnL w="6350">
                       <a:solidFill>
                         <a:srgbClr val="F3F1ED"/>
@@ -20073,6 +20103,11 @@
                     </a:solidFill>
                   </a:tcPr>
                 </a:tc>
+                <a:extLst>
+                  <a:ext uri="{0D108BD9-81ED-4DB2-BD59-A6C34878D82A}">
+                    <a16:rowId xmlns:a16="http://schemas.microsoft.com/office/drawing/2014/main" val="10008"/>
+                  </a:ext>
+                </a:extLst>
               </a:tr>
             </a:tbl>
           </a:graphicData>
@@ -20115,7 +20150,7 @@
           </a:fontRef>
         </p:style>
         <p:txBody>
-          <a:bodyPr rtlCol="0" anchor="ctr" wrap="square"/>
+          <a:bodyPr wrap="square" rtlCol="0" anchor="ctr"/>
           <a:lstStyle/>
           <a:p>
             <a:pPr algn="ctr">
@@ -20171,7 +20206,7 @@
           </a:ln>
         </p:spPr>
         <p:txBody>
-          <a:bodyPr wrap="square" anchor="ctr" lIns="101600" tIns="76200" rIns="101600" bIns="76200">
+          <a:bodyPr wrap="square" lIns="101600" tIns="76200" rIns="101600" bIns="76200" anchor="ctr">
             <a:spAutoFit/>
           </a:bodyPr>
           <a:lstStyle/>
@@ -20213,7 +20248,7 @@
           </a:ln>
         </p:spPr>
         <p:txBody>
-          <a:bodyPr wrap="square" anchor="ctr" lIns="101600" tIns="76200" rIns="101600" bIns="76200">
+          <a:bodyPr wrap="square" lIns="101600" tIns="76200" rIns="101600" bIns="76200" anchor="ctr">
             <a:spAutoFit/>
           </a:bodyPr>
           <a:lstStyle/>
@@ -20257,11 +20292,13 @@
           </a:ln>
         </p:spPr>
         <p:txBody>
-          <a:bodyPr wrap="square" anchor="ctr" lIns="101600" tIns="76200" rIns="101600" bIns="76200">
-            <a:spAutoFit/>
-          </a:bodyPr>
-          <a:lstStyle/>
-          <a:p/>
+          <a:bodyPr wrap="square" lIns="101600" tIns="76200" rIns="101600" bIns="76200" anchor="ctr">
+            <a:spAutoFit/>
+          </a:bodyPr>
+          <a:lstStyle/>
+          <a:p>
+            <a:endParaRPr/>
+          </a:p>
         </p:txBody>
       </p:sp>
       <p:sp>
@@ -20284,7 +20321,7 @@
           </a:ln>
         </p:spPr>
         <p:txBody>
-          <a:bodyPr wrap="square" anchor="ctr" lIns="101600" tIns="76200" rIns="101600" bIns="76200">
+          <a:bodyPr wrap="square" lIns="101600" tIns="76200" rIns="101600" bIns="76200" anchor="ctr">
             <a:spAutoFit/>
           </a:bodyPr>
           <a:lstStyle/>
@@ -20328,11 +20365,13 @@
           </a:ln>
         </p:spPr>
         <p:txBody>
-          <a:bodyPr wrap="square" anchor="ctr" lIns="101600" tIns="76200" rIns="101600" bIns="76200">
-            <a:spAutoFit/>
-          </a:bodyPr>
-          <a:lstStyle/>
-          <a:p/>
+          <a:bodyPr wrap="square" lIns="101600" tIns="76200" rIns="101600" bIns="76200" anchor="ctr">
+            <a:spAutoFit/>
+          </a:bodyPr>
+          <a:lstStyle/>
+          <a:p>
+            <a:endParaRPr/>
+          </a:p>
         </p:txBody>
       </p:sp>
       <p:sp>
@@ -20355,7 +20394,7 @@
           </a:ln>
         </p:spPr>
         <p:txBody>
-          <a:bodyPr wrap="square" anchor="ctr" lIns="101600" tIns="76200" rIns="101600" bIns="76200">
+          <a:bodyPr wrap="square" lIns="101600" tIns="76200" rIns="101600" bIns="76200" anchor="ctr">
             <a:spAutoFit/>
           </a:bodyPr>
           <a:lstStyle/>
@@ -20399,11 +20438,13 @@
           </a:ln>
         </p:spPr>
         <p:txBody>
-          <a:bodyPr wrap="square" anchor="ctr" lIns="101600" tIns="76200" rIns="101600" bIns="76200">
-            <a:spAutoFit/>
-          </a:bodyPr>
-          <a:lstStyle/>
-          <a:p/>
+          <a:bodyPr wrap="square" lIns="101600" tIns="76200" rIns="101600" bIns="76200" anchor="ctr">
+            <a:spAutoFit/>
+          </a:bodyPr>
+          <a:lstStyle/>
+          <a:p>
+            <a:endParaRPr/>
+          </a:p>
         </p:txBody>
       </p:sp>
       <p:sp>
@@ -20426,7 +20467,7 @@
           </a:ln>
         </p:spPr>
         <p:txBody>
-          <a:bodyPr wrap="square" anchor="ctr" lIns="101600" tIns="76200" rIns="101600" bIns="76200">
+          <a:bodyPr wrap="square" lIns="101600" tIns="76200" rIns="101600" bIns="76200" anchor="ctr">
             <a:spAutoFit/>
           </a:bodyPr>
           <a:lstStyle/>
@@ -20470,11 +20511,13 @@
           </a:ln>
         </p:spPr>
         <p:txBody>
-          <a:bodyPr wrap="square" anchor="ctr" lIns="101600" tIns="76200" rIns="101600" bIns="76200">
-            <a:spAutoFit/>
-          </a:bodyPr>
-          <a:lstStyle/>
-          <a:p/>
+          <a:bodyPr wrap="square" lIns="101600" tIns="76200" rIns="101600" bIns="76200" anchor="ctr">
+            <a:spAutoFit/>
+          </a:bodyPr>
+          <a:lstStyle/>
+          <a:p>
+            <a:endParaRPr/>
+          </a:p>
         </p:txBody>
       </p:sp>
       <p:sp>
@@ -20497,7 +20540,7 @@
           </a:ln>
         </p:spPr>
         <p:txBody>
-          <a:bodyPr wrap="square" anchor="ctr" lIns="101600" tIns="76200" rIns="101600" bIns="76200">
+          <a:bodyPr wrap="square" lIns="101600" tIns="76200" rIns="101600" bIns="76200" anchor="ctr">
             <a:spAutoFit/>
           </a:bodyPr>
           <a:lstStyle/>
@@ -20541,11 +20584,13 @@
           </a:ln>
         </p:spPr>
         <p:txBody>
-          <a:bodyPr wrap="square" anchor="ctr" lIns="101600" tIns="76200" rIns="101600" bIns="76200">
-            <a:spAutoFit/>
-          </a:bodyPr>
-          <a:lstStyle/>
-          <a:p/>
+          <a:bodyPr wrap="square" lIns="101600" tIns="76200" rIns="101600" bIns="76200" anchor="ctr">
+            <a:spAutoFit/>
+          </a:bodyPr>
+          <a:lstStyle/>
+          <a:p>
+            <a:endParaRPr/>
+          </a:p>
         </p:txBody>
       </p:sp>
       <p:sp>
@@ -20568,7 +20613,7 @@
           </a:ln>
         </p:spPr>
         <p:txBody>
-          <a:bodyPr wrap="square" anchor="ctr" lIns="101600" tIns="76200" rIns="101600" bIns="76200">
+          <a:bodyPr wrap="square" lIns="101600" tIns="76200" rIns="101600" bIns="76200" anchor="ctr">
             <a:spAutoFit/>
           </a:bodyPr>
           <a:lstStyle/>
@@ -20612,11 +20657,13 @@
           </a:ln>
         </p:spPr>
         <p:txBody>
-          <a:bodyPr wrap="square" anchor="ctr" lIns="101600" tIns="76200" rIns="101600" bIns="76200">
-            <a:spAutoFit/>
-          </a:bodyPr>
-          <a:lstStyle/>
-          <a:p/>
+          <a:bodyPr wrap="square" lIns="101600" tIns="76200" rIns="101600" bIns="76200" anchor="ctr">
+            <a:spAutoFit/>
+          </a:bodyPr>
+          <a:lstStyle/>
+          <a:p>
+            <a:endParaRPr/>
+          </a:p>
         </p:txBody>
       </p:sp>
       <p:sp>
@@ -20639,7 +20686,7 @@
           </a:ln>
         </p:spPr>
         <p:txBody>
-          <a:bodyPr wrap="square" anchor="ctr" lIns="101600" tIns="76200" rIns="101600" bIns="76200">
+          <a:bodyPr wrap="square" lIns="101600" tIns="76200" rIns="101600" bIns="76200" anchor="ctr">
             <a:spAutoFit/>
           </a:bodyPr>
           <a:lstStyle/>
@@ -20683,11 +20730,13 @@
           </a:ln>
         </p:spPr>
         <p:txBody>
-          <a:bodyPr wrap="square" anchor="ctr" lIns="101600" tIns="76200" rIns="101600" bIns="76200">
-            <a:spAutoFit/>
-          </a:bodyPr>
-          <a:lstStyle/>
-          <a:p/>
+          <a:bodyPr wrap="square" lIns="101600" tIns="76200" rIns="101600" bIns="76200" anchor="ctr">
+            <a:spAutoFit/>
+          </a:bodyPr>
+          <a:lstStyle/>
+          <a:p>
+            <a:endParaRPr/>
+          </a:p>
         </p:txBody>
       </p:sp>
       <p:pic>
@@ -20812,7 +20861,7 @@
       </p:pic>
       <p:grpSp>
         <p:nvGrpSpPr>
-          <p:cNvPr id="2" name="Group 9">
+          <p:cNvPr id="896" name="Group 9">
             <a:extLst>
               <a:ext uri="{FF2B5EF4-FFF2-40B4-BE49-F238E27FC236}">
                 <a16:creationId xmlns:a16="http://schemas.microsoft.com/office/drawing/2014/main" id="{B328BFB5-4AB4-ABFA-873D-21CE0B3F1C33}"/>
@@ -20832,7 +20881,7 @@
         </p:grpSpPr>
         <p:sp>
           <p:nvSpPr>
-            <p:cNvPr id="3" name="Freeform 10">
+            <p:cNvPr id="897" name="Freeform 10">
               <a:extLst>
                 <a:ext uri="{FF2B5EF4-FFF2-40B4-BE49-F238E27FC236}">
                   <a16:creationId xmlns:a16="http://schemas.microsoft.com/office/drawing/2014/main" id="{B6B58738-3FBB-D56F-6F7E-05C9D7BA3D9B}"/>
@@ -20937,7 +20986,7 @@
           </a:ln>
         </p:spPr>
         <p:txBody>
-          <a:bodyPr wrap="square" anchor="ctr" lIns="101600" tIns="76200" rIns="101600" bIns="76200">
+          <a:bodyPr wrap="square" lIns="101600" tIns="76200" rIns="101600" bIns="76200" anchor="ctr">
             <a:spAutoFit/>
           </a:bodyPr>
           <a:lstStyle/>
@@ -20979,7 +21028,7 @@
           </a:ln>
         </p:spPr>
         <p:txBody>
-          <a:bodyPr wrap="square" anchor="ctr" lIns="101600" tIns="76200" rIns="101600" bIns="76200">
+          <a:bodyPr wrap="square" lIns="101600" tIns="76200" rIns="101600" bIns="76200" anchor="ctr">
             <a:spAutoFit/>
           </a:bodyPr>
           <a:lstStyle/>
@@ -21023,7 +21072,7 @@
           </a:ln>
         </p:spPr>
         <p:txBody>
-          <a:bodyPr wrap="square" anchor="ctr" lIns="101600" tIns="76200" rIns="101600" bIns="76200">
+          <a:bodyPr wrap="square" lIns="101600" tIns="76200" rIns="101600" bIns="76200" anchor="ctr">
             <a:spAutoFit/>
           </a:bodyPr>
           <a:lstStyle/>
@@ -21065,7 +21114,7 @@
           </a:ln>
         </p:spPr>
         <p:txBody>
-          <a:bodyPr wrap="square" anchor="ctr" lIns="50800" tIns="50800" rIns="127000" bIns="50800">
+          <a:bodyPr wrap="square" lIns="50800" tIns="50800" rIns="127000" bIns="50800" anchor="ctr">
             <a:spAutoFit/>
           </a:bodyPr>
           <a:lstStyle/>
@@ -21111,11 +21160,13 @@
           </a:ln>
         </p:spPr>
         <p:txBody>
-          <a:bodyPr wrap="square" anchor="ctr" lIns="101600" tIns="76200" rIns="101600" bIns="76200">
-            <a:spAutoFit/>
-          </a:bodyPr>
-          <a:lstStyle/>
-          <a:p/>
+          <a:bodyPr wrap="square" lIns="101600" tIns="76200" rIns="101600" bIns="76200" anchor="ctr">
+            <a:spAutoFit/>
+          </a:bodyPr>
+          <a:lstStyle/>
+          <a:p>
+            <a:endParaRPr/>
+          </a:p>
         </p:txBody>
       </p:sp>
       <p:sp>
@@ -21140,7 +21191,7 @@
           </a:ln>
         </p:spPr>
         <p:txBody>
-          <a:bodyPr wrap="square" anchor="ctr" lIns="101600" tIns="76200" rIns="101600" bIns="76200">
+          <a:bodyPr wrap="square" lIns="101600" tIns="76200" rIns="101600" bIns="76200" anchor="ctr">
             <a:spAutoFit/>
           </a:bodyPr>
           <a:lstStyle/>
@@ -21187,7 +21238,7 @@
           <p:nvPr/>
         </p:nvPicPr>
         <p:blipFill>
-          <a:blip r:embed="rId9"/>
+          <a:blip r:embed="rId2"/>
           <a:stretch>
             <a:fillRect/>
           </a:stretch>
@@ -21222,7 +21273,7 @@
           </a:ln>
         </p:spPr>
         <p:txBody>
-          <a:bodyPr wrap="square" anchor="t" lIns="101600" tIns="76200" rIns="101600" bIns="76200">
+          <a:bodyPr wrap="square" lIns="101600" tIns="76200" rIns="101600" bIns="76200" anchor="t">
             <a:spAutoFit/>
           </a:bodyPr>
           <a:lstStyle/>
@@ -21268,11 +21319,13 @@
           </a:ln>
         </p:spPr>
         <p:txBody>
-          <a:bodyPr wrap="square" anchor="ctr" lIns="101600" tIns="76200" rIns="101600" bIns="76200">
-            <a:spAutoFit/>
-          </a:bodyPr>
-          <a:lstStyle/>
-          <a:p/>
+          <a:bodyPr wrap="square" lIns="101600" tIns="76200" rIns="101600" bIns="76200" anchor="ctr">
+            <a:spAutoFit/>
+          </a:bodyPr>
+          <a:lstStyle/>
+          <a:p>
+            <a:endParaRPr/>
+          </a:p>
         </p:txBody>
       </p:sp>
       <p:sp>
@@ -21295,7 +21348,7 @@
           </a:ln>
         </p:spPr>
         <p:txBody>
-          <a:bodyPr wrap="square" anchor="ctr" lIns="101600" tIns="76200" rIns="101600" bIns="76200">
+          <a:bodyPr wrap="square" lIns="101600" tIns="76200" rIns="101600" bIns="76200" anchor="ctr">
             <a:spAutoFit/>
           </a:bodyPr>
           <a:lstStyle/>
@@ -21337,12 +21390,12 @@
           </a:ln>
         </p:spPr>
         <p:txBody>
-          <a:bodyPr wrap="square" anchor="t" lIns="101600" tIns="76200" rIns="101600" bIns="76200">
-            <a:spAutoFit/>
-          </a:bodyPr>
-          <a:lstStyle/>
-          <a:p>
-            <a:pPr algn="l" marL="190500" indent="-190500">
+          <a:bodyPr wrap="square" lIns="101600" tIns="76200" rIns="101600" bIns="76200" anchor="t">
+            <a:spAutoFit/>
+          </a:bodyPr>
+          <a:lstStyle/>
+          <a:p>
+            <a:pPr marL="190500" indent="-190500" algn="l">
               <a:lnSpc>
                 <a:spcPct val="98000"/>
               </a:lnSpc>
@@ -21371,20 +21424,11 @@
                 </a:solidFill>
                 <a:latin typeface="Segoe UI"/>
               </a:rPr>
-              <a:t> — </a:t>
-            </a:r>
-            <a:r>
-              <a:rPr sz="1600" b="0" i="0">
-                <a:solidFill>
-                  <a:srgbClr val="3A4149"/>
-                </a:solidFill>
-                <a:latin typeface="Segoe UI"/>
-              </a:rPr>
-              <a:t>Apache-2.0, and every input layer is CC0-1.0 or CC-BY-4.0 — nothing blocks a deployment.</a:t>
-            </a:r>
-          </a:p>
-          <a:p>
-            <a:pPr algn="l" marL="190500" indent="-190500">
+              <a:t> — Apache-2.0, and every input layer is CC0-1.0 or CC-BY-4.0 — nothing blocks a deployment.</a:t>
+            </a:r>
+          </a:p>
+          <a:p>
+            <a:pPr marL="190500" indent="-190500" algn="l">
               <a:lnSpc>
                 <a:spcPct val="98000"/>
               </a:lnSpc>
@@ -21413,20 +21457,11 @@
                 </a:solidFill>
                 <a:latin typeface="Segoe UI"/>
               </a:rPr>
-              <a:t> — </a:t>
-            </a:r>
-            <a:r>
-              <a:rPr sz="1600" b="0" i="0">
-                <a:solidFill>
-                  <a:srgbClr val="3A4149"/>
-                </a:solidFill>
-                <a:latin typeface="Segoe UI"/>
-              </a:rPr>
-              <a:t>Python 3.11 + PostGIS via docker-compose; runs offline in a district office on 2 vCPU.</a:t>
-            </a:r>
-          </a:p>
-          <a:p>
-            <a:pPr algn="l" marL="190500" indent="-190500">
+              <a:t> — Python 3.11 + PostGIS via docker-compose; runs offline in a district office on 2 vCPU.</a:t>
+            </a:r>
+          </a:p>
+          <a:p>
+            <a:pPr marL="190500" indent="-190500" algn="l">
               <a:lnSpc>
                 <a:spcPct val="98000"/>
               </a:lnSpc>
@@ -21455,20 +21490,11 @@
                 </a:solidFill>
                 <a:latin typeface="Segoe UI"/>
               </a:rPr>
-              <a:t> — </a:t>
-            </a:r>
-            <a:r>
-              <a:rPr sz="1600" b="0" i="0">
-                <a:solidFill>
-                  <a:srgbClr val="3A4149"/>
-                </a:solidFill>
-                <a:latin typeface="Segoe UI"/>
-              </a:rPr>
-              <a:t>OGC API - Features, so a department works against it in QGIS with no GEOVAX-specific code.</a:t>
-            </a:r>
-          </a:p>
-          <a:p>
-            <a:pPr algn="l" marL="190500" indent="-190500">
+              <a:t> — OGC API - Features, so a department works against it in QGIS with no GEOVAX-specific code.</a:t>
+            </a:r>
+          </a:p>
+          <a:p>
+            <a:pPr marL="190500" indent="-190500" algn="l">
               <a:lnSpc>
                 <a:spcPct val="98000"/>
               </a:lnSpc>
@@ -21497,20 +21523,11 @@
                 </a:solidFill>
                 <a:latin typeface="Segoe UI"/>
               </a:rPr>
-              <a:t> — </a:t>
-            </a:r>
-            <a:r>
-              <a:rPr sz="1600" b="0" i="0">
-                <a:solidFill>
-                  <a:srgbClr val="3A4149"/>
-                </a:solidFill>
-                <a:latin typeface="Segoe UI"/>
-              </a:rPr>
-              <a:t>A measured path from a single-ULB pilot (&lt; 500 k parcels) to Tamil Nadu statewide (6 M+).</a:t>
-            </a:r>
-          </a:p>
-          <a:p>
-            <a:pPr algn="l" marL="190500" indent="-190500">
+              <a:t> — A measured path from a single-ULB pilot (&lt; 500 k parcels) to Tamil Nadu statewide (6 M+).</a:t>
+            </a:r>
+          </a:p>
+          <a:p>
+            <a:pPr marL="190500" indent="-190500" algn="l">
               <a:lnSpc>
                 <a:spcPct val="98000"/>
               </a:lnSpc>
@@ -21539,20 +21556,11 @@
                 </a:solidFill>
                 <a:latin typeface="Segoe UI"/>
               </a:rPr>
-              <a:t> — </a:t>
-            </a:r>
-            <a:r>
-              <a:rPr sz="1600" b="0" i="0">
-                <a:solidFill>
-                  <a:srgbClr val="3A4149"/>
-                </a:solidFill>
-                <a:latin typeface="Segoe UI"/>
-              </a:rPr>
-              <a:t>81 passing tests, per-stage checkpoints, an AOI manifest with SHA-256 for every input.</a:t>
-            </a:r>
-          </a:p>
-          <a:p>
-            <a:pPr algn="l" marL="190500" indent="-190500">
+              <a:t> — 81 passing tests, per-stage checkpoints, an AOI manifest with SHA-256 for every input.</a:t>
+            </a:r>
+          </a:p>
+          <a:p>
+            <a:pPr marL="190500" indent="-190500" algn="l">
               <a:lnSpc>
                 <a:spcPct val="98000"/>
               </a:lnSpc>
@@ -21581,16 +21589,7 @@
                 </a:solidFill>
                 <a:latin typeface="Segoe UI"/>
               </a:rPr>
-              <a:t> — </a:t>
-            </a:r>
-            <a:r>
-              <a:rPr sz="1600" b="0" i="0">
-                <a:solidFill>
-                  <a:srgbClr val="3A4149"/>
-                </a:solidFill>
-                <a:latin typeface="Segoe UI"/>
-              </a:rPr>
-              <a:t>The LGD hierarchy is the join key throughout, so multi-ULB isolation is configuration, not a rewrite.</a:t>
+              <a:t> — The LGD hierarchy is the join key throughout, so multi-ULB isolation is configuration, not a rewrite.</a:t>
             </a:r>
           </a:p>
         </p:txBody>
@@ -21619,11 +21618,13 @@
           </a:ln>
         </p:spPr>
         <p:txBody>
-          <a:bodyPr wrap="square" anchor="ctr" lIns="101600" tIns="76200" rIns="101600" bIns="76200">
-            <a:spAutoFit/>
-          </a:bodyPr>
-          <a:lstStyle/>
-          <a:p/>
+          <a:bodyPr wrap="square" lIns="101600" tIns="76200" rIns="101600" bIns="76200" anchor="ctr">
+            <a:spAutoFit/>
+          </a:bodyPr>
+          <a:lstStyle/>
+          <a:p>
+            <a:endParaRPr/>
+          </a:p>
         </p:txBody>
       </p:sp>
       <p:sp>
@@ -21646,7 +21647,7 @@
           </a:ln>
         </p:spPr>
         <p:txBody>
-          <a:bodyPr wrap="square" anchor="ctr" lIns="101600" tIns="76200" rIns="101600" bIns="76200">
+          <a:bodyPr wrap="square" lIns="101600" tIns="76200" rIns="101600" bIns="76200" anchor="ctr">
             <a:spAutoFit/>
           </a:bodyPr>
           <a:lstStyle/>
@@ -21688,12 +21689,12 @@
           </a:ln>
         </p:spPr>
         <p:txBody>
-          <a:bodyPr wrap="square" anchor="t" lIns="101600" tIns="76200" rIns="101600" bIns="76200">
-            <a:spAutoFit/>
-          </a:bodyPr>
-          <a:lstStyle/>
-          <a:p>
-            <a:pPr algn="l" marL="171450" indent="-171450">
+          <a:bodyPr wrap="square" lIns="101600" tIns="76200" rIns="101600" bIns="76200" anchor="t">
+            <a:spAutoFit/>
+          </a:bodyPr>
+          <a:lstStyle/>
+          <a:p>
+            <a:pPr marL="171450" indent="-171450" algn="l">
               <a:lnSpc>
                 <a:spcPct val="98000"/>
               </a:lnSpc>
@@ -21717,7 +21718,7 @@
             </a:r>
           </a:p>
           <a:p>
-            <a:pPr algn="l" marL="171450" indent="-171450">
+            <a:pPr marL="171450" indent="-171450" algn="l">
               <a:lnSpc>
                 <a:spcPct val="98000"/>
               </a:lnSpc>
@@ -21741,7 +21742,7 @@
             </a:r>
           </a:p>
           <a:p>
-            <a:pPr algn="l" marL="171450" indent="-171450">
+            <a:pPr marL="171450" indent="-171450" algn="l">
               <a:lnSpc>
                 <a:spcPct val="98000"/>
               </a:lnSpc>
@@ -21765,7 +21766,7 @@
             </a:r>
           </a:p>
           <a:p>
-            <a:pPr algn="l" marL="171450" indent="-171450">
+            <a:pPr marL="171450" indent="-171450" algn="l">
               <a:lnSpc>
                 <a:spcPct val="98000"/>
               </a:lnSpc>
@@ -21814,11 +21815,13 @@
           </a:ln>
         </p:spPr>
         <p:txBody>
-          <a:bodyPr wrap="square" anchor="ctr" lIns="101600" tIns="76200" rIns="101600" bIns="76200">
-            <a:spAutoFit/>
-          </a:bodyPr>
-          <a:lstStyle/>
-          <a:p/>
+          <a:bodyPr wrap="square" lIns="101600" tIns="76200" rIns="101600" bIns="76200" anchor="ctr">
+            <a:spAutoFit/>
+          </a:bodyPr>
+          <a:lstStyle/>
+          <a:p>
+            <a:endParaRPr/>
+          </a:p>
         </p:txBody>
       </p:sp>
       <p:sp>
@@ -21841,7 +21844,7 @@
           </a:ln>
         </p:spPr>
         <p:txBody>
-          <a:bodyPr wrap="square" anchor="ctr" lIns="101600" tIns="76200" rIns="101600" bIns="76200">
+          <a:bodyPr wrap="square" lIns="101600" tIns="76200" rIns="101600" bIns="76200" anchor="ctr">
             <a:spAutoFit/>
           </a:bodyPr>
           <a:lstStyle/>
@@ -21883,12 +21886,12 @@
           </a:ln>
         </p:spPr>
         <p:txBody>
-          <a:bodyPr wrap="square" anchor="t" lIns="101600" tIns="76200" rIns="101600" bIns="76200">
-            <a:spAutoFit/>
-          </a:bodyPr>
-          <a:lstStyle/>
-          <a:p>
-            <a:pPr algn="l" marL="171450" indent="-171450">
+          <a:bodyPr wrap="square" lIns="101600" tIns="76200" rIns="101600" bIns="76200" anchor="t">
+            <a:spAutoFit/>
+          </a:bodyPr>
+          <a:lstStyle/>
+          <a:p>
+            <a:pPr marL="171450" indent="-171450" algn="l">
               <a:lnSpc>
                 <a:spcPct val="98000"/>
               </a:lnSpc>
@@ -21912,7 +21915,7 @@
             </a:r>
           </a:p>
           <a:p>
-            <a:pPr algn="l" marL="171450" indent="-171450">
+            <a:pPr marL="171450" indent="-171450" algn="l">
               <a:lnSpc>
                 <a:spcPct val="98000"/>
               </a:lnSpc>
@@ -21936,7 +21939,7 @@
             </a:r>
           </a:p>
           <a:p>
-            <a:pPr algn="l" marL="171450" indent="-171450">
+            <a:pPr marL="171450" indent="-171450" algn="l">
               <a:lnSpc>
                 <a:spcPct val="98000"/>
               </a:lnSpc>
@@ -21983,11 +21986,13 @@
           </a:ln>
         </p:spPr>
         <p:txBody>
-          <a:bodyPr wrap="square" anchor="ctr" lIns="101600" tIns="76200" rIns="101600" bIns="76200">
-            <a:spAutoFit/>
-          </a:bodyPr>
-          <a:lstStyle/>
-          <a:p/>
+          <a:bodyPr wrap="square" lIns="101600" tIns="76200" rIns="101600" bIns="76200" anchor="ctr">
+            <a:spAutoFit/>
+          </a:bodyPr>
+          <a:lstStyle/>
+          <a:p>
+            <a:endParaRPr/>
+          </a:p>
         </p:txBody>
       </p:sp>
       <p:sp>
@@ -22014,11 +22019,13 @@
           </a:ln>
         </p:spPr>
         <p:txBody>
-          <a:bodyPr wrap="square" anchor="ctr" lIns="101600" tIns="76200" rIns="101600" bIns="76200">
-            <a:spAutoFit/>
-          </a:bodyPr>
-          <a:lstStyle/>
-          <a:p/>
+          <a:bodyPr wrap="square" lIns="101600" tIns="76200" rIns="101600" bIns="76200" anchor="ctr">
+            <a:spAutoFit/>
+          </a:bodyPr>
+          <a:lstStyle/>
+          <a:p>
+            <a:endParaRPr/>
+          </a:p>
         </p:txBody>
       </p:sp>
       <p:sp>
@@ -22041,7 +22048,7 @@
           </a:ln>
         </p:spPr>
         <p:txBody>
-          <a:bodyPr wrap="square" anchor="ctr" lIns="101600" tIns="76200" rIns="101600" bIns="76200">
+          <a:bodyPr wrap="square" lIns="101600" tIns="76200" rIns="101600" bIns="76200" anchor="ctr">
             <a:spAutoFit/>
           </a:bodyPr>
           <a:lstStyle/>
@@ -22083,12 +22090,12 @@
           </a:ln>
         </p:spPr>
         <p:txBody>
-          <a:bodyPr wrap="square" anchor="t" lIns="101600" tIns="76200" rIns="101600" bIns="76200">
-            <a:spAutoFit/>
-          </a:bodyPr>
-          <a:lstStyle/>
-          <a:p>
-            <a:pPr algn="l" marL="171450" indent="-171450">
+          <a:bodyPr wrap="square" lIns="101600" tIns="76200" rIns="101600" bIns="76200" anchor="t">
+            <a:spAutoFit/>
+          </a:bodyPr>
+          <a:lstStyle/>
+          <a:p>
+            <a:pPr marL="171450" indent="-171450" algn="l">
               <a:lnSpc>
                 <a:spcPct val="98000"/>
               </a:lnSpc>
@@ -22112,7 +22119,7 @@
             </a:r>
           </a:p>
           <a:p>
-            <a:pPr algn="l" marL="171450" indent="-171450">
+            <a:pPr marL="171450" indent="-171450" algn="l">
               <a:lnSpc>
                 <a:spcPct val="98000"/>
               </a:lnSpc>
@@ -22136,7 +22143,7 @@
             </a:r>
           </a:p>
           <a:p>
-            <a:pPr algn="l" marL="171450" indent="-171450">
+            <a:pPr marL="171450" indent="-171450" algn="l">
               <a:lnSpc>
                 <a:spcPct val="98000"/>
               </a:lnSpc>
@@ -22183,11 +22190,13 @@
           </a:ln>
         </p:spPr>
         <p:txBody>
-          <a:bodyPr wrap="square" anchor="ctr" lIns="101600" tIns="76200" rIns="101600" bIns="76200">
-            <a:spAutoFit/>
-          </a:bodyPr>
-          <a:lstStyle/>
-          <a:p/>
+          <a:bodyPr wrap="square" lIns="101600" tIns="76200" rIns="101600" bIns="76200" anchor="ctr">
+            <a:spAutoFit/>
+          </a:bodyPr>
+          <a:lstStyle/>
+          <a:p>
+            <a:endParaRPr/>
+          </a:p>
         </p:txBody>
       </p:sp>
       <p:sp>
@@ -22214,11 +22223,13 @@
           </a:ln>
         </p:spPr>
         <p:txBody>
-          <a:bodyPr wrap="square" anchor="ctr" lIns="101600" tIns="76200" rIns="101600" bIns="76200">
-            <a:spAutoFit/>
-          </a:bodyPr>
-          <a:lstStyle/>
-          <a:p/>
+          <a:bodyPr wrap="square" lIns="101600" tIns="76200" rIns="101600" bIns="76200" anchor="ctr">
+            <a:spAutoFit/>
+          </a:bodyPr>
+          <a:lstStyle/>
+          <a:p>
+            <a:endParaRPr/>
+          </a:p>
         </p:txBody>
       </p:sp>
       <p:sp>
@@ -22241,7 +22252,7 @@
           </a:ln>
         </p:spPr>
         <p:txBody>
-          <a:bodyPr wrap="square" anchor="ctr" lIns="101600" tIns="76200" rIns="101600" bIns="76200">
+          <a:bodyPr wrap="square" lIns="101600" tIns="76200" rIns="101600" bIns="76200" anchor="ctr">
             <a:spAutoFit/>
           </a:bodyPr>
           <a:lstStyle/>
@@ -22283,12 +22294,12 @@
           </a:ln>
         </p:spPr>
         <p:txBody>
-          <a:bodyPr wrap="square" anchor="t" lIns="101600" tIns="76200" rIns="101600" bIns="76200">
-            <a:spAutoFit/>
-          </a:bodyPr>
-          <a:lstStyle/>
-          <a:p>
-            <a:pPr algn="l" marL="171450" indent="-171450">
+          <a:bodyPr wrap="square" lIns="101600" tIns="76200" rIns="101600" bIns="76200" anchor="t">
+            <a:spAutoFit/>
+          </a:bodyPr>
+          <a:lstStyle/>
+          <a:p>
+            <a:pPr marL="171450" indent="-171450" algn="l">
               <a:lnSpc>
                 <a:spcPct val="98000"/>
               </a:lnSpc>
@@ -22317,20 +22328,11 @@
                 </a:solidFill>
                 <a:latin typeface="Segoe UI"/>
               </a:rPr>
-              <a:t> — </a:t>
-            </a:r>
-            <a:r>
-              <a:rPr sz="1400" b="0" i="0">
-                <a:solidFill>
-                  <a:srgbClr val="3A4149"/>
-                </a:solidFill>
-                <a:latin typeface="Segoe UI"/>
-              </a:rPr>
-              <a:t>CV figures are against the platform's own weak labels. A pilot's first week is a 200–300 point control survey; everything downstream then becomes empirical.</a:t>
-            </a:r>
-          </a:p>
-          <a:p>
-            <a:pPr algn="l" marL="171450" indent="-171450">
+              <a:t> — CV figures are against the platform's own weak labels. A pilot's first week is a 200–300 point control survey; everything downstream then becomes empirical.</a:t>
+            </a:r>
+          </a:p>
+          <a:p>
+            <a:pPr marL="171450" indent="-171450" algn="l">
               <a:lnSpc>
                 <a:spcPct val="98000"/>
               </a:lnSpc>
@@ -22359,20 +22361,11 @@
                 </a:solidFill>
                 <a:latin typeface="Segoe UI"/>
               </a:rPr>
-              <a:t> — </a:t>
-            </a:r>
-            <a:r>
-              <a:rPr sz="1400" b="0" i="0">
-                <a:solidFill>
-                  <a:srgbClr val="3A4149"/>
-                </a:solidFill>
-                <a:latin typeface="Segoe UI"/>
-              </a:rPr>
-              <a:t>Every fusion weight is anchored to them — which is why ground truth comes first.</a:t>
-            </a:r>
-          </a:p>
-          <a:p>
-            <a:pPr algn="l" marL="171450" indent="-171450">
+              <a:t> — Every fusion weight is anchored to them — which is why ground truth comes first.</a:t>
+            </a:r>
+          </a:p>
+          <a:p>
+            <a:pPr marL="171450" indent="-171450" algn="l">
               <a:lnSpc>
                 <a:spcPct val="98000"/>
               </a:lnSpc>
@@ -22401,20 +22394,11 @@
                 </a:solidFill>
                 <a:latin typeface="Segoe UI"/>
               </a:rPr>
-              <a:t> — </a:t>
-            </a:r>
-            <a:r>
-              <a:rPr sz="1400" b="0" i="0">
-                <a:solidFill>
-                  <a:srgbClr val="3A4149"/>
-                </a:solidFill>
-                <a:latin typeface="Segoe UI"/>
-              </a:rPr>
-              <a:t>56.6% needs a human. Batching by cause makes the workload tractable; it cannot make it zero.</a:t>
-            </a:r>
-          </a:p>
-          <a:p>
-            <a:pPr algn="l" marL="171450" indent="-171450">
+              <a:t> — 56.6% needs a human. Batching by cause makes the workload tractable; it cannot make it zero.</a:t>
+            </a:r>
+          </a:p>
+          <a:p>
+            <a:pPr marL="171450" indent="-171450" algn="l">
               <a:lnSpc>
                 <a:spcPct val="98000"/>
               </a:lnSpc>
@@ -22443,20 +22427,11 @@
                 </a:solidFill>
                 <a:latin typeface="Segoe UI"/>
               </a:rPr>
-              <a:t> — </a:t>
-            </a:r>
-            <a:r>
-              <a:rPr sz="1400" b="0" i="0">
-                <a:solidFill>
-                  <a:srgbClr val="3A4149"/>
-                </a:solidFill>
-                <a:latin typeface="Segoe UI"/>
-              </a:rPr>
-              <a:t>The terrain chain is proved on a real calibrated surface (Geobasis NRW DOM1) and labelled as such.</a:t>
-            </a:r>
-          </a:p>
-          <a:p>
-            <a:pPr algn="l" marL="171450" indent="-171450">
+              <a:t> — The terrain chain is proved on a real calibrated surface (Geobasis NRW DOM1) and labelled as such.</a:t>
+            </a:r>
+          </a:p>
+          <a:p>
+            <a:pPr marL="171450" indent="-171450" algn="l">
               <a:lnSpc>
                 <a:spcPct val="98000"/>
               </a:lnSpc>
@@ -22485,16 +22460,7 @@
                 </a:solidFill>
                 <a:latin typeface="Segoe UI"/>
               </a:rPr>
-              <a:t> — </a:t>
-            </a:r>
-            <a:r>
-              <a:rPr sz="1400" b="0" i="0">
-                <a:solidFill>
-                  <a:srgbClr val="3A4149"/>
-                </a:solidFill>
-                <a:latin typeface="Segoe UI"/>
-              </a:rPr>
-              <a:t>Reported as a completeness gap, not silently run with three sources where four were configured.</a:t>
+              <a:t> — Reported as a completeness gap, not silently run with three sources where four were configured.</a:t>
             </a:r>
           </a:p>
         </p:txBody>
@@ -22521,38 +22487,15 @@
           </a:ln>
         </p:spPr>
         <p:txBody>
-          <a:bodyPr wrap="square" anchor="ctr" lIns="101600" tIns="76200" rIns="101600" bIns="76200">
-            <a:spAutoFit/>
-          </a:bodyPr>
-          <a:lstStyle/>
-          <a:p/>
-        </p:txBody>
-      </p:sp>
-      <p:pic>
-        <p:nvPicPr>
-          <p:cNvPr id="800" name="Objective Agreement Chart" descr="Scatter chart of relative objective difference across 39 linear programs, all below the 1e-6 agreement threshold"/>
-          <p:cNvPicPr>
-            <a:picLocks/>
-          </p:cNvPicPr>
-          <p:nvPr/>
-        </p:nvPicPr>
-        <p:blipFill>
-          <a:blip r:embed="rId2"/>
-          <a:srcRect l="2847" t="18395" r="53958" b="52716"/>
-          <a:stretch>
-            <a:fillRect/>
-          </a:stretch>
-        </p:blipFill>
-        <p:spPr>
-          <a:xfrm>
-            <a:off x="8759952" y="1399032"/>
-            <a:ext cx="356616" cy="356616"/>
-          </a:xfrm>
-          <a:prstGeom prst="rect">
-            <a:avLst/>
-          </a:prstGeom>
-        </p:spPr>
-      </p:pic>
+          <a:bodyPr wrap="square" lIns="101600" tIns="76200" rIns="101600" bIns="76200" anchor="ctr">
+            <a:spAutoFit/>
+          </a:bodyPr>
+          <a:lstStyle/>
+          <a:p>
+            <a:endParaRPr/>
+          </a:p>
+        </p:txBody>
+      </p:sp>
       <p:pic>
         <p:nvPicPr>
           <p:cNvPr id="801" name="Graphic 801" descr="Accuracy"/>
@@ -22575,7 +22518,7 @@
         </p:blipFill>
         <p:spPr>
           <a:xfrm>
-            <a:off x="8759952" y="3255264"/>
+            <a:off x="8759952" y="1399032"/>
             <a:ext cx="356616" cy="356616"/>
           </a:xfrm>
           <a:prstGeom prst="rect">
@@ -22605,7 +22548,7 @@
         </p:blipFill>
         <p:spPr>
           <a:xfrm>
-            <a:off x="8759952" y="5029200"/>
+            <a:off x="8759952" y="3255264"/>
             <a:ext cx="356616" cy="356616"/>
           </a:xfrm>
           <a:prstGeom prst="rect">
@@ -22635,7 +22578,7 @@
         </p:blipFill>
         <p:spPr>
           <a:xfrm>
-            <a:off x="8759952" y="6784848"/>
+            <a:off x="8759952" y="5029200"/>
             <a:ext cx="356616" cy="356616"/>
           </a:xfrm>
           <a:prstGeom prst="rect">
@@ -22665,6 +22608,36 @@
         </p:blipFill>
         <p:spPr>
           <a:xfrm>
+            <a:off x="8759952" y="6784848"/>
+            <a:ext cx="356616" cy="356616"/>
+          </a:xfrm>
+          <a:prstGeom prst="rect">
+            <a:avLst/>
+          </a:prstGeom>
+        </p:spPr>
+      </p:pic>
+      <p:pic>
+        <p:nvPicPr>
+          <p:cNvPr id="805" name="Graphic 805" descr="Viability"/>
+          <p:cNvPicPr>
+            <a:picLocks noChangeAspect="1"/>
+          </p:cNvPicPr>
+          <p:nvPr/>
+        </p:nvPicPr>
+        <p:blipFill>
+          <a:blip>
+            <a:extLst>
+              <a:ext uri="{96DAC541-7B7A-43D3-8B79-37D633B846F1}">
+                <asvg:svgBlip xmlns:asvg="http://schemas.microsoft.com/office/drawing/2016/SVG/main" r:embed="rId7"/>
+              </a:ext>
+            </a:extLst>
+          </a:blip>
+          <a:stretch>
+            <a:fillRect/>
+          </a:stretch>
+        </p:blipFill>
+        <p:spPr>
+          <a:xfrm>
             <a:off x="612648" y="5815584"/>
             <a:ext cx="301752" cy="301752"/>
           </a:xfrm>
@@ -22675,7 +22648,7 @@
       </p:pic>
       <p:grpSp>
         <p:nvGrpSpPr>
-          <p:cNvPr id="2" name="Group 9">
+          <p:cNvPr id="28" name="Group 9">
             <a:extLst>
               <a:ext uri="{FF2B5EF4-FFF2-40B4-BE49-F238E27FC236}">
                 <a16:creationId xmlns:a16="http://schemas.microsoft.com/office/drawing/2014/main" id="{3F704B1A-72C8-8909-085A-B78E5B0F3727}"/>
@@ -22695,7 +22668,7 @@
         </p:grpSpPr>
         <p:sp>
           <p:nvSpPr>
-            <p:cNvPr id="3" name="Freeform 10">
+            <p:cNvPr id="29" name="Freeform 10">
               <a:extLst>
                 <a:ext uri="{FF2B5EF4-FFF2-40B4-BE49-F238E27FC236}">
                   <a16:creationId xmlns:a16="http://schemas.microsoft.com/office/drawing/2014/main" id="{AB28C358-5D29-F516-98A9-D9F3F0F88428}"/>
@@ -22800,7 +22773,7 @@
           </a:ln>
         </p:spPr>
         <p:txBody>
-          <a:bodyPr wrap="square" anchor="ctr" lIns="101600" tIns="76200" rIns="101600" bIns="76200">
+          <a:bodyPr wrap="square" lIns="101600" tIns="76200" rIns="101600" bIns="76200" anchor="ctr">
             <a:spAutoFit/>
           </a:bodyPr>
           <a:lstStyle/>
@@ -22842,7 +22815,7 @@
           </a:ln>
         </p:spPr>
         <p:txBody>
-          <a:bodyPr wrap="square" anchor="ctr" lIns="101600" tIns="76200" rIns="101600" bIns="76200">
+          <a:bodyPr wrap="square" lIns="101600" tIns="76200" rIns="101600" bIns="76200" anchor="ctr">
             <a:spAutoFit/>
           </a:bodyPr>
           <a:lstStyle/>
@@ -22886,7 +22859,7 @@
           </a:ln>
         </p:spPr>
         <p:txBody>
-          <a:bodyPr wrap="square" anchor="ctr" lIns="101600" tIns="76200" rIns="101600" bIns="76200">
+          <a:bodyPr wrap="square" lIns="101600" tIns="76200" rIns="101600" bIns="76200" anchor="ctr">
             <a:spAutoFit/>
           </a:bodyPr>
           <a:lstStyle/>
@@ -22928,7 +22901,7 @@
           </a:ln>
         </p:spPr>
         <p:txBody>
-          <a:bodyPr wrap="square" anchor="ctr" lIns="50800" tIns="50800" rIns="127000" bIns="50800">
+          <a:bodyPr wrap="square" lIns="50800" tIns="50800" rIns="127000" bIns="50800" anchor="ctr">
             <a:spAutoFit/>
           </a:bodyPr>
           <a:lstStyle/>
@@ -22974,7 +22947,7 @@
           </a:ln>
         </p:spPr>
         <p:txBody>
-          <a:bodyPr wrap="square" anchor="ctr" lIns="101600" tIns="76200" rIns="101600" bIns="76200">
+          <a:bodyPr wrap="square" lIns="101600" tIns="76200" rIns="101600" bIns="76200" anchor="ctr">
             <a:spAutoFit/>
           </a:bodyPr>
           <a:lstStyle/>
@@ -23020,11 +22993,13 @@
           </a:ln>
         </p:spPr>
         <p:txBody>
-          <a:bodyPr wrap="square" anchor="ctr" lIns="101600" tIns="76200" rIns="101600" bIns="76200">
-            <a:spAutoFit/>
-          </a:bodyPr>
-          <a:lstStyle/>
-          <a:p/>
+          <a:bodyPr wrap="square" lIns="101600" tIns="76200" rIns="101600" bIns="76200" anchor="ctr">
+            <a:spAutoFit/>
+          </a:bodyPr>
+          <a:lstStyle/>
+          <a:p>
+            <a:endParaRPr/>
+          </a:p>
         </p:txBody>
       </p:sp>
       <p:sp>
@@ -23049,11 +23024,13 @@
           </a:ln>
         </p:spPr>
         <p:txBody>
-          <a:bodyPr wrap="square" anchor="ctr" lIns="101600" tIns="76200" rIns="101600" bIns="76200">
-            <a:spAutoFit/>
-          </a:bodyPr>
-          <a:lstStyle/>
-          <a:p/>
+          <a:bodyPr wrap="square" lIns="101600" tIns="76200" rIns="101600" bIns="76200" anchor="ctr">
+            <a:spAutoFit/>
+          </a:bodyPr>
+          <a:lstStyle/>
+          <a:p>
+            <a:endParaRPr/>
+          </a:p>
         </p:txBody>
       </p:sp>
       <p:sp>
@@ -23076,7 +23053,7 @@
           </a:ln>
         </p:spPr>
         <p:txBody>
-          <a:bodyPr wrap="square" anchor="ctr" lIns="101600" tIns="76200" rIns="101600" bIns="76200">
+          <a:bodyPr wrap="square" lIns="101600" tIns="76200" rIns="101600" bIns="76200" anchor="ctr">
             <a:spAutoFit/>
           </a:bodyPr>
           <a:lstStyle/>
@@ -23122,11 +23099,13 @@
           </a:ln>
         </p:spPr>
         <p:txBody>
-          <a:bodyPr wrap="square" anchor="ctr" lIns="101600" tIns="76200" rIns="101600" bIns="76200">
-            <a:spAutoFit/>
-          </a:bodyPr>
-          <a:lstStyle/>
-          <a:p/>
+          <a:bodyPr wrap="square" lIns="101600" tIns="76200" rIns="101600" bIns="76200" anchor="ctr">
+            <a:spAutoFit/>
+          </a:bodyPr>
+          <a:lstStyle/>
+          <a:p>
+            <a:endParaRPr/>
+          </a:p>
         </p:txBody>
       </p:sp>
       <p:sp>
@@ -23149,7 +23128,7 @@
           </a:ln>
         </p:spPr>
         <p:txBody>
-          <a:bodyPr wrap="square" anchor="ctr" lIns="101600" tIns="76200" rIns="101600" bIns="76200">
+          <a:bodyPr wrap="square" lIns="101600" tIns="76200" rIns="101600" bIns="76200" anchor="ctr">
             <a:spAutoFit/>
           </a:bodyPr>
           <a:lstStyle/>
@@ -23191,7 +23170,7 @@
           </a:ln>
         </p:spPr>
         <p:txBody>
-          <a:bodyPr wrap="square" anchor="ctr" lIns="101600" tIns="76200" rIns="101600" bIns="76200">
+          <a:bodyPr wrap="square" lIns="101600" tIns="76200" rIns="101600" bIns="76200" anchor="ctr">
             <a:spAutoFit/>
           </a:bodyPr>
           <a:lstStyle/>
@@ -23233,7 +23212,7 @@
           </a:ln>
         </p:spPr>
         <p:txBody>
-          <a:bodyPr wrap="square" anchor="ctr" lIns="101600" tIns="76200" rIns="101600" bIns="76200">
+          <a:bodyPr wrap="square" lIns="101600" tIns="76200" rIns="101600" bIns="76200" anchor="ctr">
             <a:spAutoFit/>
           </a:bodyPr>
           <a:lstStyle/>
@@ -23275,7 +23254,7 @@
           </a:ln>
         </p:spPr>
         <p:txBody>
-          <a:bodyPr wrap="square" anchor="ctr" lIns="101600" tIns="76200" rIns="101600" bIns="76200">
+          <a:bodyPr wrap="square" lIns="101600" tIns="76200" rIns="101600" bIns="76200" anchor="ctr">
             <a:spAutoFit/>
           </a:bodyPr>
           <a:lstStyle/>
@@ -23321,11 +23300,13 @@
           </a:ln>
         </p:spPr>
         <p:txBody>
-          <a:bodyPr wrap="square" anchor="ctr" lIns="101600" tIns="76200" rIns="101600" bIns="76200">
-            <a:spAutoFit/>
-          </a:bodyPr>
-          <a:lstStyle/>
-          <a:p/>
+          <a:bodyPr wrap="square" lIns="101600" tIns="76200" rIns="101600" bIns="76200" anchor="ctr">
+            <a:spAutoFit/>
+          </a:bodyPr>
+          <a:lstStyle/>
+          <a:p>
+            <a:endParaRPr/>
+          </a:p>
         </p:txBody>
       </p:sp>
       <p:sp>
@@ -23348,7 +23329,7 @@
           </a:ln>
         </p:spPr>
         <p:txBody>
-          <a:bodyPr wrap="square" anchor="ctr" lIns="101600" tIns="76200" rIns="101600" bIns="76200">
+          <a:bodyPr wrap="square" lIns="101600" tIns="76200" rIns="101600" bIns="76200" anchor="ctr">
             <a:spAutoFit/>
           </a:bodyPr>
           <a:lstStyle/>
@@ -23390,7 +23371,7 @@
           </a:ln>
         </p:spPr>
         <p:txBody>
-          <a:bodyPr wrap="square" anchor="ctr" lIns="101600" tIns="76200" rIns="101600" bIns="76200">
+          <a:bodyPr wrap="square" lIns="101600" tIns="76200" rIns="101600" bIns="76200" anchor="ctr">
             <a:spAutoFit/>
           </a:bodyPr>
           <a:lstStyle/>
@@ -23432,7 +23413,7 @@
           </a:ln>
         </p:spPr>
         <p:txBody>
-          <a:bodyPr wrap="square" anchor="ctr" lIns="101600" tIns="76200" rIns="101600" bIns="76200">
+          <a:bodyPr wrap="square" lIns="101600" tIns="76200" rIns="101600" bIns="76200" anchor="ctr">
             <a:spAutoFit/>
           </a:bodyPr>
           <a:lstStyle/>
@@ -23474,7 +23455,7 @@
           </a:ln>
         </p:spPr>
         <p:txBody>
-          <a:bodyPr wrap="square" anchor="ctr" lIns="101600" tIns="76200" rIns="101600" bIns="76200">
+          <a:bodyPr wrap="square" lIns="101600" tIns="76200" rIns="101600" bIns="76200" anchor="ctr">
             <a:spAutoFit/>
           </a:bodyPr>
           <a:lstStyle/>
@@ -23520,11 +23501,13 @@
           </a:ln>
         </p:spPr>
         <p:txBody>
-          <a:bodyPr wrap="square" anchor="ctr" lIns="101600" tIns="76200" rIns="101600" bIns="76200">
-            <a:spAutoFit/>
-          </a:bodyPr>
-          <a:lstStyle/>
-          <a:p/>
+          <a:bodyPr wrap="square" lIns="101600" tIns="76200" rIns="101600" bIns="76200" anchor="ctr">
+            <a:spAutoFit/>
+          </a:bodyPr>
+          <a:lstStyle/>
+          <a:p>
+            <a:endParaRPr/>
+          </a:p>
         </p:txBody>
       </p:sp>
       <p:sp>
@@ -23547,7 +23530,7 @@
           </a:ln>
         </p:spPr>
         <p:txBody>
-          <a:bodyPr wrap="square" anchor="ctr" lIns="101600" tIns="76200" rIns="101600" bIns="76200">
+          <a:bodyPr wrap="square" lIns="101600" tIns="76200" rIns="101600" bIns="76200" anchor="ctr">
             <a:spAutoFit/>
           </a:bodyPr>
           <a:lstStyle/>
@@ -23589,7 +23572,7 @@
           </a:ln>
         </p:spPr>
         <p:txBody>
-          <a:bodyPr wrap="square" anchor="ctr" lIns="101600" tIns="76200" rIns="101600" bIns="76200">
+          <a:bodyPr wrap="square" lIns="101600" tIns="76200" rIns="101600" bIns="76200" anchor="ctr">
             <a:spAutoFit/>
           </a:bodyPr>
           <a:lstStyle/>
@@ -23631,7 +23614,7 @@
           </a:ln>
         </p:spPr>
         <p:txBody>
-          <a:bodyPr wrap="square" anchor="ctr" lIns="101600" tIns="76200" rIns="101600" bIns="76200">
+          <a:bodyPr wrap="square" lIns="101600" tIns="76200" rIns="101600" bIns="76200" anchor="ctr">
             <a:spAutoFit/>
           </a:bodyPr>
           <a:lstStyle/>
@@ -23673,7 +23656,7 @@
           </a:ln>
         </p:spPr>
         <p:txBody>
-          <a:bodyPr wrap="square" anchor="ctr" lIns="101600" tIns="76200" rIns="101600" bIns="76200">
+          <a:bodyPr wrap="square" lIns="101600" tIns="76200" rIns="101600" bIns="76200" anchor="ctr">
             <a:spAutoFit/>
           </a:bodyPr>
           <a:lstStyle/>
@@ -23719,11 +23702,13 @@
           </a:ln>
         </p:spPr>
         <p:txBody>
-          <a:bodyPr wrap="square" anchor="ctr" lIns="101600" tIns="76200" rIns="101600" bIns="76200">
-            <a:spAutoFit/>
-          </a:bodyPr>
-          <a:lstStyle/>
-          <a:p/>
+          <a:bodyPr wrap="square" lIns="101600" tIns="76200" rIns="101600" bIns="76200" anchor="ctr">
+            <a:spAutoFit/>
+          </a:bodyPr>
+          <a:lstStyle/>
+          <a:p>
+            <a:endParaRPr/>
+          </a:p>
         </p:txBody>
       </p:sp>
       <p:sp>
@@ -23746,7 +23731,7 @@
           </a:ln>
         </p:spPr>
         <p:txBody>
-          <a:bodyPr wrap="square" anchor="ctr" lIns="101600" tIns="76200" rIns="101600" bIns="76200">
+          <a:bodyPr wrap="square" lIns="101600" tIns="76200" rIns="101600" bIns="76200" anchor="ctr">
             <a:spAutoFit/>
           </a:bodyPr>
           <a:lstStyle/>
@@ -23788,7 +23773,7 @@
           </a:ln>
         </p:spPr>
         <p:txBody>
-          <a:bodyPr wrap="square" anchor="ctr" lIns="101600" tIns="76200" rIns="101600" bIns="76200">
+          <a:bodyPr wrap="square" lIns="101600" tIns="76200" rIns="101600" bIns="76200" anchor="ctr">
             <a:spAutoFit/>
           </a:bodyPr>
           <a:lstStyle/>
@@ -23830,7 +23815,7 @@
           </a:ln>
         </p:spPr>
         <p:txBody>
-          <a:bodyPr wrap="square" anchor="ctr" lIns="101600" tIns="76200" rIns="101600" bIns="76200">
+          <a:bodyPr wrap="square" lIns="101600" tIns="76200" rIns="101600" bIns="76200" anchor="ctr">
             <a:spAutoFit/>
           </a:bodyPr>
           <a:lstStyle/>
@@ -23872,7 +23857,7 @@
           </a:ln>
         </p:spPr>
         <p:txBody>
-          <a:bodyPr wrap="square" anchor="ctr" lIns="101600" tIns="76200" rIns="101600" bIns="76200">
+          <a:bodyPr wrap="square" lIns="101600" tIns="76200" rIns="101600" bIns="76200" anchor="ctr">
             <a:spAutoFit/>
           </a:bodyPr>
           <a:lstStyle/>
@@ -23918,11 +23903,13 @@
           </a:ln>
         </p:spPr>
         <p:txBody>
-          <a:bodyPr wrap="square" anchor="ctr" lIns="101600" tIns="76200" rIns="101600" bIns="76200">
-            <a:spAutoFit/>
-          </a:bodyPr>
-          <a:lstStyle/>
-          <a:p/>
+          <a:bodyPr wrap="square" lIns="101600" tIns="76200" rIns="101600" bIns="76200" anchor="ctr">
+            <a:spAutoFit/>
+          </a:bodyPr>
+          <a:lstStyle/>
+          <a:p>
+            <a:endParaRPr/>
+          </a:p>
         </p:txBody>
       </p:sp>
       <p:sp>
@@ -23945,7 +23932,7 @@
           </a:ln>
         </p:spPr>
         <p:txBody>
-          <a:bodyPr wrap="square" anchor="ctr" lIns="101600" tIns="76200" rIns="101600" bIns="76200">
+          <a:bodyPr wrap="square" lIns="101600" tIns="76200" rIns="101600" bIns="76200" anchor="ctr">
             <a:spAutoFit/>
           </a:bodyPr>
           <a:lstStyle/>
@@ -23987,7 +23974,7 @@
           </a:ln>
         </p:spPr>
         <p:txBody>
-          <a:bodyPr wrap="square" anchor="ctr" lIns="101600" tIns="76200" rIns="101600" bIns="76200">
+          <a:bodyPr wrap="square" lIns="101600" tIns="76200" rIns="101600" bIns="76200" anchor="ctr">
             <a:spAutoFit/>
           </a:bodyPr>
           <a:lstStyle/>
@@ -24029,7 +24016,7 @@
           </a:ln>
         </p:spPr>
         <p:txBody>
-          <a:bodyPr wrap="square" anchor="ctr" lIns="101600" tIns="76200" rIns="101600" bIns="76200">
+          <a:bodyPr wrap="square" lIns="101600" tIns="76200" rIns="101600" bIns="76200" anchor="ctr">
             <a:spAutoFit/>
           </a:bodyPr>
           <a:lstStyle/>
@@ -24073,11 +24060,13 @@
           </a:ln>
         </p:spPr>
         <p:txBody>
-          <a:bodyPr wrap="square" anchor="ctr" lIns="101600" tIns="76200" rIns="101600" bIns="76200">
-            <a:spAutoFit/>
-          </a:bodyPr>
-          <a:lstStyle/>
-          <a:p/>
+          <a:bodyPr wrap="square" lIns="101600" tIns="76200" rIns="101600" bIns="76200" anchor="ctr">
+            <a:spAutoFit/>
+          </a:bodyPr>
+          <a:lstStyle/>
+          <a:p>
+            <a:endParaRPr/>
+          </a:p>
         </p:txBody>
       </p:sp>
       <p:sp>
@@ -24100,7 +24089,7 @@
           </a:ln>
         </p:spPr>
         <p:txBody>
-          <a:bodyPr wrap="square" anchor="ctr" lIns="101600" tIns="76200" rIns="101600" bIns="76200">
+          <a:bodyPr wrap="square" lIns="101600" tIns="76200" rIns="101600" bIns="76200" anchor="ctr">
             <a:spAutoFit/>
           </a:bodyPr>
           <a:lstStyle/>
@@ -24146,11 +24135,13 @@
           </a:ln>
         </p:spPr>
         <p:txBody>
-          <a:bodyPr wrap="square" anchor="ctr" lIns="101600" tIns="76200" rIns="101600" bIns="76200">
-            <a:spAutoFit/>
-          </a:bodyPr>
-          <a:lstStyle/>
-          <a:p/>
+          <a:bodyPr wrap="square" lIns="101600" tIns="76200" rIns="101600" bIns="76200" anchor="ctr">
+            <a:spAutoFit/>
+          </a:bodyPr>
+          <a:lstStyle/>
+          <a:p>
+            <a:endParaRPr/>
+          </a:p>
         </p:txBody>
       </p:sp>
       <p:sp>
@@ -24173,7 +24164,7 @@
           </a:ln>
         </p:spPr>
         <p:txBody>
-          <a:bodyPr wrap="square" anchor="ctr" lIns="101600" tIns="76200" rIns="101600" bIns="76200">
+          <a:bodyPr wrap="square" lIns="101600" tIns="76200" rIns="101600" bIns="76200" anchor="ctr">
             <a:spAutoFit/>
           </a:bodyPr>
           <a:lstStyle/>
@@ -24215,7 +24206,7 @@
           </a:ln>
         </p:spPr>
         <p:txBody>
-          <a:bodyPr wrap="square" anchor="ctr" lIns="101600" tIns="76200" rIns="101600" bIns="76200">
+          <a:bodyPr wrap="square" lIns="101600" tIns="76200" rIns="101600" bIns="76200" anchor="ctr">
             <a:spAutoFit/>
           </a:bodyPr>
           <a:lstStyle/>
@@ -24257,7 +24248,7 @@
           </a:ln>
         </p:spPr>
         <p:txBody>
-          <a:bodyPr wrap="square" anchor="ctr" lIns="101600" tIns="76200" rIns="101600" bIns="76200">
+          <a:bodyPr wrap="square" lIns="101600" tIns="76200" rIns="101600" bIns="76200" anchor="ctr">
             <a:spAutoFit/>
           </a:bodyPr>
           <a:lstStyle/>
@@ -24303,11 +24294,13 @@
           </a:ln>
         </p:spPr>
         <p:txBody>
-          <a:bodyPr wrap="square" anchor="ctr" lIns="101600" tIns="76200" rIns="101600" bIns="76200">
-            <a:spAutoFit/>
-          </a:bodyPr>
-          <a:lstStyle/>
-          <a:p/>
+          <a:bodyPr wrap="square" lIns="101600" tIns="76200" rIns="101600" bIns="76200" anchor="ctr">
+            <a:spAutoFit/>
+          </a:bodyPr>
+          <a:lstStyle/>
+          <a:p>
+            <a:endParaRPr/>
+          </a:p>
         </p:txBody>
       </p:sp>
       <p:sp>
@@ -24330,7 +24323,7 @@
           </a:ln>
         </p:spPr>
         <p:txBody>
-          <a:bodyPr wrap="square" anchor="ctr" lIns="101600" tIns="76200" rIns="101600" bIns="76200">
+          <a:bodyPr wrap="square" lIns="101600" tIns="76200" rIns="101600" bIns="76200" anchor="ctr">
             <a:spAutoFit/>
           </a:bodyPr>
           <a:lstStyle/>
@@ -24372,7 +24365,7 @@
           </a:ln>
         </p:spPr>
         <p:txBody>
-          <a:bodyPr wrap="square" anchor="ctr" lIns="101600" tIns="76200" rIns="101600" bIns="76200">
+          <a:bodyPr wrap="square" lIns="101600" tIns="76200" rIns="101600" bIns="76200" anchor="ctr">
             <a:spAutoFit/>
           </a:bodyPr>
           <a:lstStyle/>
@@ -24414,7 +24407,7 @@
           </a:ln>
         </p:spPr>
         <p:txBody>
-          <a:bodyPr wrap="square" anchor="ctr" lIns="101600" tIns="76200" rIns="101600" bIns="76200">
+          <a:bodyPr wrap="square" lIns="101600" tIns="76200" rIns="101600" bIns="76200" anchor="ctr">
             <a:spAutoFit/>
           </a:bodyPr>
           <a:lstStyle/>
@@ -24460,11 +24453,13 @@
           </a:ln>
         </p:spPr>
         <p:txBody>
-          <a:bodyPr wrap="square" anchor="ctr" lIns="101600" tIns="76200" rIns="101600" bIns="76200">
-            <a:spAutoFit/>
-          </a:bodyPr>
-          <a:lstStyle/>
-          <a:p/>
+          <a:bodyPr wrap="square" lIns="101600" tIns="76200" rIns="101600" bIns="76200" anchor="ctr">
+            <a:spAutoFit/>
+          </a:bodyPr>
+          <a:lstStyle/>
+          <a:p>
+            <a:endParaRPr/>
+          </a:p>
         </p:txBody>
       </p:sp>
       <p:sp>
@@ -24487,7 +24482,7 @@
           </a:ln>
         </p:spPr>
         <p:txBody>
-          <a:bodyPr wrap="square" anchor="ctr" lIns="101600" tIns="76200" rIns="101600" bIns="76200">
+          <a:bodyPr wrap="square" lIns="101600" tIns="76200" rIns="101600" bIns="76200" anchor="ctr">
             <a:spAutoFit/>
           </a:bodyPr>
           <a:lstStyle/>
@@ -24529,7 +24524,7 @@
           </a:ln>
         </p:spPr>
         <p:txBody>
-          <a:bodyPr wrap="square" anchor="ctr" lIns="101600" tIns="76200" rIns="101600" bIns="76200">
+          <a:bodyPr wrap="square" lIns="101600" tIns="76200" rIns="101600" bIns="76200" anchor="ctr">
             <a:spAutoFit/>
           </a:bodyPr>
           <a:lstStyle/>
@@ -24573,11 +24568,13 @@
           </a:ln>
         </p:spPr>
         <p:txBody>
-          <a:bodyPr wrap="square" anchor="ctr" lIns="101600" tIns="76200" rIns="101600" bIns="76200">
-            <a:spAutoFit/>
-          </a:bodyPr>
-          <a:lstStyle/>
-          <a:p/>
+          <a:bodyPr wrap="square" lIns="101600" tIns="76200" rIns="101600" bIns="76200" anchor="ctr">
+            <a:spAutoFit/>
+          </a:bodyPr>
+          <a:lstStyle/>
+          <a:p>
+            <a:endParaRPr/>
+          </a:p>
         </p:txBody>
       </p:sp>
       <p:sp>
@@ -24600,7 +24597,7 @@
           </a:ln>
         </p:spPr>
         <p:txBody>
-          <a:bodyPr wrap="square" anchor="ctr" lIns="101600" tIns="76200" rIns="101600" bIns="76200">
+          <a:bodyPr wrap="square" lIns="101600" tIns="76200" rIns="101600" bIns="76200" anchor="ctr">
             <a:spAutoFit/>
           </a:bodyPr>
           <a:lstStyle/>
@@ -24646,11 +24643,13 @@
           </a:ln>
         </p:spPr>
         <p:txBody>
-          <a:bodyPr wrap="square" anchor="ctr" lIns="101600" tIns="76200" rIns="101600" bIns="76200">
-            <a:spAutoFit/>
-          </a:bodyPr>
-          <a:lstStyle/>
-          <a:p/>
+          <a:bodyPr wrap="square" lIns="101600" tIns="76200" rIns="101600" bIns="76200" anchor="ctr">
+            <a:spAutoFit/>
+          </a:bodyPr>
+          <a:lstStyle/>
+          <a:p>
+            <a:endParaRPr/>
+          </a:p>
         </p:txBody>
       </p:sp>
       <p:sp>
@@ -24673,7 +24672,7 @@
           </a:ln>
         </p:spPr>
         <p:txBody>
-          <a:bodyPr wrap="square" anchor="ctr" lIns="101600" tIns="76200" rIns="101600" bIns="76200">
+          <a:bodyPr wrap="square" lIns="101600" tIns="76200" rIns="101600" bIns="76200" anchor="ctr">
             <a:spAutoFit/>
           </a:bodyPr>
           <a:lstStyle/>
@@ -24715,7 +24714,7 @@
           </a:ln>
         </p:spPr>
         <p:txBody>
-          <a:bodyPr wrap="square" anchor="ctr" lIns="101600" tIns="76200" rIns="101600" bIns="76200">
+          <a:bodyPr wrap="square" lIns="101600" tIns="76200" rIns="101600" bIns="76200" anchor="ctr">
             <a:spAutoFit/>
           </a:bodyPr>
           <a:lstStyle/>
@@ -24759,11 +24758,13 @@
           </a:ln>
         </p:spPr>
         <p:txBody>
-          <a:bodyPr wrap="square" anchor="ctr" lIns="101600" tIns="76200" rIns="101600" bIns="76200">
-            <a:spAutoFit/>
-          </a:bodyPr>
-          <a:lstStyle/>
-          <a:p/>
+          <a:bodyPr wrap="square" lIns="101600" tIns="76200" rIns="101600" bIns="76200" anchor="ctr">
+            <a:spAutoFit/>
+          </a:bodyPr>
+          <a:lstStyle/>
+          <a:p>
+            <a:endParaRPr/>
+          </a:p>
         </p:txBody>
       </p:sp>
       <p:sp>
@@ -24788,11 +24789,13 @@
           </a:ln>
         </p:spPr>
         <p:txBody>
-          <a:bodyPr wrap="square" anchor="ctr" lIns="101600" tIns="76200" rIns="101600" bIns="76200">
-            <a:spAutoFit/>
-          </a:bodyPr>
-          <a:lstStyle/>
-          <a:p/>
+          <a:bodyPr wrap="square" lIns="101600" tIns="76200" rIns="101600" bIns="76200" anchor="ctr">
+            <a:spAutoFit/>
+          </a:bodyPr>
+          <a:lstStyle/>
+          <a:p>
+            <a:endParaRPr/>
+          </a:p>
         </p:txBody>
       </p:sp>
       <p:sp>
@@ -24836,6 +24839,7 @@
           <a:lstStyle/>
           <a:p>
             <a:pPr algn="ctr"/>
+            <a:endParaRPr/>
           </a:p>
         </p:txBody>
       </p:sp>
@@ -24880,6 +24884,7 @@
           <a:lstStyle/>
           <a:p>
             <a:pPr algn="ctr"/>
+            <a:endParaRPr/>
           </a:p>
         </p:txBody>
       </p:sp>
@@ -24924,6 +24929,7 @@
           <a:lstStyle/>
           <a:p>
             <a:pPr algn="ctr"/>
+            <a:endParaRPr/>
           </a:p>
         </p:txBody>
       </p:sp>
@@ -24968,6 +24974,7 @@
           <a:lstStyle/>
           <a:p>
             <a:pPr algn="ctr"/>
+            <a:endParaRPr/>
           </a:p>
         </p:txBody>
       </p:sp>
@@ -24995,11 +25002,13 @@
           </a:ln>
         </p:spPr>
         <p:txBody>
-          <a:bodyPr wrap="square" anchor="ctr" lIns="101600" tIns="76200" rIns="101600" bIns="76200">
-            <a:spAutoFit/>
-          </a:bodyPr>
-          <a:lstStyle/>
-          <a:p/>
+          <a:bodyPr wrap="square" lIns="101600" tIns="76200" rIns="101600" bIns="76200" anchor="ctr">
+            <a:spAutoFit/>
+          </a:bodyPr>
+          <a:lstStyle/>
+          <a:p>
+            <a:endParaRPr/>
+          </a:p>
         </p:txBody>
       </p:sp>
       <p:sp>
@@ -25024,7 +25033,7 @@
           </a:ln>
         </p:spPr>
         <p:txBody>
-          <a:bodyPr wrap="square" anchor="ctr" lIns="101600" tIns="76200" rIns="101600" bIns="76200">
+          <a:bodyPr wrap="square" lIns="101600" tIns="76200" rIns="101600" bIns="76200" anchor="ctr">
             <a:spAutoFit/>
           </a:bodyPr>
           <a:lstStyle/>
@@ -25035,7 +25044,7 @@
               </a:lnSpc>
             </a:pPr>
             <a:r>
-              <a:rPr sz="1500" b="1" i="0">
+              <a:rPr sz="1350" b="1" i="0">
                 <a:solidFill>
                   <a:srgbClr val="FFFFFF"/>
                 </a:solidFill>
@@ -25048,7 +25057,7 @@
       </p:sp>
       <p:sp>
         <p:nvSpPr>
-          <p:cNvPr id="60" name="METHOD REFERENCES Card"/>
+          <p:cNvPr id="60" name="METHOD REFERENCES · EVIDENCE, MATCHING, LEARNING Card"/>
           <p:cNvSpPr txBox="1"/>
           <p:nvPr/>
         </p:nvSpPr>
@@ -25070,16 +25079,18 @@
           </a:ln>
         </p:spPr>
         <p:txBody>
-          <a:bodyPr wrap="square" anchor="ctr" lIns="101600" tIns="76200" rIns="101600" bIns="76200">
-            <a:spAutoFit/>
-          </a:bodyPr>
-          <a:lstStyle/>
-          <a:p/>
-        </p:txBody>
-      </p:sp>
-      <p:sp>
-        <p:nvSpPr>
-          <p:cNvPr id="61" name="METHOD REFERENCES Header"/>
+          <a:bodyPr wrap="square" lIns="101600" tIns="76200" rIns="101600" bIns="76200" anchor="ctr">
+            <a:spAutoFit/>
+          </a:bodyPr>
+          <a:lstStyle/>
+          <a:p>
+            <a:endParaRPr/>
+          </a:p>
+        </p:txBody>
+      </p:sp>
+      <p:sp>
+        <p:nvSpPr>
+          <p:cNvPr id="61" name="METHOD REFERENCES · EVIDENCE, MATCHING, LEARNING Header"/>
           <p:cNvSpPr txBox="1"/>
           <p:nvPr/>
         </p:nvSpPr>
@@ -25099,7 +25110,7 @@
           </a:ln>
         </p:spPr>
         <p:txBody>
-          <a:bodyPr wrap="square" anchor="ctr" lIns="101600" tIns="76200" rIns="101600" bIns="76200">
+          <a:bodyPr wrap="square" lIns="101600" tIns="76200" rIns="101600" bIns="76200" anchor="ctr">
             <a:spAutoFit/>
           </a:bodyPr>
           <a:lstStyle/>
@@ -25110,20 +25121,20 @@
               </a:lnSpc>
             </a:pPr>
             <a:r>
-              <a:rPr sz="1500" b="1" i="0">
+              <a:rPr sz="1350" b="1" i="0">
                 <a:solidFill>
                   <a:srgbClr val="FFFFFF"/>
                 </a:solidFill>
                 <a:latin typeface="Segoe UI"/>
               </a:rPr>
-              <a:t>METHOD REFERENCES</a:t>
-            </a:r>
-          </a:p>
-        </p:txBody>
-      </p:sp>
-      <p:sp>
-        <p:nvSpPr>
-          <p:cNvPr id="62" name="METHOD &amp; STATUTORY REFERENCES (continued) Card"/>
+              <a:t>METHOD REFERENCES · EVIDENCE, MATCHING, LEARNING</a:t>
+            </a:r>
+          </a:p>
+        </p:txBody>
+      </p:sp>
+      <p:sp>
+        <p:nvSpPr>
+          <p:cNvPr id="62" name="METHOD REFERENCES · GEODESY, RASTER, QUALITY, INTEGRITY Card"/>
           <p:cNvSpPr txBox="1"/>
           <p:nvPr/>
         </p:nvSpPr>
@@ -25145,16 +25156,18 @@
           </a:ln>
         </p:spPr>
         <p:txBody>
-          <a:bodyPr wrap="square" anchor="ctr" lIns="101600" tIns="76200" rIns="101600" bIns="76200">
-            <a:spAutoFit/>
-          </a:bodyPr>
-          <a:lstStyle/>
-          <a:p/>
-        </p:txBody>
-      </p:sp>
-      <p:sp>
-        <p:nvSpPr>
-          <p:cNvPr id="63" name="METHOD &amp; STATUTORY REFERENCES (continued) Header"/>
+          <a:bodyPr wrap="square" lIns="101600" tIns="76200" rIns="101600" bIns="76200" anchor="ctr">
+            <a:spAutoFit/>
+          </a:bodyPr>
+          <a:lstStyle/>
+          <a:p>
+            <a:endParaRPr/>
+          </a:p>
+        </p:txBody>
+      </p:sp>
+      <p:sp>
+        <p:nvSpPr>
+          <p:cNvPr id="63" name="METHOD REFERENCES · GEODESY, RASTER, QUALITY, INTEGRITY Header"/>
           <p:cNvSpPr txBox="1"/>
           <p:nvPr/>
         </p:nvSpPr>
@@ -25174,7 +25187,7 @@
           </a:ln>
         </p:spPr>
         <p:txBody>
-          <a:bodyPr wrap="square" anchor="ctr" lIns="101600" tIns="76200" rIns="101600" bIns="76200">
+          <a:bodyPr wrap="square" lIns="101600" tIns="76200" rIns="101600" bIns="76200" anchor="ctr">
             <a:spAutoFit/>
           </a:bodyPr>
           <a:lstStyle/>
@@ -25185,13 +25198,13 @@
               </a:lnSpc>
             </a:pPr>
             <a:r>
-              <a:rPr sz="1500" b="1" i="0">
+              <a:rPr sz="1350" b="1" i="0">
                 <a:solidFill>
                   <a:srgbClr val="FFFFFF"/>
                 </a:solidFill>
                 <a:latin typeface="Segoe UI"/>
               </a:rPr>
-              <a:t>METHOD &amp; STATUTORY REFERENCES (continued)</a:t>
+              <a:t>METHOD REFERENCES · GEODESY, RASTER, QUALITY, INTEGRITY</a:t>
             </a:r>
           </a:p>
         </p:txBody>
@@ -25216,17 +25229,17 @@
           </a:ln>
         </p:spPr>
         <p:txBody>
-          <a:bodyPr wrap="square" anchor="t" lIns="101600" tIns="76200" rIns="76200" bIns="76200">
-            <a:spAutoFit/>
-          </a:bodyPr>
-          <a:lstStyle/>
-          <a:p>
-            <a:pPr algn="l" marL="152400" indent="-152400">
-              <a:lnSpc>
-                <a:spcPct val="96000"/>
+          <a:bodyPr wrap="square" lIns="101600" tIns="76200" rIns="76200" bIns="76200" anchor="t">
+            <a:spAutoFit/>
+          </a:bodyPr>
+          <a:lstStyle/>
+          <a:p>
+            <a:pPr marL="152400" indent="-152400" algn="l">
+              <a:lnSpc>
+                <a:spcPct val="94000"/>
               </a:lnSpc>
               <a:spcBef>
-                <a:spcPts val="400"/>
+                <a:spcPts val="200"/>
               </a:spcBef>
               <a:buClr>
                 <a:srgbClr val="16324F"/>
@@ -25235,7 +25248,7 @@
               <a:buChar char="•"/>
             </a:pPr>
             <a:r>
-              <a:rPr sz="1200" b="1" i="0">
+              <a:rPr sz="1100" b="1" i="0">
                 <a:solidFill>
                   <a:srgbClr val="1C1C1E"/>
                 </a:solidFill>
@@ -25244,31 +25257,32 @@
               <a:t>TNGIS Tamil Nadu cadastrals</a:t>
             </a:r>
             <a:r>
-              <a:rPr sz="1200" b="0" i="0">
+              <a:rPr sz="1100" b="0" i="0">
                 <a:solidFill>
                   <a:srgbClr val="3A4149"/>
                 </a:solidFill>
                 <a:latin typeface="Segoe UI"/>
               </a:rPr>
-              <a:t> — </a:t>
-            </a:r>
-            <a:r>
-              <a:rPr sz="1200" b="0" i="0">
-                <a:solidFill>
-                  <a:srgbClr val="3A4149"/>
-                </a:solidFill>
-                <a:latin typeface="Segoe UI"/>
-              </a:rPr>
-              <a:t>tngis.tn.gov.in · CC0-1.0 · 6,017,242 parcels</a:t>
-            </a:r>
-          </a:p>
-          <a:p>
-            <a:pPr algn="l" marL="152400" indent="-152400">
-              <a:lnSpc>
-                <a:spcPct val="96000"/>
+              <a:t> — TNeGA · CC0-1.0 · 6.02 M parcels · </a:t>
+            </a:r>
+            <a:r>
+              <a:rPr sz="1100" b="0" i="0">
+                <a:solidFill>
+                  <a:srgbClr val="16324F"/>
+                </a:solidFill>
+                <a:latin typeface="Segoe UI"/>
+                <a:hlinkClick r:id="rId2"/>
+              </a:rPr>
+              <a:t>github.com/ramSeraph/indian_cadastrals</a:t>
+            </a:r>
+          </a:p>
+          <a:p>
+            <a:pPr marL="152400" indent="-152400" algn="l">
+              <a:lnSpc>
+                <a:spcPct val="94000"/>
               </a:lnSpc>
               <a:spcBef>
-                <a:spcPts val="400"/>
+                <a:spcPts val="200"/>
               </a:spcBef>
               <a:buClr>
                 <a:srgbClr val="16324F"/>
@@ -25277,40 +25291,41 @@
               <a:buChar char="•"/>
             </a:pPr>
             <a:r>
-              <a:rPr sz="1200" b="1" i="0">
+              <a:rPr sz="1100" b="1" i="0">
                 <a:solidFill>
                   <a:srgbClr val="1C1C1E"/>
                 </a:solidFill>
                 <a:latin typeface="Segoe UI"/>
               </a:rPr>
-              <a:t>NCSCM coastal cadastrals (MoEFCC)</a:t>
-            </a:r>
-            <a:r>
-              <a:rPr sz="1200" b="0" i="0">
+              <a:t>NCSCM coastal cadastrals</a:t>
+            </a:r>
+            <a:r>
+              <a:rPr sz="1100" b="0" i="0">
                 <a:solidFill>
                   <a:srgbClr val="3A4149"/>
                 </a:solidFill>
                 <a:latin typeface="Segoe UI"/>
               </a:rPr>
-              <a:t> — </a:t>
-            </a:r>
-            <a:r>
-              <a:rPr sz="1200" b="0" i="0">
-                <a:solidFill>
-                  <a:srgbClr val="3A4149"/>
-                </a:solidFill>
-                <a:latin typeface="Segoe UI"/>
-              </a:rPr>
-              <a:t>CC0-1.0 · 220,668 parcels</a:t>
-            </a:r>
-          </a:p>
-          <a:p>
-            <a:pPr algn="l" marL="152400" indent="-152400">
-              <a:lnSpc>
-                <a:spcPct val="96000"/>
+              <a:t> — MoEFCC · CC0-1.0 · 220,668 parcels · </a:t>
+            </a:r>
+            <a:r>
+              <a:rPr sz="1100" b="0" i="0">
+                <a:solidFill>
+                  <a:srgbClr val="16324F"/>
+                </a:solidFill>
+                <a:latin typeface="Segoe UI"/>
+                <a:hlinkClick r:id="rId3"/>
+              </a:rPr>
+              <a:t>ncscm.res.in</a:t>
+            </a:r>
+          </a:p>
+          <a:p>
+            <a:pPr marL="152400" indent="-152400" algn="l">
+              <a:lnSpc>
+                <a:spcPct val="94000"/>
               </a:lnSpc>
               <a:spcBef>
-                <a:spcPts val="400"/>
+                <a:spcPts val="200"/>
               </a:spcBef>
               <a:buClr>
                 <a:srgbClr val="16324F"/>
@@ -25319,7 +25334,7 @@
               <a:buChar char="•"/>
             </a:pPr>
             <a:r>
-              <a:rPr sz="1200" b="1" i="0">
+              <a:rPr sz="1100" b="1" i="0">
                 <a:solidFill>
                   <a:srgbClr val="1C1C1E"/>
                 </a:solidFill>
@@ -25328,31 +25343,32 @@
               <a:t>Greater Chennai Corporation footprints</a:t>
             </a:r>
             <a:r>
-              <a:rPr sz="1200" b="0" i="0">
+              <a:rPr sz="1100" b="0" i="0">
                 <a:solidFill>
                   <a:srgbClr val="3A4149"/>
                 </a:solidFill>
                 <a:latin typeface="Segoe UI"/>
               </a:rPr>
-              <a:t> — </a:t>
-            </a:r>
-            <a:r>
-              <a:rPr sz="1200" b="0" i="0">
-                <a:solidFill>
-                  <a:srgbClr val="3A4149"/>
-                </a:solidFill>
-                <a:latin typeface="Segoe UI"/>
-              </a:rPr>
-              <a:t>via TNGIS · CC0-1.0 · 964,053 footprints</a:t>
-            </a:r>
-          </a:p>
-          <a:p>
-            <a:pPr algn="l" marL="152400" indent="-152400">
-              <a:lnSpc>
-                <a:spcPct val="96000"/>
+              <a:t> — GCC via TNGIS · CC0-1.0 · 964,053 · </a:t>
+            </a:r>
+            <a:r>
+              <a:rPr sz="1100" b="0" i="0">
+                <a:solidFill>
+                  <a:srgbClr val="16324F"/>
+                </a:solidFill>
+                <a:latin typeface="Segoe UI"/>
+                <a:hlinkClick r:id="rId4"/>
+              </a:rPr>
+              <a:t>github.com/ramSeraph/indian_buildings</a:t>
+            </a:r>
+          </a:p>
+          <a:p>
+            <a:pPr marL="152400" indent="-152400" algn="l">
+              <a:lnSpc>
+                <a:spcPct val="94000"/>
               </a:lnSpc>
               <a:spcBef>
-                <a:spcPts val="400"/>
+                <a:spcPts val="200"/>
               </a:spcBef>
               <a:buClr>
                 <a:srgbClr val="16324F"/>
@@ -25361,40 +25377,41 @@
               <a:buChar char="•"/>
             </a:pPr>
             <a:r>
-              <a:rPr sz="1200" b="1" i="0">
+              <a:rPr sz="1100" b="1" i="0">
                 <a:solidFill>
                   <a:srgbClr val="1C1C1E"/>
                 </a:solidFill>
                 <a:latin typeface="Segoe UI"/>
               </a:rPr>
-              <a:t>Google Open Buildings v3, India 2023</a:t>
-            </a:r>
-            <a:r>
-              <a:rPr sz="1200" b="0" i="0">
+              <a:t>Google Open Buildings v3</a:t>
+            </a:r>
+            <a:r>
+              <a:rPr sz="1100" b="0" i="0">
                 <a:solidFill>
                   <a:srgbClr val="3A4149"/>
                 </a:solidFill>
                 <a:latin typeface="Segoe UI"/>
               </a:rPr>
-              <a:t> — </a:t>
-            </a:r>
-            <a:r>
-              <a:rPr sz="1200" b="0" i="0">
-                <a:solidFill>
-                  <a:srgbClr val="3A4149"/>
-                </a:solidFill>
-                <a:latin typeface="Segoe UI"/>
-              </a:rPr>
-              <a:t>CC-BY-4.0 · research.google/open-buildings</a:t>
-            </a:r>
-          </a:p>
-          <a:p>
-            <a:pPr algn="l" marL="152400" indent="-152400">
-              <a:lnSpc>
-                <a:spcPct val="96000"/>
+              <a:t> — CC-BY-4.0 / ODbL-1.0 · </a:t>
+            </a:r>
+            <a:r>
+              <a:rPr sz="1100" b="0" i="0">
+                <a:solidFill>
+                  <a:srgbClr val="16324F"/>
+                </a:solidFill>
+                <a:latin typeface="Segoe UI"/>
+                <a:hlinkClick r:id="rId5"/>
+              </a:rPr>
+              <a:t>sites.research.google/gr/open-buildings</a:t>
+            </a:r>
+          </a:p>
+          <a:p>
+            <a:pPr marL="152400" indent="-152400" algn="l">
+              <a:lnSpc>
+                <a:spcPct val="94000"/>
               </a:lnSpc>
               <a:spcBef>
-                <a:spcPts val="400"/>
+                <a:spcPts val="200"/>
               </a:spcBef>
               <a:buClr>
                 <a:srgbClr val="16324F"/>
@@ -25403,40 +25420,41 @@
               <a:buChar char="•"/>
             </a:pPr>
             <a:r>
-              <a:rPr sz="1200" b="1" i="0">
+              <a:rPr sz="1100" b="1" i="0">
                 <a:solidFill>
                   <a:srgbClr val="1C1C1E"/>
                 </a:solidFill>
                 <a:latin typeface="Segoe UI"/>
               </a:rPr>
-              <a:t>AMRUT / Bhuvan urban buildings (NRSC)</a:t>
-            </a:r>
-            <a:r>
-              <a:rPr sz="1200" b="0" i="0">
+              <a:t>AMRUT / Bhuvan urban buildings</a:t>
+            </a:r>
+            <a:r>
+              <a:rPr sz="1100" b="0" i="0">
                 <a:solidFill>
                   <a:srgbClr val="3A4149"/>
                 </a:solidFill>
                 <a:latin typeface="Segoe UI"/>
               </a:rPr>
-              <a:t> — </a:t>
-            </a:r>
-            <a:r>
-              <a:rPr sz="1200" b="0" i="0">
-                <a:solidFill>
-                  <a:srgbClr val="3A4149"/>
-                </a:solidFill>
-                <a:latin typeface="Segoe UI"/>
-              </a:rPr>
-              <a:t>bhuvan.nrsc.gov.in · CC0-1.0</a:t>
-            </a:r>
-          </a:p>
-          <a:p>
-            <a:pPr algn="l" marL="152400" indent="-152400">
-              <a:lnSpc>
-                <a:spcPct val="96000"/>
+              <a:t> — NRSC, ISRO · </a:t>
+            </a:r>
+            <a:r>
+              <a:rPr sz="1100" b="0" i="0">
+                <a:solidFill>
+                  <a:srgbClr val="16324F"/>
+                </a:solidFill>
+                <a:latin typeface="Segoe UI"/>
+                <a:hlinkClick r:id="rId6"/>
+              </a:rPr>
+              <a:t>bhuvan.nrsc.gov.in</a:t>
+            </a:r>
+          </a:p>
+          <a:p>
+            <a:pPr marL="152400" indent="-152400" algn="l">
+              <a:lnSpc>
+                <a:spcPct val="94000"/>
               </a:lnSpc>
               <a:spcBef>
-                <a:spcPts val="400"/>
+                <a:spcPts val="200"/>
               </a:spcBef>
               <a:buClr>
                 <a:srgbClr val="16324F"/>
@@ -25445,40 +25463,41 @@
               <a:buChar char="•"/>
             </a:pPr>
             <a:r>
-              <a:rPr sz="1200" b="1" i="0">
+              <a:rPr sz="1100" b="1" i="0">
                 <a:solidFill>
                   <a:srgbClr val="1C1C1E"/>
                 </a:solidFill>
                 <a:latin typeface="Segoe UI"/>
               </a:rPr>
-              <a:t>Geobasis NRW DOM1 calibrated float DSM</a:t>
-            </a:r>
-            <a:r>
-              <a:rPr sz="1200" b="0" i="0">
+              <a:t>Geobasis NRW DOM1 float DSM</a:t>
+            </a:r>
+            <a:r>
+              <a:rPr sz="1100" b="0" i="0">
                 <a:solidFill>
                   <a:srgbClr val="3A4149"/>
                 </a:solidFill>
                 <a:latin typeface="Segoe UI"/>
               </a:rPr>
-              <a:t> — </a:t>
-            </a:r>
-            <a:r>
-              <a:rPr sz="1200" b="0" i="0">
-                <a:solidFill>
-                  <a:srgbClr val="3A4149"/>
-                </a:solidFill>
-                <a:latin typeface="Segoe UI"/>
-              </a:rPr>
-              <a:t>dl-de/zero-2-0 · 1 m grid, orthometric</a:t>
-            </a:r>
-          </a:p>
-          <a:p>
-            <a:pPr algn="l" marL="152400" indent="-152400">
-              <a:lnSpc>
-                <a:spcPct val="96000"/>
+              <a:t> — Bezirksregierung Köln · dl-de/by-2-0 · 1 m grid · </a:t>
+            </a:r>
+            <a:r>
+              <a:rPr sz="1100" b="0" i="0">
+                <a:solidFill>
+                  <a:srgbClr val="16324F"/>
+                </a:solidFill>
+                <a:latin typeface="Segoe UI"/>
+                <a:hlinkClick r:id="rId7"/>
+              </a:rPr>
+              <a:t>opengeodata.nrw.de</a:t>
+            </a:r>
+          </a:p>
+          <a:p>
+            <a:pPr marL="152400" indent="-152400" algn="l">
+              <a:lnSpc>
+                <a:spcPct val="94000"/>
               </a:lnSpc>
               <a:spcBef>
-                <a:spcPts val="400"/>
+                <a:spcPts val="200"/>
               </a:spcBef>
               <a:buClr>
                 <a:srgbClr val="16324F"/>
@@ -25487,40 +25506,41 @@
               <a:buChar char="•"/>
             </a:pPr>
             <a:r>
-              <a:rPr sz="1200" b="1" i="0">
+              <a:rPr sz="1100" b="1" i="0">
                 <a:solidFill>
                   <a:srgbClr val="1C1C1E"/>
                 </a:solidFill>
                 <a:latin typeface="Segoe UI"/>
               </a:rPr>
-              <a:t>Local Government Directory (MoPR)</a:t>
-            </a:r>
-            <a:r>
-              <a:rPr sz="1200" b="0" i="0">
+              <a:t>Local Government Directory</a:t>
+            </a:r>
+            <a:r>
+              <a:rPr sz="1100" b="0" i="0">
                 <a:solidFill>
                   <a:srgbClr val="3A4149"/>
                 </a:solidFill>
                 <a:latin typeface="Segoe UI"/>
               </a:rPr>
-              <a:t> — </a:t>
-            </a:r>
-            <a:r>
-              <a:rPr sz="1200" b="0" i="0">
-                <a:solidFill>
-                  <a:srgbClr val="3A4149"/>
-                </a:solidFill>
-                <a:latin typeface="Segoe UI"/>
+              <a:t> — Ministry of Panchayati Raj · </a:t>
+            </a:r>
+            <a:r>
+              <a:rPr sz="1100" b="0" i="0">
+                <a:solidFill>
+                  <a:srgbClr val="16324F"/>
+                </a:solidFill>
+                <a:latin typeface="Segoe UI"/>
+                <a:hlinkClick r:id="rId8"/>
               </a:rPr>
               <a:t>lgdirectory.gov.in</a:t>
             </a:r>
           </a:p>
           <a:p>
-            <a:pPr algn="l" marL="152400" indent="-152400">
-              <a:lnSpc>
-                <a:spcPct val="96000"/>
+            <a:pPr marL="152400" indent="-152400" algn="l">
+              <a:lnSpc>
+                <a:spcPct val="94000"/>
               </a:lnSpc>
               <a:spcBef>
-                <a:spcPts val="400"/>
+                <a:spcPts val="200"/>
               </a:spcBef>
               <a:buClr>
                 <a:srgbClr val="16324F"/>
@@ -25529,40 +25549,41 @@
               <a:buChar char="•"/>
             </a:pPr>
             <a:r>
-              <a:rPr sz="1200" b="1" i="0">
+              <a:rPr sz="1100" b="1" i="0">
                 <a:solidFill>
                   <a:srgbClr val="1C1C1E"/>
                 </a:solidFill>
                 <a:latin typeface="Segoe UI"/>
               </a:rPr>
-              <a:t>OGC API - Features Part 1</a:t>
-            </a:r>
-            <a:r>
-              <a:rPr sz="1200" b="0" i="0">
+              <a:t>OGC API - Features Part 1: Core</a:t>
+            </a:r>
+            <a:r>
+              <a:rPr sz="1100" b="0" i="0">
                 <a:solidFill>
                   <a:srgbClr val="3A4149"/>
                 </a:solidFill>
                 <a:latin typeface="Segoe UI"/>
               </a:rPr>
-              <a:t> — </a:t>
-            </a:r>
-            <a:r>
-              <a:rPr sz="1200" b="0" i="0">
-                <a:solidFill>
-                  <a:srgbClr val="3A4149"/>
-                </a:solidFill>
-                <a:latin typeface="Segoe UI"/>
-              </a:rPr>
-              <a:t>ISO 19168-1 · GeoJSON RFC 7946 · CityJSON 1.1 · COG</a:t>
-            </a:r>
-          </a:p>
-          <a:p>
-            <a:pPr algn="l" marL="152400" indent="-152400">
-              <a:lnSpc>
-                <a:spcPct val="96000"/>
+              <a:t> — ISO 19168-1 · </a:t>
+            </a:r>
+            <a:r>
+              <a:rPr sz="1100" b="0" i="0">
+                <a:solidFill>
+                  <a:srgbClr val="16324F"/>
+                </a:solidFill>
+                <a:latin typeface="Segoe UI"/>
+                <a:hlinkClick r:id="rId9"/>
+              </a:rPr>
+              <a:t>ogcapi.ogc.org/features</a:t>
+            </a:r>
+          </a:p>
+          <a:p>
+            <a:pPr marL="152400" indent="-152400" algn="l">
+              <a:lnSpc>
+                <a:spcPct val="94000"/>
               </a:lnSpc>
               <a:spcBef>
-                <a:spcPts val="400"/>
+                <a:spcPts val="200"/>
               </a:spcBef>
               <a:buClr>
                 <a:srgbClr val="16324F"/>
@@ -25571,66 +25592,41 @@
               <a:buChar char="•"/>
             </a:pPr>
             <a:r>
-              <a:rPr sz="1200" b="1" i="0">
+              <a:rPr sz="1100" b="1" i="0">
                 <a:solidFill>
                   <a:srgbClr val="1C1C1E"/>
                 </a:solidFill>
                 <a:latin typeface="Segoe UI"/>
               </a:rPr>
-              <a:t>ISO 19107 · 19115 · 19157 · 19125</a:t>
-            </a:r>
-            <a:r>
-              <a:rPr sz="1200" b="0" i="0">
+              <a:t>Formats and quality standards</a:t>
+            </a:r>
+            <a:r>
+              <a:rPr sz="1100" b="0" i="0">
                 <a:solidFill>
                   <a:srgbClr val="3A4149"/>
                 </a:solidFill>
                 <a:latin typeface="Segoe UI"/>
               </a:rPr>
-              <a:t> — </a:t>
-            </a:r>
-            <a:r>
-              <a:rPr sz="1200" b="0" i="0">
-                <a:solidFill>
-                  <a:srgbClr val="3A4149"/>
-                </a:solidFill>
-                <a:latin typeface="Segoe UI"/>
-              </a:rPr>
-              <a:t>geometry · metadata · data quality · simple features</a:t>
-            </a:r>
-          </a:p>
-        </p:txBody>
-      </p:sp>
-      <p:sp>
-        <p:nvSpPr>
-          <p:cNvPr id="65" name="METHOD REFERENCES Body"/>
-          <p:cNvSpPr txBox="1"/>
-          <p:nvPr/>
-        </p:nvSpPr>
-        <p:spPr>
-          <a:xfrm>
-            <a:off x="6254496" y="6099048"/>
-            <a:ext cx="5486400" cy="3255264"/>
-          </a:xfrm>
-          <a:prstGeom prst="rect">
-            <a:avLst/>
-          </a:prstGeom>
-          <a:noFill/>
-          <a:ln>
-            <a:noFill/>
-          </a:ln>
-        </p:spPr>
-        <p:txBody>
-          <a:bodyPr wrap="square" anchor="t" lIns="101600" tIns="76200" rIns="76200" bIns="76200">
-            <a:spAutoFit/>
-          </a:bodyPr>
-          <a:lstStyle/>
-          <a:p>
-            <a:pPr algn="l" marL="152400" indent="-152400">
-              <a:lnSpc>
-                <a:spcPct val="96000"/>
+              <a:t> — GeoJSON · CityJSON 1.1 · COG · ISO 19107 / 19115 / 19157 · </a:t>
+            </a:r>
+            <a:r>
+              <a:rPr sz="1100" b="0" i="0">
+                <a:solidFill>
+                  <a:srgbClr val="16324F"/>
+                </a:solidFill>
+                <a:latin typeface="Segoe UI"/>
+                <a:hlinkClick r:id="rId10"/>
+              </a:rPr>
+              <a:t>rfc-editor.org/rfc/rfc7946</a:t>
+            </a:r>
+          </a:p>
+          <a:p>
+            <a:pPr marL="152400" indent="-152400" algn="l">
+              <a:lnSpc>
+                <a:spcPct val="94000"/>
               </a:lnSpc>
               <a:spcBef>
-                <a:spcPts val="400"/>
+                <a:spcPts val="200"/>
               </a:spcBef>
               <a:buClr>
                 <a:srgbClr val="16324F"/>
@@ -25639,40 +25635,57 @@
               <a:buChar char="•"/>
             </a:pPr>
             <a:r>
-              <a:rPr sz="1200" b="1" i="0">
+              <a:rPr sz="1100" b="1" i="0">
                 <a:solidFill>
                   <a:srgbClr val="1C1C1E"/>
                 </a:solidFill>
                 <a:latin typeface="Segoe UI"/>
               </a:rPr>
-              <a:t>Dempster (1967)</a:t>
-            </a:r>
-            <a:r>
-              <a:rPr sz="1200" b="0" i="0">
+              <a:t>Statute and programme</a:t>
+            </a:r>
+            <a:r>
+              <a:rPr sz="1100" b="0" i="0">
                 <a:solidFill>
                   <a:srgbClr val="3A4149"/>
                 </a:solidFill>
                 <a:latin typeface="Segoe UI"/>
               </a:rPr>
-              <a:t> — </a:t>
-            </a:r>
-            <a:r>
-              <a:rPr sz="1200" b="0" i="0">
-                <a:solidFill>
-                  <a:srgbClr val="3A4149"/>
-                </a:solidFill>
-                <a:latin typeface="Segoe UI"/>
-              </a:rPr>
-              <a:t>Upper and lower probabilities induced by a multivalued mapping. Ann. Math. Statist. 38(2):325–339. doi.org/10.1214/aoms/1177698950</a:t>
-            </a:r>
-          </a:p>
-          <a:p>
-            <a:pPr algn="l" marL="152400" indent="-152400">
-              <a:lnSpc>
-                <a:spcPct val="96000"/>
+              <a:t> — DILRMP · NAKSHA (DoLR) · NGP 2022 · DPDP Act 2023 · TN CDBR 2019 · SoI CORS</a:t>
+            </a:r>
+          </a:p>
+        </p:txBody>
+      </p:sp>
+      <p:sp>
+        <p:nvSpPr>
+          <p:cNvPr id="65" name="METHOD REFERENCES · EVIDENCE, MATCHING, LEARNING Body"/>
+          <p:cNvSpPr txBox="1"/>
+          <p:nvPr/>
+        </p:nvSpPr>
+        <p:spPr>
+          <a:xfrm>
+            <a:off x="6254496" y="6099048"/>
+            <a:ext cx="5486400" cy="3255264"/>
+          </a:xfrm>
+          <a:prstGeom prst="rect">
+            <a:avLst/>
+          </a:prstGeom>
+          <a:noFill/>
+          <a:ln>
+            <a:noFill/>
+          </a:ln>
+        </p:spPr>
+        <p:txBody>
+          <a:bodyPr wrap="square" lIns="101600" tIns="76200" rIns="76200" bIns="76200" anchor="t">
+            <a:spAutoFit/>
+          </a:bodyPr>
+          <a:lstStyle/>
+          <a:p>
+            <a:pPr marL="152400" indent="-152400" algn="l">
+              <a:lnSpc>
+                <a:spcPct val="94000"/>
               </a:lnSpc>
               <a:spcBef>
-                <a:spcPts val="400"/>
+                <a:spcPts val="200"/>
               </a:spcBef>
               <a:buClr>
                 <a:srgbClr val="16324F"/>
@@ -25681,40 +25694,41 @@
               <a:buChar char="•"/>
             </a:pPr>
             <a:r>
-              <a:rPr sz="1200" b="1" i="0">
+              <a:rPr sz="1100" b="1" i="0">
                 <a:solidFill>
                   <a:srgbClr val="1C1C1E"/>
                 </a:solidFill>
                 <a:latin typeface="Segoe UI"/>
               </a:rPr>
-              <a:t>Shafer (1976)</a:t>
-            </a:r>
-            <a:r>
-              <a:rPr sz="1200" b="0" i="0">
+              <a:t>Dempster (1967)</a:t>
+            </a:r>
+            <a:r>
+              <a:rPr sz="1100" b="0" i="0">
                 <a:solidFill>
                   <a:srgbClr val="3A4149"/>
                 </a:solidFill>
                 <a:latin typeface="Segoe UI"/>
               </a:rPr>
-              <a:t> — </a:t>
-            </a:r>
-            <a:r>
-              <a:rPr sz="1200" b="0" i="0">
-                <a:solidFill>
-                  <a:srgbClr val="3A4149"/>
-                </a:solidFill>
-                <a:latin typeface="Segoe UI"/>
-              </a:rPr>
-              <a:t>A Mathematical Theory of Evidence. Princeton University Press.</a:t>
-            </a:r>
-          </a:p>
-          <a:p>
-            <a:pPr algn="l" marL="152400" indent="-152400">
-              <a:lnSpc>
-                <a:spcPct val="96000"/>
+              <a:t> — Upper and lower probabilities induced by a multivalued mapping. Ann. Math. Statist. 38(2):325–339. </a:t>
+            </a:r>
+            <a:r>
+              <a:rPr sz="1100" b="0" i="0">
+                <a:solidFill>
+                  <a:srgbClr val="16324F"/>
+                </a:solidFill>
+                <a:latin typeface="Segoe UI"/>
+                <a:hlinkClick r:id="rId11"/>
+              </a:rPr>
+              <a:t>doi.org/10.1214/aoms/1177698950</a:t>
+            </a:r>
+          </a:p>
+          <a:p>
+            <a:pPr marL="152400" indent="-152400" algn="l">
+              <a:lnSpc>
+                <a:spcPct val="94000"/>
               </a:lnSpc>
               <a:spcBef>
-                <a:spcPts val="400"/>
+                <a:spcPts val="200"/>
               </a:spcBef>
               <a:buClr>
                 <a:srgbClr val="16324F"/>
@@ -25723,40 +25737,41 @@
               <a:buChar char="•"/>
             </a:pPr>
             <a:r>
-              <a:rPr sz="1200" b="1" i="0">
+              <a:rPr sz="1100" b="1" i="0">
                 <a:solidFill>
                   <a:srgbClr val="1C1C1E"/>
                 </a:solidFill>
                 <a:latin typeface="Segoe UI"/>
               </a:rPr>
-              <a:t>Kuhn (1955)</a:t>
-            </a:r>
-            <a:r>
-              <a:rPr sz="1200" b="0" i="0">
+              <a:t>Shafer (1976)</a:t>
+            </a:r>
+            <a:r>
+              <a:rPr sz="1100" b="0" i="0">
                 <a:solidFill>
                   <a:srgbClr val="3A4149"/>
                 </a:solidFill>
                 <a:latin typeface="Segoe UI"/>
               </a:rPr>
-              <a:t> — </a:t>
-            </a:r>
-            <a:r>
-              <a:rPr sz="1200" b="0" i="0">
-                <a:solidFill>
-                  <a:srgbClr val="3A4149"/>
-                </a:solidFill>
-                <a:latin typeface="Segoe UI"/>
-              </a:rPr>
-              <a:t>The Hungarian method for the assignment problem. Naval Research Logistics Quarterly 2:83–97. doi.org/10.1002/nav.3800020109</a:t>
-            </a:r>
-          </a:p>
-          <a:p>
-            <a:pPr algn="l" marL="152400" indent="-152400">
-              <a:lnSpc>
-                <a:spcPct val="96000"/>
+              <a:t> — A Mathematical Theory of Evidence. Princeton University Press. </a:t>
+            </a:r>
+            <a:r>
+              <a:rPr sz="1100" b="0" i="0">
+                <a:solidFill>
+                  <a:srgbClr val="16324F"/>
+                </a:solidFill>
+                <a:latin typeface="Segoe UI"/>
+                <a:hlinkClick r:id="rId12"/>
+              </a:rPr>
+              <a:t>jstor.org/stable/j.ctv10vm1qb</a:t>
+            </a:r>
+          </a:p>
+          <a:p>
+            <a:pPr marL="152400" indent="-152400" algn="l">
+              <a:lnSpc>
+                <a:spcPct val="94000"/>
               </a:lnSpc>
               <a:spcBef>
-                <a:spcPts val="400"/>
+                <a:spcPts val="200"/>
               </a:spcBef>
               <a:buClr>
                 <a:srgbClr val="16324F"/>
@@ -25765,40 +25780,41 @@
               <a:buChar char="•"/>
             </a:pPr>
             <a:r>
-              <a:rPr sz="1200" b="1" i="0">
+              <a:rPr sz="1100" b="1" i="0">
                 <a:solidFill>
                   <a:srgbClr val="1C1C1E"/>
                 </a:solidFill>
                 <a:latin typeface="Segoe UI"/>
               </a:rPr>
-              <a:t>Ratner et al. (2017)</a:t>
-            </a:r>
-            <a:r>
-              <a:rPr sz="1200" b="0" i="0">
+              <a:t>Ratner, Bach, Ehrenberg, Fries, Wu &amp; Ré (2017)</a:t>
+            </a:r>
+            <a:r>
+              <a:rPr sz="1100" b="0" i="0">
                 <a:solidFill>
                   <a:srgbClr val="3A4149"/>
                 </a:solidFill>
                 <a:latin typeface="Segoe UI"/>
               </a:rPr>
-              <a:t> — </a:t>
-            </a:r>
-            <a:r>
-              <a:rPr sz="1200" b="0" i="0">
-                <a:solidFill>
-                  <a:srgbClr val="3A4149"/>
-                </a:solidFill>
-                <a:latin typeface="Segoe UI"/>
-              </a:rPr>
-              <a:t>Snorkel: rapid training data creation with weak supervision. PVLDB 11(3):269–282. doi.org/10.14778/3157794.3157797</a:t>
-            </a:r>
-          </a:p>
-          <a:p>
-            <a:pPr algn="l" marL="152400" indent="-152400">
-              <a:lnSpc>
-                <a:spcPct val="96000"/>
+              <a:t> — Snorkel: rapid training data creation with weak supervision. PVLDB 11(3):269–282. </a:t>
+            </a:r>
+            <a:r>
+              <a:rPr sz="1100" b="0" i="0">
+                <a:solidFill>
+                  <a:srgbClr val="16324F"/>
+                </a:solidFill>
+                <a:latin typeface="Segoe UI"/>
+                <a:hlinkClick r:id="rId13"/>
+              </a:rPr>
+              <a:t>doi.org/10.14778/3157794.3157797</a:t>
+            </a:r>
+          </a:p>
+          <a:p>
+            <a:pPr marL="152400" indent="-152400" algn="l">
+              <a:lnSpc>
+                <a:spcPct val="94000"/>
               </a:lnSpc>
               <a:spcBef>
-                <a:spcPts val="400"/>
+                <a:spcPts val="200"/>
               </a:spcBef>
               <a:buClr>
                 <a:srgbClr val="16324F"/>
@@ -25807,7 +25823,7 @@
               <a:buChar char="•"/>
             </a:pPr>
             <a:r>
-              <a:rPr sz="1200" b="1" i="0">
+              <a:rPr sz="1100" b="1" i="0">
                 <a:solidFill>
                   <a:srgbClr val="1C1C1E"/>
                 </a:solidFill>
@@ -25816,57 +25832,32 @@
               <a:t>Friedman (2001)</a:t>
             </a:r>
             <a:r>
-              <a:rPr sz="1200" b="0" i="0">
+              <a:rPr sz="1100" b="0" i="0">
                 <a:solidFill>
                   <a:srgbClr val="3A4149"/>
                 </a:solidFill>
                 <a:latin typeface="Segoe UI"/>
               </a:rPr>
-              <a:t> — </a:t>
-            </a:r>
-            <a:r>
-              <a:rPr sz="1200" b="0" i="0">
-                <a:solidFill>
-                  <a:srgbClr val="3A4149"/>
-                </a:solidFill>
-                <a:latin typeface="Segoe UI"/>
-              </a:rPr>
-              <a:t>Greedy function approximation: a gradient boosting machine. Ann. Statist. 29(5):1189–1232.</a:t>
-            </a:r>
-          </a:p>
-        </p:txBody>
-      </p:sp>
-      <p:sp>
-        <p:nvSpPr>
-          <p:cNvPr id="66" name="METHOD &amp; STATUTORY REFERENCES (continued) Body"/>
-          <p:cNvSpPr txBox="1"/>
-          <p:nvPr/>
-        </p:nvSpPr>
-        <p:spPr>
-          <a:xfrm>
-            <a:off x="12143232" y="6099048"/>
-            <a:ext cx="5788152" cy="3255264"/>
-          </a:xfrm>
-          <a:prstGeom prst="rect">
-            <a:avLst/>
-          </a:prstGeom>
-          <a:noFill/>
-          <a:ln>
-            <a:noFill/>
-          </a:ln>
-        </p:spPr>
-        <p:txBody>
-          <a:bodyPr wrap="square" anchor="t" lIns="101600" tIns="76200" rIns="76200" bIns="76200">
-            <a:spAutoFit/>
-          </a:bodyPr>
-          <a:lstStyle/>
-          <a:p>
-            <a:pPr algn="l" marL="152400" indent="-152400">
-              <a:lnSpc>
-                <a:spcPct val="96000"/>
+              <a:t> — Greedy function approximation: a gradient boosting machine. Ann. Statist. 29(5):1189–1232. </a:t>
+            </a:r>
+            <a:r>
+              <a:rPr sz="1100" b="0" i="0">
+                <a:solidFill>
+                  <a:srgbClr val="16324F"/>
+                </a:solidFill>
+                <a:latin typeface="Segoe UI"/>
+                <a:hlinkClick r:id="rId14"/>
+              </a:rPr>
+              <a:t>doi.org/10.1214/aos/1013203451</a:t>
+            </a:r>
+          </a:p>
+          <a:p>
+            <a:pPr marL="152400" indent="-152400" algn="l">
+              <a:lnSpc>
+                <a:spcPct val="94000"/>
               </a:lnSpc>
               <a:spcBef>
-                <a:spcPts val="400"/>
+                <a:spcPts val="200"/>
               </a:spcBef>
               <a:buClr>
                 <a:srgbClr val="16324F"/>
@@ -25875,40 +25866,41 @@
               <a:buChar char="•"/>
             </a:pPr>
             <a:r>
-              <a:rPr sz="1200" b="1" i="0">
+              <a:rPr sz="1100" b="1" i="0">
                 <a:solidFill>
                   <a:srgbClr val="1C1C1E"/>
                 </a:solidFill>
                 <a:latin typeface="Segoe UI"/>
               </a:rPr>
-              <a:t>Zhang et al. (2003)</a:t>
-            </a:r>
-            <a:r>
-              <a:rPr sz="1200" b="0" i="0">
+              <a:t>Jonker &amp; Volgenant (1987)</a:t>
+            </a:r>
+            <a:r>
+              <a:rPr sz="1100" b="0" i="0">
                 <a:solidFill>
                   <a:srgbClr val="3A4149"/>
                 </a:solidFill>
                 <a:latin typeface="Segoe UI"/>
               </a:rPr>
-              <a:t> — </a:t>
-            </a:r>
-            <a:r>
-              <a:rPr sz="1200" b="0" i="0">
-                <a:solidFill>
-                  <a:srgbClr val="3A4149"/>
-                </a:solidFill>
-                <a:latin typeface="Segoe UI"/>
-              </a:rPr>
-              <a:t>A progressive morphological filter for removing nonground measurements from airborne LiDAR. IEEE TGRS 41(4):872–882. doi.org/10.1109/TGRS.2003.810682</a:t>
-            </a:r>
-          </a:p>
-          <a:p>
-            <a:pPr algn="l" marL="152400" indent="-152400">
-              <a:lnSpc>
-                <a:spcPct val="96000"/>
+              <a:t> — A shortest augmenting path algorithm for dense and sparse linear assignment problems. Computing 38(4):325–340. </a:t>
+            </a:r>
+            <a:r>
+              <a:rPr sz="1100" b="0" i="0">
+                <a:solidFill>
+                  <a:srgbClr val="16324F"/>
+                </a:solidFill>
+                <a:latin typeface="Segoe UI"/>
+                <a:hlinkClick r:id="rId15"/>
+              </a:rPr>
+              <a:t>doi.org/10.1007/BF02278710</a:t>
+            </a:r>
+          </a:p>
+          <a:p>
+            <a:pPr marL="152400" indent="-152400" algn="l">
+              <a:lnSpc>
+                <a:spcPct val="94000"/>
               </a:lnSpc>
               <a:spcBef>
-                <a:spcPts val="400"/>
+                <a:spcPts val="200"/>
               </a:spcBef>
               <a:buClr>
                 <a:srgbClr val="16324F"/>
@@ -25917,40 +25909,67 @@
               <a:buChar char="•"/>
             </a:pPr>
             <a:r>
-              <a:rPr sz="1200" b="1" i="0">
+              <a:rPr sz="1100" b="1" i="0">
                 <a:solidFill>
                   <a:srgbClr val="1C1C1E"/>
                 </a:solidFill>
                 <a:latin typeface="Segoe UI"/>
               </a:rPr>
-              <a:t>Zitová &amp; Flusser (2003)</a:t>
-            </a:r>
-            <a:r>
-              <a:rPr sz="1200" b="0" i="0">
+              <a:t>Crouse (2016)</a:t>
+            </a:r>
+            <a:r>
+              <a:rPr sz="1100" b="0" i="0">
                 <a:solidFill>
                   <a:srgbClr val="3A4149"/>
                 </a:solidFill>
                 <a:latin typeface="Segoe UI"/>
               </a:rPr>
-              <a:t> — </a:t>
-            </a:r>
-            <a:r>
-              <a:rPr sz="1200" b="0" i="0">
-                <a:solidFill>
-                  <a:srgbClr val="3A4149"/>
-                </a:solidFill>
-                <a:latin typeface="Segoe UI"/>
-              </a:rPr>
-              <a:t>Image registration methods: a survey. Image and Vision Computing 21(11):977–1000. doi.org/10.1016/S0262-8856(03)00137-9</a:t>
-            </a:r>
-          </a:p>
-          <a:p>
-            <a:pPr algn="l" marL="152400" indent="-152400">
-              <a:lnSpc>
-                <a:spcPct val="96000"/>
+              <a:t> — On implementing 2D rectangular assignment algorithms. IEEE Trans. Aerosp. Electron. Syst. 52(4):1679–1696. </a:t>
+            </a:r>
+            <a:r>
+              <a:rPr sz="1100" b="0" i="0">
+                <a:solidFill>
+                  <a:srgbClr val="16324F"/>
+                </a:solidFill>
+                <a:latin typeface="Segoe UI"/>
+                <a:hlinkClick r:id="rId16"/>
+              </a:rPr>
+              <a:t>doi.org/10.1109/TAES.2016.140952</a:t>
+            </a:r>
+          </a:p>
+        </p:txBody>
+      </p:sp>
+      <p:sp>
+        <p:nvSpPr>
+          <p:cNvPr id="66" name="METHOD REFERENCES · GEODESY, RASTER, QUALITY, INTEGRITY Body"/>
+          <p:cNvSpPr txBox="1"/>
+          <p:nvPr/>
+        </p:nvSpPr>
+        <p:spPr>
+          <a:xfrm>
+            <a:off x="12143232" y="6099048"/>
+            <a:ext cx="5788152" cy="3255264"/>
+          </a:xfrm>
+          <a:prstGeom prst="rect">
+            <a:avLst/>
+          </a:prstGeom>
+          <a:noFill/>
+          <a:ln>
+            <a:noFill/>
+          </a:ln>
+        </p:spPr>
+        <p:txBody>
+          <a:bodyPr wrap="square" lIns="101600" tIns="76200" rIns="76200" bIns="76200" anchor="t">
+            <a:spAutoFit/>
+          </a:bodyPr>
+          <a:lstStyle/>
+          <a:p>
+            <a:pPr marL="152400" indent="-152400" algn="l">
+              <a:lnSpc>
+                <a:spcPct val="94000"/>
               </a:lnSpc>
               <a:spcBef>
-                <a:spcPts val="400"/>
+                <a:spcPts val="200"/>
               </a:spcBef>
               <a:buClr>
                 <a:srgbClr val="16324F"/>
@@ -25959,7 +25978,7 @@
               <a:buChar char="•"/>
             </a:pPr>
             <a:r>
-              <a:rPr sz="1200" b="1" i="0">
+              <a:rPr sz="1100" b="1" i="0">
                 <a:solidFill>
                   <a:srgbClr val="1C1C1E"/>
                 </a:solidFill>
@@ -25968,31 +25987,32 @@
               <a:t>Baarda (1968)</a:t>
             </a:r>
             <a:r>
-              <a:rPr sz="1200" b="0" i="0">
+              <a:rPr sz="1100" b="0" i="0">
                 <a:solidFill>
                   <a:srgbClr val="3A4149"/>
                 </a:solidFill>
                 <a:latin typeface="Segoe UI"/>
               </a:rPr>
-              <a:t> — </a:t>
-            </a:r>
-            <a:r>
-              <a:rPr sz="1200" b="0" i="0">
-                <a:solidFill>
-                  <a:srgbClr val="3A4149"/>
-                </a:solidFill>
-                <a:latin typeface="Segoe UI"/>
-              </a:rPr>
-              <a:t>A testing procedure for use in geodetic networks. Netherlands Geodetic Commission, Publ. on Geodesy 2(5).</a:t>
-            </a:r>
-          </a:p>
-          <a:p>
-            <a:pPr algn="l" marL="152400" indent="-152400">
-              <a:lnSpc>
-                <a:spcPct val="96000"/>
+              <a:t> — A testing procedure for use in geodetic networks. Netherlands Geodetic Commission, Publications on Geodesy 9. </a:t>
+            </a:r>
+            <a:r>
+              <a:rPr sz="1100" b="0" i="0">
+                <a:solidFill>
+                  <a:srgbClr val="16324F"/>
+                </a:solidFill>
+                <a:latin typeface="Segoe UI"/>
+                <a:hlinkClick r:id="rId17"/>
+              </a:rPr>
+              <a:t>doi.org/10.54419/t8w4sg</a:t>
+            </a:r>
+          </a:p>
+          <a:p>
+            <a:pPr marL="152400" indent="-152400" algn="l">
+              <a:lnSpc>
+                <a:spcPct val="94000"/>
               </a:lnSpc>
               <a:spcBef>
-                <a:spcPts val="400"/>
+                <a:spcPts val="200"/>
               </a:spcBef>
               <a:buClr>
                 <a:srgbClr val="16324F"/>
@@ -26001,31 +26021,247 @@
               <a:buChar char="•"/>
             </a:pPr>
             <a:r>
-              <a:rPr sz="1200" b="1" i="0">
+              <a:rPr sz="1100" b="1" i="0">
                 <a:solidFill>
                   <a:srgbClr val="1C1C1E"/>
                 </a:solidFill>
                 <a:latin typeface="Segoe UI"/>
               </a:rPr>
-              <a:t>Programme &amp; statute</a:t>
-            </a:r>
-            <a:r>
-              <a:rPr sz="1200" b="0" i="0">
+              <a:t>Horn (1987)</a:t>
+            </a:r>
+            <a:r>
+              <a:rPr sz="1100" b="0" i="0">
                 <a:solidFill>
                   <a:srgbClr val="3A4149"/>
                 </a:solidFill>
                 <a:latin typeface="Segoe UI"/>
               </a:rPr>
-              <a:t> — </a:t>
-            </a:r>
-            <a:r>
-              <a:rPr sz="1200" b="0" i="0">
+              <a:t> — Closed-form solution of absolute orientation using unit quaternions. J. Opt. Soc. Am. A 4(4):629–642. </a:t>
+            </a:r>
+            <a:r>
+              <a:rPr sz="1100" b="0" i="0">
+                <a:solidFill>
+                  <a:srgbClr val="16324F"/>
+                </a:solidFill>
+                <a:latin typeface="Segoe UI"/>
+                <a:hlinkClick r:id="rId18"/>
+              </a:rPr>
+              <a:t>doi.org/10.1364/JOSAA.4.000629</a:t>
+            </a:r>
+          </a:p>
+          <a:p>
+            <a:pPr marL="152400" indent="-152400" algn="l">
+              <a:lnSpc>
+                <a:spcPct val="94000"/>
+              </a:lnSpc>
+              <a:spcBef>
+                <a:spcPts val="200"/>
+              </a:spcBef>
+              <a:buClr>
+                <a:srgbClr val="16324F"/>
+              </a:buClr>
+              <a:buFont typeface="Arial"/>
+              <a:buChar char="•"/>
+            </a:pPr>
+            <a:r>
+              <a:rPr sz="1100" b="1" i="0">
+                <a:solidFill>
+                  <a:srgbClr val="1C1C1E"/>
+                </a:solidFill>
+                <a:latin typeface="Segoe UI"/>
+              </a:rPr>
+              <a:t>Zhang, Chen, Whitman, Shyu, Yan &amp; Zhang (2003)</a:t>
+            </a:r>
+            <a:r>
+              <a:rPr sz="1100" b="0" i="0">
                 <a:solidFill>
                   <a:srgbClr val="3A4149"/>
                 </a:solidFill>
                 <a:latin typeface="Segoe UI"/>
               </a:rPr>
-              <a:t>DILRMP · NAKSHA (DoLR) · National Geospatial Policy 2022 · DPDP Act 2023 · TN CDBR 2019 · TN Land Encroachment Act 1905 · Registration Act 1908 · Survey of India CORS</a:t>
+              <a:t> — A progressive morphological filter for removing nonground measurements from airborne LIDAR data. IEEE TGRS 41(4):872–882. </a:t>
+            </a:r>
+            <a:r>
+              <a:rPr sz="1100" b="0" i="0">
+                <a:solidFill>
+                  <a:srgbClr val="16324F"/>
+                </a:solidFill>
+                <a:latin typeface="Segoe UI"/>
+                <a:hlinkClick r:id="rId19"/>
+              </a:rPr>
+              <a:t>doi.org/10.1109/TGRS.2003.810682</a:t>
+            </a:r>
+          </a:p>
+          <a:p>
+            <a:pPr marL="152400" indent="-152400" algn="l">
+              <a:lnSpc>
+                <a:spcPct val="94000"/>
+              </a:lnSpc>
+              <a:spcBef>
+                <a:spcPts val="200"/>
+              </a:spcBef>
+              <a:buClr>
+                <a:srgbClr val="16324F"/>
+              </a:buClr>
+              <a:buFont typeface="Arial"/>
+              <a:buChar char="•"/>
+            </a:pPr>
+            <a:r>
+              <a:rPr sz="1100" b="1" i="0">
+                <a:solidFill>
+                  <a:srgbClr val="1C1C1E"/>
+                </a:solidFill>
+                <a:latin typeface="Segoe UI"/>
+              </a:rPr>
+              <a:t>Zitová &amp; Flusser (2003)</a:t>
+            </a:r>
+            <a:r>
+              <a:rPr sz="1100" b="0" i="0">
+                <a:solidFill>
+                  <a:srgbClr val="3A4149"/>
+                </a:solidFill>
+                <a:latin typeface="Segoe UI"/>
+              </a:rPr>
+              <a:t> — Image registration methods: a survey. Image and Vision Computing 21(11):977–1000. </a:t>
+            </a:r>
+            <a:r>
+              <a:rPr sz="1100" b="0" i="0">
+                <a:solidFill>
+                  <a:srgbClr val="16324F"/>
+                </a:solidFill>
+                <a:latin typeface="Segoe UI"/>
+                <a:hlinkClick r:id="rId20"/>
+              </a:rPr>
+              <a:t>doi.org/10.1016/S0262-8856(03)00137-9</a:t>
+            </a:r>
+          </a:p>
+          <a:p>
+            <a:pPr marL="152400" indent="-152400" algn="l">
+              <a:lnSpc>
+                <a:spcPct val="94000"/>
+              </a:lnSpc>
+              <a:spcBef>
+                <a:spcPts val="200"/>
+              </a:spcBef>
+              <a:buClr>
+                <a:srgbClr val="16324F"/>
+              </a:buClr>
+              <a:buFont typeface="Arial"/>
+              <a:buChar char="•"/>
+            </a:pPr>
+            <a:r>
+              <a:rPr sz="1100" b="1" i="0">
+                <a:solidFill>
+                  <a:srgbClr val="1C1C1E"/>
+                </a:solidFill>
+                <a:latin typeface="Segoe UI"/>
+              </a:rPr>
+              <a:t>Foroosh, Zerubia &amp; Berthod (2002)</a:t>
+            </a:r>
+            <a:r>
+              <a:rPr sz="1100" b="0" i="0">
+                <a:solidFill>
+                  <a:srgbClr val="3A4149"/>
+                </a:solidFill>
+                <a:latin typeface="Segoe UI"/>
+              </a:rPr>
+              <a:t> — Extension of phase correlation to subpixel registration. IEEE Trans. Image Process. 11(3):188–200. </a:t>
+            </a:r>
+            <a:r>
+              <a:rPr sz="1100" b="0" i="0">
+                <a:solidFill>
+                  <a:srgbClr val="16324F"/>
+                </a:solidFill>
+                <a:latin typeface="Segoe UI"/>
+                <a:hlinkClick r:id="rId21"/>
+              </a:rPr>
+              <a:t>doi.org/10.1109/83.988953</a:t>
+            </a:r>
+          </a:p>
+          <a:p>
+            <a:pPr marL="152400" indent="-152400" algn="l">
+              <a:lnSpc>
+                <a:spcPct val="94000"/>
+              </a:lnSpc>
+              <a:spcBef>
+                <a:spcPts val="200"/>
+              </a:spcBef>
+              <a:buClr>
+                <a:srgbClr val="16324F"/>
+              </a:buClr>
+              <a:buFont typeface="Arial"/>
+              <a:buChar char="•"/>
+            </a:pPr>
+            <a:r>
+              <a:rPr sz="1100" b="1" i="0">
+                <a:solidFill>
+                  <a:srgbClr val="1C1C1E"/>
+                </a:solidFill>
+                <a:latin typeface="Segoe UI"/>
+              </a:rPr>
+              <a:t>Moran (1950)</a:t>
+            </a:r>
+            <a:r>
+              <a:rPr sz="1100" b="0" i="0">
+                <a:solidFill>
+                  <a:srgbClr val="3A4149"/>
+                </a:solidFill>
+                <a:latin typeface="Segoe UI"/>
+              </a:rPr>
+              <a:t> — Notes on continuous stochastic phenomena. Biometrika 37(1–2):17–23. </a:t>
+            </a:r>
+            <a:r>
+              <a:rPr sz="1100" b="0" i="0">
+                <a:solidFill>
+                  <a:srgbClr val="16324F"/>
+                </a:solidFill>
+                <a:latin typeface="Segoe UI"/>
+                <a:hlinkClick r:id="rId22"/>
+              </a:rPr>
+              <a:t>doi.org/10.1093/biomet/37.1-2.17</a:t>
+            </a:r>
+          </a:p>
+          <a:p>
+            <a:pPr marL="152400" indent="-152400" algn="l">
+              <a:lnSpc>
+                <a:spcPct val="94000"/>
+              </a:lnSpc>
+              <a:spcBef>
+                <a:spcPts val="200"/>
+              </a:spcBef>
+              <a:buClr>
+                <a:srgbClr val="16324F"/>
+              </a:buClr>
+              <a:buFont typeface="Arial"/>
+              <a:buChar char="•"/>
+            </a:pPr>
+            <a:r>
+              <a:rPr sz="1100" b="1" i="0">
+                <a:solidFill>
+                  <a:srgbClr val="1C1C1E"/>
+                </a:solidFill>
+                <a:latin typeface="Segoe UI"/>
+              </a:rPr>
+              <a:t>Merkle (1988)</a:t>
+            </a:r>
+            <a:r>
+              <a:rPr sz="1100" b="0" i="0">
+                <a:solidFill>
+                  <a:srgbClr val="3A4149"/>
+                </a:solidFill>
+                <a:latin typeface="Segoe UI"/>
+              </a:rPr>
+              <a:t> — A digital signature based on a conventional encryption function. CRYPTO ’87, LNCS 293:369–378. </a:t>
+            </a:r>
+            <a:r>
+              <a:rPr sz="1100" b="0" i="0">
+                <a:solidFill>
+                  <a:srgbClr val="16324F"/>
+                </a:solidFill>
+                <a:latin typeface="Segoe UI"/>
+                <a:hlinkClick r:id="rId23"/>
+              </a:rPr>
+              <a:t>doi.org/10.1007/3-540-48184-2_32</a:t>
             </a:r>
           </a:p>
         </p:txBody>
@@ -26042,7 +26278,7 @@
           <a:blip>
             <a:extLst>
               <a:ext uri="{96DAC541-7B7A-43D3-8B79-37D633B846F1}">
-                <asvg:svgBlip xmlns:asvg="http://schemas.microsoft.com/office/drawing/2016/SVG/main" r:embed="rId2"/>
+                <asvg:svgBlip xmlns:asvg="http://schemas.microsoft.com/office/drawing/2016/SVG/main" r:embed="rId24"/>
               </a:ext>
             </a:extLst>
           </a:blip>
@@ -26072,7 +26308,7 @@
           <a:blip>
             <a:extLst>
               <a:ext uri="{96DAC541-7B7A-43D3-8B79-37D633B846F1}">
-                <asvg:svgBlip xmlns:asvg="http://schemas.microsoft.com/office/drawing/2016/SVG/main" r:embed="rId3"/>
+                <asvg:svgBlip xmlns:asvg="http://schemas.microsoft.com/office/drawing/2016/SVG/main" r:embed="rId25"/>
               </a:ext>
             </a:extLst>
           </a:blip>
@@ -26102,7 +26338,7 @@
           <a:blip>
             <a:extLst>
               <a:ext uri="{96DAC541-7B7A-43D3-8B79-37D633B846F1}">
-                <asvg:svgBlip xmlns:asvg="http://schemas.microsoft.com/office/drawing/2016/SVG/main" r:embed="rId4"/>
+                <asvg:svgBlip xmlns:asvg="http://schemas.microsoft.com/office/drawing/2016/SVG/main" r:embed="rId26"/>
               </a:ext>
             </a:extLst>
           </a:blip>
@@ -26122,7 +26358,7 @@
       </p:pic>
       <p:grpSp>
         <p:nvGrpSpPr>
-          <p:cNvPr id="2" name="Group 9">
+          <p:cNvPr id="67" name="Group 9">
             <a:extLst>
               <a:ext uri="{FF2B5EF4-FFF2-40B4-BE49-F238E27FC236}">
                 <a16:creationId xmlns:a16="http://schemas.microsoft.com/office/drawing/2014/main" id="{4FFE2F07-F3E8-4A10-2257-B21F0BEE938A}"/>
@@ -26142,7 +26378,7 @@
         </p:grpSpPr>
         <p:sp>
           <p:nvSpPr>
-            <p:cNvPr id="3" name="Freeform 10">
+            <p:cNvPr id="68" name="Freeform 10">
               <a:extLst>
                 <a:ext uri="{FF2B5EF4-FFF2-40B4-BE49-F238E27FC236}">
                   <a16:creationId xmlns:a16="http://schemas.microsoft.com/office/drawing/2014/main" id="{F1502E01-F11C-3B9A-4CF8-EB47F28D2793}"/>
@@ -26185,7 +26421,7 @@
               </a:pathLst>
             </a:custGeom>
             <a:blipFill>
-              <a:blip r:embed="rId5"/>
+              <a:blip r:embed="rId27"/>
               <a:stretch>
                 <a:fillRect b="1"/>
               </a:stretch>
